--- a/cursos/recursos/formacion-ajedrez/02-reglas-de-competicion.pptx
+++ b/cursos/recursos/formacion-ajedrez/02-reglas-de-competicion.pptx
@@ -10,6 +10,30 @@
     <p:sldId id="258" r:id="rId9"/>
     <p:sldId id="259" r:id="rId10"/>
     <p:sldId id="260" r:id="rId11"/>
+    <p:sldId id="261" r:id="rId12"/>
+    <p:sldId id="262" r:id="rId13"/>
+    <p:sldId id="263" r:id="rId14"/>
+    <p:sldId id="264" r:id="rId15"/>
+    <p:sldId id="265" r:id="rId16"/>
+    <p:sldId id="266" r:id="rId17"/>
+    <p:sldId id="267" r:id="rId18"/>
+    <p:sldId id="268" r:id="rId19"/>
+    <p:sldId id="269" r:id="rId20"/>
+    <p:sldId id="270" r:id="rId21"/>
+    <p:sldId id="271" r:id="rId22"/>
+    <p:sldId id="272" r:id="rId23"/>
+    <p:sldId id="273" r:id="rId24"/>
+    <p:sldId id="274" r:id="rId25"/>
+    <p:sldId id="275" r:id="rId26"/>
+    <p:sldId id="276" r:id="rId27"/>
+    <p:sldId id="277" r:id="rId28"/>
+    <p:sldId id="278" r:id="rId29"/>
+    <p:sldId id="279" r:id="rId30"/>
+    <p:sldId id="280" r:id="rId31"/>
+    <p:sldId id="281" r:id="rId32"/>
+    <p:sldId id="282" r:id="rId33"/>
+    <p:sldId id="283" r:id="rId34"/>
+    <p:sldId id="284" r:id="rId35"/>
   </p:sldIdLst>
   <p:sldSz cx="12191695" cy="6858000" type="screen4x3"/>
   <p:notesSz cx="6858000" cy="9144000"/>
@@ -3481,6 +3505,2211 @@
 </p:sld>
 </file>
 
+<file path=ppt/slides/slide10.xml><?xml version="1.0" encoding="utf-8"?>
+<p:sld xmlns:a="http://schemas.openxmlformats.org/drawingml/2006/main" xmlns:p="http://schemas.openxmlformats.org/presentationml/2006/main" xmlns:r="http://schemas.openxmlformats.org/officeDocument/2006/relationships">
+  <p:cSld>
+    <p:spTree>
+      <p:nvGrpSpPr>
+        <p:cNvPr id="1" name=""/>
+        <p:cNvGrpSpPr/>
+        <p:nvPr/>
+      </p:nvGrpSpPr>
+      <p:grpSpPr/>
+      <p:sp>
+        <p:nvSpPr>
+          <p:cNvPr id="2" name="Rectangle 1"/>
+          <p:cNvSpPr/>
+          <p:nvPr/>
+        </p:nvSpPr>
+        <p:spPr>
+          <a:xfrm>
+            <a:off x="0" y="0"/>
+            <a:ext cx="12191695" cy="6858000"/>
+          </a:xfrm>
+          <a:prstGeom prst="rect">
+            <a:avLst/>
+          </a:prstGeom>
+          <a:solidFill>
+            <a:srgbClr val="102A43"/>
+          </a:solidFill>
+          <a:ln>
+            <a:noFill/>
+          </a:ln>
+          <a:effectLst/>
+        </p:spPr>
+        <p:style>
+          <a:lnRef idx="1">
+            <a:schemeClr val="accent1"/>
+          </a:lnRef>
+          <a:fillRef idx="3">
+            <a:schemeClr val="accent1"/>
+          </a:fillRef>
+          <a:effectRef idx="2">
+            <a:schemeClr val="accent1"/>
+          </a:effectRef>
+          <a:fontRef idx="minor">
+            <a:schemeClr val="lt1"/>
+          </a:fontRef>
+        </p:style>
+        <p:txBody>
+          <a:bodyPr rtlCol="0" anchor="ctr"/>
+          <a:lstStyle/>
+          <a:p>
+            <a:pPr algn="ctr"/>
+          </a:p>
+        </p:txBody>
+      </p:sp>
+      <p:sp>
+        <p:nvSpPr>
+          <p:cNvPr id="3" name="TextBox 2"/>
+          <p:cNvSpPr txBox="1"/>
+          <p:nvPr/>
+        </p:nvSpPr>
+        <p:spPr>
+          <a:xfrm>
+            <a:off x="548640" y="548640"/>
+            <a:ext cx="11064240" cy="457200"/>
+          </a:xfrm>
+          <a:prstGeom prst="rect">
+            <a:avLst/>
+          </a:prstGeom>
+          <a:noFill/>
+        </p:spPr>
+        <p:txBody>
+          <a:bodyPr wrap="square">
+            <a:spAutoFit/>
+          </a:bodyPr>
+          <a:lstStyle/>
+          <a:p>
+            <a:r>
+              <a:rPr sz="1400" b="1">
+                <a:solidFill>
+                  <a:srgbClr val="F0B429"/>
+                </a:solidFill>
+                <a:latin typeface="Calibri"/>
+              </a:rPr>
+              <a:t>CASO 1 · DECISIÓN</a:t>
+            </a:r>
+          </a:p>
+        </p:txBody>
+      </p:sp>
+      <p:sp>
+        <p:nvSpPr>
+          <p:cNvPr id="4" name="TextBox 3"/>
+          <p:cNvSpPr txBox="1"/>
+          <p:nvPr/>
+        </p:nvSpPr>
+        <p:spPr>
+          <a:xfrm>
+            <a:off x="548640" y="1051560"/>
+            <a:ext cx="11064240" cy="822960"/>
+          </a:xfrm>
+          <a:prstGeom prst="rect">
+            <a:avLst/>
+          </a:prstGeom>
+          <a:noFill/>
+        </p:spPr>
+        <p:txBody>
+          <a:bodyPr wrap="square">
+            <a:spAutoFit/>
+          </a:bodyPr>
+          <a:lstStyle/>
+          <a:p>
+            <a:r>
+              <a:rPr sz="2600" b="1">
+                <a:solidFill>
+                  <a:srgbClr val="FFFFFF"/>
+                </a:solidFill>
+                <a:latin typeface="Cambria"/>
+              </a:rPr>
+              <a:t>Suena un celular</a:t>
+            </a:r>
+          </a:p>
+        </p:txBody>
+      </p:sp>
+      <p:sp>
+        <p:nvSpPr>
+          <p:cNvPr id="5" name="TextBox 4"/>
+          <p:cNvSpPr txBox="1"/>
+          <p:nvPr/>
+        </p:nvSpPr>
+        <p:spPr>
+          <a:xfrm>
+            <a:off x="548640" y="2103120"/>
+            <a:ext cx="11064240" cy="3931920"/>
+          </a:xfrm>
+          <a:prstGeom prst="rect">
+            <a:avLst/>
+          </a:prstGeom>
+          <a:noFill/>
+        </p:spPr>
+        <p:txBody>
+          <a:bodyPr wrap="square">
+            <a:spAutoFit/>
+          </a:bodyPr>
+          <a:lstStyle/>
+          <a:p>
+            <a:r>
+              <a:rPr sz="2000" b="0">
+                <a:solidFill>
+                  <a:srgbClr val="CADCFC"/>
+                </a:solidFill>
+                <a:latin typeface="Calibri"/>
+              </a:rPr>
+              <a:t>Pierde la partida: es la regla general del art. 11.3.2. Solo si el reglamento previera una sanción menor se aplicaría esa.</a:t>
+            </a:r>
+          </a:p>
+        </p:txBody>
+      </p:sp>
+      <p:sp>
+        <p:nvSpPr>
+          <p:cNvPr id="6" name="TextBox 5"/>
+          <p:cNvSpPr txBox="1"/>
+          <p:nvPr/>
+        </p:nvSpPr>
+        <p:spPr>
+          <a:xfrm>
+            <a:off x="548640" y="6263640"/>
+            <a:ext cx="11064240" cy="365760"/>
+          </a:xfrm>
+          <a:prstGeom prst="rect">
+            <a:avLst/>
+          </a:prstGeom>
+          <a:noFill/>
+        </p:spPr>
+        <p:txBody>
+          <a:bodyPr wrap="square">
+            <a:spAutoFit/>
+          </a:bodyPr>
+          <a:lstStyle/>
+          <a:p>
+            <a:r>
+              <a:rPr sz="1100" b="0">
+                <a:solidFill>
+                  <a:srgbClr val="9FB3C8"/>
+                </a:solidFill>
+                <a:latin typeface="Calibri"/>
+              </a:rPr>
+              <a:t>Fuente: Leyes del Ajedrez 2023 (Handbook E.I.01), art. 11.3.2</a:t>
+            </a:r>
+          </a:p>
+        </p:txBody>
+      </p:sp>
+    </p:spTree>
+  </p:cSld>
+  <p:clrMapOvr>
+    <a:masterClrMapping/>
+  </p:clrMapOvr>
+</p:sld>
+</file>
+
+<file path=ppt/slides/slide11.xml><?xml version="1.0" encoding="utf-8"?>
+<p:sld xmlns:a="http://schemas.openxmlformats.org/drawingml/2006/main" xmlns:p="http://schemas.openxmlformats.org/presentationml/2006/main" xmlns:r="http://schemas.openxmlformats.org/officeDocument/2006/relationships">
+  <p:cSld>
+    <p:spTree>
+      <p:nvGrpSpPr>
+        <p:cNvPr id="1" name=""/>
+        <p:cNvGrpSpPr/>
+        <p:nvPr/>
+      </p:nvGrpSpPr>
+      <p:grpSpPr/>
+      <p:sp>
+        <p:nvSpPr>
+          <p:cNvPr id="2" name="Oval 1"/>
+          <p:cNvSpPr/>
+          <p:nvPr/>
+        </p:nvSpPr>
+        <p:spPr>
+          <a:xfrm>
+            <a:off x="548640" y="502920"/>
+            <a:ext cx="502920" cy="502920"/>
+          </a:xfrm>
+          <a:prstGeom prst="ellipse">
+            <a:avLst/>
+          </a:prstGeom>
+          <a:solidFill>
+            <a:srgbClr val="DE911D"/>
+          </a:solidFill>
+          <a:ln>
+            <a:noFill/>
+          </a:ln>
+          <a:effectLst/>
+        </p:spPr>
+        <p:style>
+          <a:lnRef idx="1">
+            <a:schemeClr val="accent1"/>
+          </a:lnRef>
+          <a:fillRef idx="3">
+            <a:schemeClr val="accent1"/>
+          </a:fillRef>
+          <a:effectRef idx="2">
+            <a:schemeClr val="accent1"/>
+          </a:effectRef>
+          <a:fontRef idx="minor">
+            <a:schemeClr val="lt1"/>
+          </a:fontRef>
+        </p:style>
+        <p:txBody>
+          <a:bodyPr rtlCol="0" anchor="ctr"/>
+          <a:lstStyle/>
+          <a:p>
+            <a:pPr algn="ctr"/>
+          </a:p>
+        </p:txBody>
+      </p:sp>
+      <p:sp>
+        <p:nvSpPr>
+          <p:cNvPr id="3" name="TextBox 2"/>
+          <p:cNvSpPr txBox="1"/>
+          <p:nvPr/>
+        </p:nvSpPr>
+        <p:spPr>
+          <a:xfrm>
+            <a:off x="548640" y="502920"/>
+            <a:ext cx="502920" cy="502920"/>
+          </a:xfrm>
+          <a:prstGeom prst="rect">
+            <a:avLst/>
+          </a:prstGeom>
+          <a:noFill/>
+        </p:spPr>
+        <p:txBody>
+          <a:bodyPr wrap="square">
+            <a:spAutoFit/>
+          </a:bodyPr>
+          <a:lstStyle/>
+          <a:p>
+            <a:pPr algn="ctr"/>
+            <a:r>
+              <a:rPr sz="2000" b="0">
+                <a:solidFill>
+                  <a:srgbClr val="0A1F33"/>
+                </a:solidFill>
+                <a:latin typeface="Calibri"/>
+              </a:rPr>
+              <a:t>?</a:t>
+            </a:r>
+          </a:p>
+        </p:txBody>
+      </p:sp>
+      <p:sp>
+        <p:nvSpPr>
+          <p:cNvPr id="4" name="TextBox 3"/>
+          <p:cNvSpPr txBox="1"/>
+          <p:nvPr/>
+        </p:nvSpPr>
+        <p:spPr>
+          <a:xfrm>
+            <a:off x="1234440" y="530352"/>
+            <a:ext cx="9144000" cy="457200"/>
+          </a:xfrm>
+          <a:prstGeom prst="rect">
+            <a:avLst/>
+          </a:prstGeom>
+          <a:noFill/>
+        </p:spPr>
+        <p:txBody>
+          <a:bodyPr wrap="square">
+            <a:spAutoFit/>
+          </a:bodyPr>
+          <a:lstStyle/>
+          <a:p>
+            <a:r>
+              <a:rPr sz="1400" b="1">
+                <a:solidFill>
+                  <a:srgbClr val="DE911D"/>
+                </a:solidFill>
+                <a:latin typeface="Calibri"/>
+              </a:rPr>
+              <a:t>CASO 2 · ¿QUÉ DECIDE LA PERSONA ÁRBITRA?</a:t>
+            </a:r>
+          </a:p>
+        </p:txBody>
+      </p:sp>
+      <p:sp>
+        <p:nvSpPr>
+          <p:cNvPr id="5" name="TextBox 4"/>
+          <p:cNvSpPr txBox="1"/>
+          <p:nvPr/>
+        </p:nvSpPr>
+        <p:spPr>
+          <a:xfrm>
+            <a:off x="548640" y="1051560"/>
+            <a:ext cx="11064240" cy="822960"/>
+          </a:xfrm>
+          <a:prstGeom prst="rect">
+            <a:avLst/>
+          </a:prstGeom>
+          <a:noFill/>
+        </p:spPr>
+        <p:txBody>
+          <a:bodyPr wrap="square">
+            <a:spAutoFit/>
+          </a:bodyPr>
+          <a:lstStyle/>
+          <a:p>
+            <a:r>
+              <a:rPr sz="2600" b="1">
+                <a:solidFill>
+                  <a:srgbClr val="0A1F33"/>
+                </a:solidFill>
+                <a:latin typeface="Cambria"/>
+              </a:rPr>
+              <a:t>Primera jugada ilegal en ritmo clásico</a:t>
+            </a:r>
+          </a:p>
+        </p:txBody>
+      </p:sp>
+      <p:sp>
+        <p:nvSpPr>
+          <p:cNvPr id="6" name="Rectangle 5"/>
+          <p:cNvSpPr/>
+          <p:nvPr/>
+        </p:nvSpPr>
+        <p:spPr>
+          <a:xfrm>
+            <a:off x="548640" y="1965960"/>
+            <a:ext cx="11064240" cy="4206240"/>
+          </a:xfrm>
+          <a:prstGeom prst="rect">
+            <a:avLst/>
+          </a:prstGeom>
+          <a:solidFill>
+            <a:srgbClr val="F0F4F8"/>
+          </a:solidFill>
+          <a:ln>
+            <a:noFill/>
+          </a:ln>
+          <a:effectLst/>
+        </p:spPr>
+        <p:style>
+          <a:lnRef idx="1">
+            <a:schemeClr val="accent1"/>
+          </a:lnRef>
+          <a:fillRef idx="3">
+            <a:schemeClr val="accent1"/>
+          </a:fillRef>
+          <a:effectRef idx="2">
+            <a:schemeClr val="accent1"/>
+          </a:effectRef>
+          <a:fontRef idx="minor">
+            <a:schemeClr val="lt1"/>
+          </a:fontRef>
+        </p:style>
+        <p:txBody>
+          <a:bodyPr rtlCol="0" anchor="ctr"/>
+          <a:lstStyle/>
+          <a:p>
+            <a:pPr algn="ctr"/>
+          </a:p>
+        </p:txBody>
+      </p:sp>
+      <p:sp>
+        <p:nvSpPr>
+          <p:cNvPr id="7" name="TextBox 6"/>
+          <p:cNvSpPr txBox="1"/>
+          <p:nvPr/>
+        </p:nvSpPr>
+        <p:spPr>
+          <a:xfrm>
+            <a:off x="914400" y="2240280"/>
+            <a:ext cx="10332720" cy="3749039"/>
+          </a:xfrm>
+          <a:prstGeom prst="rect">
+            <a:avLst/>
+          </a:prstGeom>
+          <a:noFill/>
+        </p:spPr>
+        <p:txBody>
+          <a:bodyPr wrap="square">
+            <a:spAutoFit/>
+          </a:bodyPr>
+          <a:lstStyle/>
+          <a:p>
+            <a:r>
+              <a:rPr sz="2000" b="0">
+                <a:solidFill>
+                  <a:srgbClr val="334E68"/>
+                </a:solidFill>
+                <a:latin typeface="Calibri"/>
+              </a:rPr>
+              <a:t>Un jugador deja su rey en jaque y presiona el reloj. Es su primera jugada ilegal de la partida.</a:t>
+            </a:r>
+          </a:p>
+        </p:txBody>
+      </p:sp>
+    </p:spTree>
+  </p:cSld>
+  <p:clrMapOvr>
+    <a:masterClrMapping/>
+  </p:clrMapOvr>
+</p:sld>
+</file>
+
+<file path=ppt/slides/slide12.xml><?xml version="1.0" encoding="utf-8"?>
+<p:sld xmlns:a="http://schemas.openxmlformats.org/drawingml/2006/main" xmlns:p="http://schemas.openxmlformats.org/presentationml/2006/main" xmlns:r="http://schemas.openxmlformats.org/officeDocument/2006/relationships">
+  <p:cSld>
+    <p:spTree>
+      <p:nvGrpSpPr>
+        <p:cNvPr id="1" name=""/>
+        <p:cNvGrpSpPr/>
+        <p:nvPr/>
+      </p:nvGrpSpPr>
+      <p:grpSpPr/>
+      <p:sp>
+        <p:nvSpPr>
+          <p:cNvPr id="2" name="Rectangle 1"/>
+          <p:cNvSpPr/>
+          <p:nvPr/>
+        </p:nvSpPr>
+        <p:spPr>
+          <a:xfrm>
+            <a:off x="0" y="0"/>
+            <a:ext cx="12191695" cy="6858000"/>
+          </a:xfrm>
+          <a:prstGeom prst="rect">
+            <a:avLst/>
+          </a:prstGeom>
+          <a:solidFill>
+            <a:srgbClr val="102A43"/>
+          </a:solidFill>
+          <a:ln>
+            <a:noFill/>
+          </a:ln>
+          <a:effectLst/>
+        </p:spPr>
+        <p:style>
+          <a:lnRef idx="1">
+            <a:schemeClr val="accent1"/>
+          </a:lnRef>
+          <a:fillRef idx="3">
+            <a:schemeClr val="accent1"/>
+          </a:fillRef>
+          <a:effectRef idx="2">
+            <a:schemeClr val="accent1"/>
+          </a:effectRef>
+          <a:fontRef idx="minor">
+            <a:schemeClr val="lt1"/>
+          </a:fontRef>
+        </p:style>
+        <p:txBody>
+          <a:bodyPr rtlCol="0" anchor="ctr"/>
+          <a:lstStyle/>
+          <a:p>
+            <a:pPr algn="ctr"/>
+          </a:p>
+        </p:txBody>
+      </p:sp>
+      <p:sp>
+        <p:nvSpPr>
+          <p:cNvPr id="3" name="TextBox 2"/>
+          <p:cNvSpPr txBox="1"/>
+          <p:nvPr/>
+        </p:nvSpPr>
+        <p:spPr>
+          <a:xfrm>
+            <a:off x="548640" y="548640"/>
+            <a:ext cx="11064240" cy="457200"/>
+          </a:xfrm>
+          <a:prstGeom prst="rect">
+            <a:avLst/>
+          </a:prstGeom>
+          <a:noFill/>
+        </p:spPr>
+        <p:txBody>
+          <a:bodyPr wrap="square">
+            <a:spAutoFit/>
+          </a:bodyPr>
+          <a:lstStyle/>
+          <a:p>
+            <a:r>
+              <a:rPr sz="1400" b="1">
+                <a:solidFill>
+                  <a:srgbClr val="F0B429"/>
+                </a:solidFill>
+                <a:latin typeface="Calibri"/>
+              </a:rPr>
+              <a:t>CASO 2 · DECISIÓN</a:t>
+            </a:r>
+          </a:p>
+        </p:txBody>
+      </p:sp>
+      <p:sp>
+        <p:nvSpPr>
+          <p:cNvPr id="4" name="TextBox 3"/>
+          <p:cNvSpPr txBox="1"/>
+          <p:nvPr/>
+        </p:nvSpPr>
+        <p:spPr>
+          <a:xfrm>
+            <a:off x="548640" y="1051560"/>
+            <a:ext cx="11064240" cy="822960"/>
+          </a:xfrm>
+          <a:prstGeom prst="rect">
+            <a:avLst/>
+          </a:prstGeom>
+          <a:noFill/>
+        </p:spPr>
+        <p:txBody>
+          <a:bodyPr wrap="square">
+            <a:spAutoFit/>
+          </a:bodyPr>
+          <a:lstStyle/>
+          <a:p>
+            <a:r>
+              <a:rPr sz="2600" b="1">
+                <a:solidFill>
+                  <a:srgbClr val="FFFFFF"/>
+                </a:solidFill>
+                <a:latin typeface="Cambria"/>
+              </a:rPr>
+              <a:t>Primera jugada ilegal en ritmo clásico</a:t>
+            </a:r>
+          </a:p>
+        </p:txBody>
+      </p:sp>
+      <p:sp>
+        <p:nvSpPr>
+          <p:cNvPr id="5" name="TextBox 4"/>
+          <p:cNvSpPr txBox="1"/>
+          <p:nvPr/>
+        </p:nvSpPr>
+        <p:spPr>
+          <a:xfrm>
+            <a:off x="548640" y="2103120"/>
+            <a:ext cx="11064240" cy="3931920"/>
+          </a:xfrm>
+          <a:prstGeom prst="rect">
+            <a:avLst/>
+          </a:prstGeom>
+          <a:noFill/>
+        </p:spPr>
+        <p:txBody>
+          <a:bodyPr wrap="square">
+            <a:spAutoFit/>
+          </a:bodyPr>
+          <a:lstStyle/>
+          <a:p>
+            <a:r>
+              <a:rPr sz="2000" b="0">
+                <a:solidFill>
+                  <a:srgbClr val="CADCFC"/>
+                </a:solidFill>
+                <a:latin typeface="Calibri"/>
+              </a:rPr>
+              <a:t>Se repone la posición anterior, el jugador debe hacer una jugada legal (respetando pieza tocada) y el rival recibe dos minutos adicionales.</a:t>
+            </a:r>
+          </a:p>
+        </p:txBody>
+      </p:sp>
+      <p:sp>
+        <p:nvSpPr>
+          <p:cNvPr id="6" name="TextBox 5"/>
+          <p:cNvSpPr txBox="1"/>
+          <p:nvPr/>
+        </p:nvSpPr>
+        <p:spPr>
+          <a:xfrm>
+            <a:off x="548640" y="6263640"/>
+            <a:ext cx="11064240" cy="365760"/>
+          </a:xfrm>
+          <a:prstGeom prst="rect">
+            <a:avLst/>
+          </a:prstGeom>
+          <a:noFill/>
+        </p:spPr>
+        <p:txBody>
+          <a:bodyPr wrap="square">
+            <a:spAutoFit/>
+          </a:bodyPr>
+          <a:lstStyle/>
+          <a:p>
+            <a:r>
+              <a:rPr sz="1100" b="0">
+                <a:solidFill>
+                  <a:srgbClr val="9FB3C8"/>
+                </a:solidFill>
+                <a:latin typeface="Calibri"/>
+              </a:rPr>
+              <a:t>Fuente: Leyes del Ajedrez 2023 (Handbook E.I.01), art. 3.9.2, 7.5.1 y 7.5.5</a:t>
+            </a:r>
+          </a:p>
+        </p:txBody>
+      </p:sp>
+    </p:spTree>
+  </p:cSld>
+  <p:clrMapOvr>
+    <a:masterClrMapping/>
+  </p:clrMapOvr>
+</p:sld>
+</file>
+
+<file path=ppt/slides/slide13.xml><?xml version="1.0" encoding="utf-8"?>
+<p:sld xmlns:a="http://schemas.openxmlformats.org/drawingml/2006/main" xmlns:p="http://schemas.openxmlformats.org/presentationml/2006/main" xmlns:r="http://schemas.openxmlformats.org/officeDocument/2006/relationships">
+  <p:cSld>
+    <p:spTree>
+      <p:nvGrpSpPr>
+        <p:cNvPr id="1" name=""/>
+        <p:cNvGrpSpPr/>
+        <p:nvPr/>
+      </p:nvGrpSpPr>
+      <p:grpSpPr/>
+      <p:sp>
+        <p:nvSpPr>
+          <p:cNvPr id="2" name="Oval 1"/>
+          <p:cNvSpPr/>
+          <p:nvPr/>
+        </p:nvSpPr>
+        <p:spPr>
+          <a:xfrm>
+            <a:off x="548640" y="502920"/>
+            <a:ext cx="502920" cy="502920"/>
+          </a:xfrm>
+          <a:prstGeom prst="ellipse">
+            <a:avLst/>
+          </a:prstGeom>
+          <a:solidFill>
+            <a:srgbClr val="DE911D"/>
+          </a:solidFill>
+          <a:ln>
+            <a:noFill/>
+          </a:ln>
+          <a:effectLst/>
+        </p:spPr>
+        <p:style>
+          <a:lnRef idx="1">
+            <a:schemeClr val="accent1"/>
+          </a:lnRef>
+          <a:fillRef idx="3">
+            <a:schemeClr val="accent1"/>
+          </a:fillRef>
+          <a:effectRef idx="2">
+            <a:schemeClr val="accent1"/>
+          </a:effectRef>
+          <a:fontRef idx="minor">
+            <a:schemeClr val="lt1"/>
+          </a:fontRef>
+        </p:style>
+        <p:txBody>
+          <a:bodyPr rtlCol="0" anchor="ctr"/>
+          <a:lstStyle/>
+          <a:p>
+            <a:pPr algn="ctr"/>
+          </a:p>
+        </p:txBody>
+      </p:sp>
+      <p:sp>
+        <p:nvSpPr>
+          <p:cNvPr id="3" name="TextBox 2"/>
+          <p:cNvSpPr txBox="1"/>
+          <p:nvPr/>
+        </p:nvSpPr>
+        <p:spPr>
+          <a:xfrm>
+            <a:off x="548640" y="502920"/>
+            <a:ext cx="502920" cy="502920"/>
+          </a:xfrm>
+          <a:prstGeom prst="rect">
+            <a:avLst/>
+          </a:prstGeom>
+          <a:noFill/>
+        </p:spPr>
+        <p:txBody>
+          <a:bodyPr wrap="square">
+            <a:spAutoFit/>
+          </a:bodyPr>
+          <a:lstStyle/>
+          <a:p>
+            <a:pPr algn="ctr"/>
+            <a:r>
+              <a:rPr sz="2000" b="0">
+                <a:solidFill>
+                  <a:srgbClr val="0A1F33"/>
+                </a:solidFill>
+                <a:latin typeface="Calibri"/>
+              </a:rPr>
+              <a:t>?</a:t>
+            </a:r>
+          </a:p>
+        </p:txBody>
+      </p:sp>
+      <p:sp>
+        <p:nvSpPr>
+          <p:cNvPr id="4" name="TextBox 3"/>
+          <p:cNvSpPr txBox="1"/>
+          <p:nvPr/>
+        </p:nvSpPr>
+        <p:spPr>
+          <a:xfrm>
+            <a:off x="1234440" y="530352"/>
+            <a:ext cx="9144000" cy="457200"/>
+          </a:xfrm>
+          <a:prstGeom prst="rect">
+            <a:avLst/>
+          </a:prstGeom>
+          <a:noFill/>
+        </p:spPr>
+        <p:txBody>
+          <a:bodyPr wrap="square">
+            <a:spAutoFit/>
+          </a:bodyPr>
+          <a:lstStyle/>
+          <a:p>
+            <a:r>
+              <a:rPr sz="1400" b="1">
+                <a:solidFill>
+                  <a:srgbClr val="DE911D"/>
+                </a:solidFill>
+                <a:latin typeface="Calibri"/>
+              </a:rPr>
+              <a:t>CASO 3 · ¿QUÉ DECIDE LA PERSONA ÁRBITRA?</a:t>
+            </a:r>
+          </a:p>
+        </p:txBody>
+      </p:sp>
+      <p:sp>
+        <p:nvSpPr>
+          <p:cNvPr id="5" name="TextBox 4"/>
+          <p:cNvSpPr txBox="1"/>
+          <p:nvPr/>
+        </p:nvSpPr>
+        <p:spPr>
+          <a:xfrm>
+            <a:off x="548640" y="1051560"/>
+            <a:ext cx="11064240" cy="822960"/>
+          </a:xfrm>
+          <a:prstGeom prst="rect">
+            <a:avLst/>
+          </a:prstGeom>
+          <a:noFill/>
+        </p:spPr>
+        <p:txBody>
+          <a:bodyPr wrap="square">
+            <a:spAutoFit/>
+          </a:bodyPr>
+          <a:lstStyle/>
+          <a:p>
+            <a:r>
+              <a:rPr sz="2600" b="1">
+                <a:solidFill>
+                  <a:srgbClr val="0A1F33"/>
+                </a:solidFill>
+                <a:latin typeface="Cambria"/>
+              </a:rPr>
+              <a:t>La misma situación en rápidas</a:t>
+            </a:r>
+          </a:p>
+        </p:txBody>
+      </p:sp>
+      <p:sp>
+        <p:nvSpPr>
+          <p:cNvPr id="6" name="Rectangle 5"/>
+          <p:cNvSpPr/>
+          <p:nvPr/>
+        </p:nvSpPr>
+        <p:spPr>
+          <a:xfrm>
+            <a:off x="548640" y="1965960"/>
+            <a:ext cx="11064240" cy="4206240"/>
+          </a:xfrm>
+          <a:prstGeom prst="rect">
+            <a:avLst/>
+          </a:prstGeom>
+          <a:solidFill>
+            <a:srgbClr val="F0F4F8"/>
+          </a:solidFill>
+          <a:ln>
+            <a:noFill/>
+          </a:ln>
+          <a:effectLst/>
+        </p:spPr>
+        <p:style>
+          <a:lnRef idx="1">
+            <a:schemeClr val="accent1"/>
+          </a:lnRef>
+          <a:fillRef idx="3">
+            <a:schemeClr val="accent1"/>
+          </a:fillRef>
+          <a:effectRef idx="2">
+            <a:schemeClr val="accent1"/>
+          </a:effectRef>
+          <a:fontRef idx="minor">
+            <a:schemeClr val="lt1"/>
+          </a:fontRef>
+        </p:style>
+        <p:txBody>
+          <a:bodyPr rtlCol="0" anchor="ctr"/>
+          <a:lstStyle/>
+          <a:p>
+            <a:pPr algn="ctr"/>
+          </a:p>
+        </p:txBody>
+      </p:sp>
+      <p:sp>
+        <p:nvSpPr>
+          <p:cNvPr id="7" name="TextBox 6"/>
+          <p:cNvSpPr txBox="1"/>
+          <p:nvPr/>
+        </p:nvSpPr>
+        <p:spPr>
+          <a:xfrm>
+            <a:off x="914400" y="2240280"/>
+            <a:ext cx="10332720" cy="3749039"/>
+          </a:xfrm>
+          <a:prstGeom prst="rect">
+            <a:avLst/>
+          </a:prstGeom>
+          <a:noFill/>
+        </p:spPr>
+        <p:txBody>
+          <a:bodyPr wrap="square">
+            <a:spAutoFit/>
+          </a:bodyPr>
+          <a:lstStyle/>
+          <a:p>
+            <a:r>
+              <a:rPr sz="2000" b="0">
+                <a:solidFill>
+                  <a:srgbClr val="334E68"/>
+                </a:solidFill>
+                <a:latin typeface="Calibri"/>
+              </a:rPr>
+              <a:t>La misma jugada ilegal, en un torneo a 15 minutos más 10 segundos.</a:t>
+            </a:r>
+          </a:p>
+        </p:txBody>
+      </p:sp>
+    </p:spTree>
+  </p:cSld>
+  <p:clrMapOvr>
+    <a:masterClrMapping/>
+  </p:clrMapOvr>
+</p:sld>
+</file>
+
+<file path=ppt/slides/slide14.xml><?xml version="1.0" encoding="utf-8"?>
+<p:sld xmlns:a="http://schemas.openxmlformats.org/drawingml/2006/main" xmlns:p="http://schemas.openxmlformats.org/presentationml/2006/main" xmlns:r="http://schemas.openxmlformats.org/officeDocument/2006/relationships">
+  <p:cSld>
+    <p:spTree>
+      <p:nvGrpSpPr>
+        <p:cNvPr id="1" name=""/>
+        <p:cNvGrpSpPr/>
+        <p:nvPr/>
+      </p:nvGrpSpPr>
+      <p:grpSpPr/>
+      <p:sp>
+        <p:nvSpPr>
+          <p:cNvPr id="2" name="Rectangle 1"/>
+          <p:cNvSpPr/>
+          <p:nvPr/>
+        </p:nvSpPr>
+        <p:spPr>
+          <a:xfrm>
+            <a:off x="0" y="0"/>
+            <a:ext cx="12191695" cy="6858000"/>
+          </a:xfrm>
+          <a:prstGeom prst="rect">
+            <a:avLst/>
+          </a:prstGeom>
+          <a:solidFill>
+            <a:srgbClr val="102A43"/>
+          </a:solidFill>
+          <a:ln>
+            <a:noFill/>
+          </a:ln>
+          <a:effectLst/>
+        </p:spPr>
+        <p:style>
+          <a:lnRef idx="1">
+            <a:schemeClr val="accent1"/>
+          </a:lnRef>
+          <a:fillRef idx="3">
+            <a:schemeClr val="accent1"/>
+          </a:fillRef>
+          <a:effectRef idx="2">
+            <a:schemeClr val="accent1"/>
+          </a:effectRef>
+          <a:fontRef idx="minor">
+            <a:schemeClr val="lt1"/>
+          </a:fontRef>
+        </p:style>
+        <p:txBody>
+          <a:bodyPr rtlCol="0" anchor="ctr"/>
+          <a:lstStyle/>
+          <a:p>
+            <a:pPr algn="ctr"/>
+          </a:p>
+        </p:txBody>
+      </p:sp>
+      <p:sp>
+        <p:nvSpPr>
+          <p:cNvPr id="3" name="TextBox 2"/>
+          <p:cNvSpPr txBox="1"/>
+          <p:nvPr/>
+        </p:nvSpPr>
+        <p:spPr>
+          <a:xfrm>
+            <a:off x="548640" y="548640"/>
+            <a:ext cx="11064240" cy="457200"/>
+          </a:xfrm>
+          <a:prstGeom prst="rect">
+            <a:avLst/>
+          </a:prstGeom>
+          <a:noFill/>
+        </p:spPr>
+        <p:txBody>
+          <a:bodyPr wrap="square">
+            <a:spAutoFit/>
+          </a:bodyPr>
+          <a:lstStyle/>
+          <a:p>
+            <a:r>
+              <a:rPr sz="1400" b="1">
+                <a:solidFill>
+                  <a:srgbClr val="F0B429"/>
+                </a:solidFill>
+                <a:latin typeface="Calibri"/>
+              </a:rPr>
+              <a:t>CASO 3 · DECISIÓN</a:t>
+            </a:r>
+          </a:p>
+        </p:txBody>
+      </p:sp>
+      <p:sp>
+        <p:nvSpPr>
+          <p:cNvPr id="4" name="TextBox 3"/>
+          <p:cNvSpPr txBox="1"/>
+          <p:nvPr/>
+        </p:nvSpPr>
+        <p:spPr>
+          <a:xfrm>
+            <a:off x="548640" y="1051560"/>
+            <a:ext cx="11064240" cy="822960"/>
+          </a:xfrm>
+          <a:prstGeom prst="rect">
+            <a:avLst/>
+          </a:prstGeom>
+          <a:noFill/>
+        </p:spPr>
+        <p:txBody>
+          <a:bodyPr wrap="square">
+            <a:spAutoFit/>
+          </a:bodyPr>
+          <a:lstStyle/>
+          <a:p>
+            <a:r>
+              <a:rPr sz="2600" b="1">
+                <a:solidFill>
+                  <a:srgbClr val="FFFFFF"/>
+                </a:solidFill>
+                <a:latin typeface="Cambria"/>
+              </a:rPr>
+              <a:t>La misma situación en rápidas</a:t>
+            </a:r>
+          </a:p>
+        </p:txBody>
+      </p:sp>
+      <p:sp>
+        <p:nvSpPr>
+          <p:cNvPr id="5" name="TextBox 4"/>
+          <p:cNvSpPr txBox="1"/>
+          <p:nvPr/>
+        </p:nvSpPr>
+        <p:spPr>
+          <a:xfrm>
+            <a:off x="548640" y="2103120"/>
+            <a:ext cx="11064240" cy="3931920"/>
+          </a:xfrm>
+          <a:prstGeom prst="rect">
+            <a:avLst/>
+          </a:prstGeom>
+          <a:noFill/>
+        </p:spPr>
+        <p:txBody>
+          <a:bodyPr wrap="square">
+            <a:spAutoFit/>
+          </a:bodyPr>
+          <a:lstStyle/>
+          <a:p>
+            <a:r>
+              <a:rPr sz="2000" b="0">
+                <a:solidFill>
+                  <a:srgbClr val="CADCFC"/>
+                </a:solidFill>
+                <a:latin typeface="Calibri"/>
+              </a:rPr>
+              <a:t>Mismo procedimiento, pero el rival recibe un minuto en lugar de dos. Una segunda jugada ilegal le haría perder la partida.</a:t>
+            </a:r>
+          </a:p>
+        </p:txBody>
+      </p:sp>
+      <p:sp>
+        <p:nvSpPr>
+          <p:cNvPr id="6" name="TextBox 5"/>
+          <p:cNvSpPr txBox="1"/>
+          <p:nvPr/>
+        </p:nvSpPr>
+        <p:spPr>
+          <a:xfrm>
+            <a:off x="548640" y="6263640"/>
+            <a:ext cx="11064240" cy="365760"/>
+          </a:xfrm>
+          <a:prstGeom prst="rect">
+            <a:avLst/>
+          </a:prstGeom>
+          <a:noFill/>
+        </p:spPr>
+        <p:txBody>
+          <a:bodyPr wrap="square">
+            <a:spAutoFit/>
+          </a:bodyPr>
+          <a:lstStyle/>
+          <a:p>
+            <a:r>
+              <a:rPr sz="1100" b="0">
+                <a:solidFill>
+                  <a:srgbClr val="9FB3C8"/>
+                </a:solidFill>
+                <a:latin typeface="Calibri"/>
+              </a:rPr>
+              <a:t>Fuente: Leyes del Ajedrez 2023 (Handbook E.I.01), art. 7.5.5 y apéndice A.3</a:t>
+            </a:r>
+          </a:p>
+        </p:txBody>
+      </p:sp>
+    </p:spTree>
+  </p:cSld>
+  <p:clrMapOvr>
+    <a:masterClrMapping/>
+  </p:clrMapOvr>
+</p:sld>
+</file>
+
+<file path=ppt/slides/slide15.xml><?xml version="1.0" encoding="utf-8"?>
+<p:sld xmlns:a="http://schemas.openxmlformats.org/drawingml/2006/main" xmlns:p="http://schemas.openxmlformats.org/presentationml/2006/main" xmlns:r="http://schemas.openxmlformats.org/officeDocument/2006/relationships">
+  <p:cSld>
+    <p:spTree>
+      <p:nvGrpSpPr>
+        <p:cNvPr id="1" name=""/>
+        <p:cNvGrpSpPr/>
+        <p:nvPr/>
+      </p:nvGrpSpPr>
+      <p:grpSpPr/>
+      <p:sp>
+        <p:nvSpPr>
+          <p:cNvPr id="2" name="Oval 1"/>
+          <p:cNvSpPr/>
+          <p:nvPr/>
+        </p:nvSpPr>
+        <p:spPr>
+          <a:xfrm>
+            <a:off x="548640" y="502920"/>
+            <a:ext cx="502920" cy="502920"/>
+          </a:xfrm>
+          <a:prstGeom prst="ellipse">
+            <a:avLst/>
+          </a:prstGeom>
+          <a:solidFill>
+            <a:srgbClr val="DE911D"/>
+          </a:solidFill>
+          <a:ln>
+            <a:noFill/>
+          </a:ln>
+          <a:effectLst/>
+        </p:spPr>
+        <p:style>
+          <a:lnRef idx="1">
+            <a:schemeClr val="accent1"/>
+          </a:lnRef>
+          <a:fillRef idx="3">
+            <a:schemeClr val="accent1"/>
+          </a:fillRef>
+          <a:effectRef idx="2">
+            <a:schemeClr val="accent1"/>
+          </a:effectRef>
+          <a:fontRef idx="minor">
+            <a:schemeClr val="lt1"/>
+          </a:fontRef>
+        </p:style>
+        <p:txBody>
+          <a:bodyPr rtlCol="0" anchor="ctr"/>
+          <a:lstStyle/>
+          <a:p>
+            <a:pPr algn="ctr"/>
+          </a:p>
+        </p:txBody>
+      </p:sp>
+      <p:sp>
+        <p:nvSpPr>
+          <p:cNvPr id="3" name="TextBox 2"/>
+          <p:cNvSpPr txBox="1"/>
+          <p:nvPr/>
+        </p:nvSpPr>
+        <p:spPr>
+          <a:xfrm>
+            <a:off x="548640" y="502920"/>
+            <a:ext cx="502920" cy="502920"/>
+          </a:xfrm>
+          <a:prstGeom prst="rect">
+            <a:avLst/>
+          </a:prstGeom>
+          <a:noFill/>
+        </p:spPr>
+        <p:txBody>
+          <a:bodyPr wrap="square">
+            <a:spAutoFit/>
+          </a:bodyPr>
+          <a:lstStyle/>
+          <a:p>
+            <a:pPr algn="ctr"/>
+            <a:r>
+              <a:rPr sz="2000" b="0">
+                <a:solidFill>
+                  <a:srgbClr val="0A1F33"/>
+                </a:solidFill>
+                <a:latin typeface="Calibri"/>
+              </a:rPr>
+              <a:t>?</a:t>
+            </a:r>
+          </a:p>
+        </p:txBody>
+      </p:sp>
+      <p:sp>
+        <p:nvSpPr>
+          <p:cNvPr id="4" name="TextBox 3"/>
+          <p:cNvSpPr txBox="1"/>
+          <p:nvPr/>
+        </p:nvSpPr>
+        <p:spPr>
+          <a:xfrm>
+            <a:off x="1234440" y="530352"/>
+            <a:ext cx="9144000" cy="457200"/>
+          </a:xfrm>
+          <a:prstGeom prst="rect">
+            <a:avLst/>
+          </a:prstGeom>
+          <a:noFill/>
+        </p:spPr>
+        <p:txBody>
+          <a:bodyPr wrap="square">
+            <a:spAutoFit/>
+          </a:bodyPr>
+          <a:lstStyle/>
+          <a:p>
+            <a:r>
+              <a:rPr sz="1400" b="1">
+                <a:solidFill>
+                  <a:srgbClr val="DE911D"/>
+                </a:solidFill>
+                <a:latin typeface="Calibri"/>
+              </a:rPr>
+              <a:t>CASO 4 · ¿QUÉ DECIDE LA PERSONA ÁRBITRA?</a:t>
+            </a:r>
+          </a:p>
+        </p:txBody>
+      </p:sp>
+      <p:sp>
+        <p:nvSpPr>
+          <p:cNvPr id="5" name="TextBox 4"/>
+          <p:cNvSpPr txBox="1"/>
+          <p:nvPr/>
+        </p:nvSpPr>
+        <p:spPr>
+          <a:xfrm>
+            <a:off x="548640" y="1051560"/>
+            <a:ext cx="11064240" cy="822960"/>
+          </a:xfrm>
+          <a:prstGeom prst="rect">
+            <a:avLst/>
+          </a:prstGeom>
+          <a:noFill/>
+        </p:spPr>
+        <p:txBody>
+          <a:bodyPr wrap="square">
+            <a:spAutoFit/>
+          </a:bodyPr>
+          <a:lstStyle/>
+          <a:p>
+            <a:r>
+              <a:rPr sz="2600" b="1">
+                <a:solidFill>
+                  <a:srgbClr val="0A1F33"/>
+                </a:solidFill>
+                <a:latin typeface="Cambria"/>
+              </a:rPr>
+              <a:t>Notas de apertura</a:t>
+            </a:r>
+          </a:p>
+        </p:txBody>
+      </p:sp>
+      <p:sp>
+        <p:nvSpPr>
+          <p:cNvPr id="6" name="Rectangle 5"/>
+          <p:cNvSpPr/>
+          <p:nvPr/>
+        </p:nvSpPr>
+        <p:spPr>
+          <a:xfrm>
+            <a:off x="548640" y="1965960"/>
+            <a:ext cx="11064240" cy="4206240"/>
+          </a:xfrm>
+          <a:prstGeom prst="rect">
+            <a:avLst/>
+          </a:prstGeom>
+          <a:solidFill>
+            <a:srgbClr val="F0F4F8"/>
+          </a:solidFill>
+          <a:ln>
+            <a:noFill/>
+          </a:ln>
+          <a:effectLst/>
+        </p:spPr>
+        <p:style>
+          <a:lnRef idx="1">
+            <a:schemeClr val="accent1"/>
+          </a:lnRef>
+          <a:fillRef idx="3">
+            <a:schemeClr val="accent1"/>
+          </a:fillRef>
+          <a:effectRef idx="2">
+            <a:schemeClr val="accent1"/>
+          </a:effectRef>
+          <a:fontRef idx="minor">
+            <a:schemeClr val="lt1"/>
+          </a:fontRef>
+        </p:style>
+        <p:txBody>
+          <a:bodyPr rtlCol="0" anchor="ctr"/>
+          <a:lstStyle/>
+          <a:p>
+            <a:pPr algn="ctr"/>
+          </a:p>
+        </p:txBody>
+      </p:sp>
+      <p:sp>
+        <p:nvSpPr>
+          <p:cNvPr id="7" name="TextBox 6"/>
+          <p:cNvSpPr txBox="1"/>
+          <p:nvPr/>
+        </p:nvSpPr>
+        <p:spPr>
+          <a:xfrm>
+            <a:off x="914400" y="2240280"/>
+            <a:ext cx="10332720" cy="3749039"/>
+          </a:xfrm>
+          <a:prstGeom prst="rect">
+            <a:avLst/>
+          </a:prstGeom>
+          <a:noFill/>
+        </p:spPr>
+        <p:txBody>
+          <a:bodyPr wrap="square">
+            <a:spAutoFit/>
+          </a:bodyPr>
+          <a:lstStyle/>
+          <a:p>
+            <a:r>
+              <a:rPr sz="2000" b="0">
+                <a:solidFill>
+                  <a:srgbClr val="334E68"/>
+                </a:solidFill>
+                <a:latin typeface="Calibri"/>
+              </a:rPr>
+              <a:t>El árbitro ve que un jugador consulta una hoja con variantes de apertura durante la partida.</a:t>
+            </a:r>
+          </a:p>
+        </p:txBody>
+      </p:sp>
+    </p:spTree>
+  </p:cSld>
+  <p:clrMapOvr>
+    <a:masterClrMapping/>
+  </p:clrMapOvr>
+</p:sld>
+</file>
+
+<file path=ppt/slides/slide16.xml><?xml version="1.0" encoding="utf-8"?>
+<p:sld xmlns:a="http://schemas.openxmlformats.org/drawingml/2006/main" xmlns:p="http://schemas.openxmlformats.org/presentationml/2006/main" xmlns:r="http://schemas.openxmlformats.org/officeDocument/2006/relationships">
+  <p:cSld>
+    <p:spTree>
+      <p:nvGrpSpPr>
+        <p:cNvPr id="1" name=""/>
+        <p:cNvGrpSpPr/>
+        <p:nvPr/>
+      </p:nvGrpSpPr>
+      <p:grpSpPr/>
+      <p:sp>
+        <p:nvSpPr>
+          <p:cNvPr id="2" name="Rectangle 1"/>
+          <p:cNvSpPr/>
+          <p:nvPr/>
+        </p:nvSpPr>
+        <p:spPr>
+          <a:xfrm>
+            <a:off x="0" y="0"/>
+            <a:ext cx="12191695" cy="6858000"/>
+          </a:xfrm>
+          <a:prstGeom prst="rect">
+            <a:avLst/>
+          </a:prstGeom>
+          <a:solidFill>
+            <a:srgbClr val="102A43"/>
+          </a:solidFill>
+          <a:ln>
+            <a:noFill/>
+          </a:ln>
+          <a:effectLst/>
+        </p:spPr>
+        <p:style>
+          <a:lnRef idx="1">
+            <a:schemeClr val="accent1"/>
+          </a:lnRef>
+          <a:fillRef idx="3">
+            <a:schemeClr val="accent1"/>
+          </a:fillRef>
+          <a:effectRef idx="2">
+            <a:schemeClr val="accent1"/>
+          </a:effectRef>
+          <a:fontRef idx="minor">
+            <a:schemeClr val="lt1"/>
+          </a:fontRef>
+        </p:style>
+        <p:txBody>
+          <a:bodyPr rtlCol="0" anchor="ctr"/>
+          <a:lstStyle/>
+          <a:p>
+            <a:pPr algn="ctr"/>
+          </a:p>
+        </p:txBody>
+      </p:sp>
+      <p:sp>
+        <p:nvSpPr>
+          <p:cNvPr id="3" name="TextBox 2"/>
+          <p:cNvSpPr txBox="1"/>
+          <p:nvPr/>
+        </p:nvSpPr>
+        <p:spPr>
+          <a:xfrm>
+            <a:off x="548640" y="548640"/>
+            <a:ext cx="11064240" cy="457200"/>
+          </a:xfrm>
+          <a:prstGeom prst="rect">
+            <a:avLst/>
+          </a:prstGeom>
+          <a:noFill/>
+        </p:spPr>
+        <p:txBody>
+          <a:bodyPr wrap="square">
+            <a:spAutoFit/>
+          </a:bodyPr>
+          <a:lstStyle/>
+          <a:p>
+            <a:r>
+              <a:rPr sz="1400" b="1">
+                <a:solidFill>
+                  <a:srgbClr val="F0B429"/>
+                </a:solidFill>
+                <a:latin typeface="Calibri"/>
+              </a:rPr>
+              <a:t>CASO 4 · DECISIÓN</a:t>
+            </a:r>
+          </a:p>
+        </p:txBody>
+      </p:sp>
+      <p:sp>
+        <p:nvSpPr>
+          <p:cNvPr id="4" name="TextBox 3"/>
+          <p:cNvSpPr txBox="1"/>
+          <p:nvPr/>
+        </p:nvSpPr>
+        <p:spPr>
+          <a:xfrm>
+            <a:off x="548640" y="1051560"/>
+            <a:ext cx="11064240" cy="822960"/>
+          </a:xfrm>
+          <a:prstGeom prst="rect">
+            <a:avLst/>
+          </a:prstGeom>
+          <a:noFill/>
+        </p:spPr>
+        <p:txBody>
+          <a:bodyPr wrap="square">
+            <a:spAutoFit/>
+          </a:bodyPr>
+          <a:lstStyle/>
+          <a:p>
+            <a:r>
+              <a:rPr sz="2600" b="1">
+                <a:solidFill>
+                  <a:srgbClr val="FFFFFF"/>
+                </a:solidFill>
+                <a:latin typeface="Cambria"/>
+              </a:rPr>
+              <a:t>Notas de apertura</a:t>
+            </a:r>
+          </a:p>
+        </p:txBody>
+      </p:sp>
+      <p:sp>
+        <p:nvSpPr>
+          <p:cNvPr id="5" name="TextBox 4"/>
+          <p:cNvSpPr txBox="1"/>
+          <p:nvPr/>
+        </p:nvSpPr>
+        <p:spPr>
+          <a:xfrm>
+            <a:off x="548640" y="2103120"/>
+            <a:ext cx="11064240" cy="3931920"/>
+          </a:xfrm>
+          <a:prstGeom prst="rect">
+            <a:avLst/>
+          </a:prstGeom>
+          <a:noFill/>
+        </p:spPr>
+        <p:txBody>
+          <a:bodyPr wrap="square">
+            <a:spAutoFit/>
+          </a:bodyPr>
+          <a:lstStyle/>
+          <a:p>
+            <a:r>
+              <a:rPr sz="2000" b="0">
+                <a:solidFill>
+                  <a:srgbClr val="CADCFC"/>
+                </a:solidFill>
+                <a:latin typeface="Calibri"/>
+              </a:rPr>
+              <a:t>Está prohibido usar cualquier fuente de información. Se sanciona con el art. 12.9 según la gravedad; puede llegar a la pérdida de la partida.</a:t>
+            </a:r>
+          </a:p>
+        </p:txBody>
+      </p:sp>
+      <p:sp>
+        <p:nvSpPr>
+          <p:cNvPr id="6" name="TextBox 5"/>
+          <p:cNvSpPr txBox="1"/>
+          <p:nvPr/>
+        </p:nvSpPr>
+        <p:spPr>
+          <a:xfrm>
+            <a:off x="548640" y="6263640"/>
+            <a:ext cx="11064240" cy="365760"/>
+          </a:xfrm>
+          <a:prstGeom prst="rect">
+            <a:avLst/>
+          </a:prstGeom>
+          <a:noFill/>
+        </p:spPr>
+        <p:txBody>
+          <a:bodyPr wrap="square">
+            <a:spAutoFit/>
+          </a:bodyPr>
+          <a:lstStyle/>
+          <a:p>
+            <a:r>
+              <a:rPr sz="1100" b="0">
+                <a:solidFill>
+                  <a:srgbClr val="9FB3C8"/>
+                </a:solidFill>
+                <a:latin typeface="Calibri"/>
+              </a:rPr>
+              <a:t>Fuente: Leyes del Ajedrez 2023 (Handbook E.I.01), art. 11.3.1 y 12.9</a:t>
+            </a:r>
+          </a:p>
+        </p:txBody>
+      </p:sp>
+    </p:spTree>
+  </p:cSld>
+  <p:clrMapOvr>
+    <a:masterClrMapping/>
+  </p:clrMapOvr>
+</p:sld>
+</file>
+
+<file path=ppt/slides/slide17.xml><?xml version="1.0" encoding="utf-8"?>
+<p:sld xmlns:a="http://schemas.openxmlformats.org/drawingml/2006/main" xmlns:p="http://schemas.openxmlformats.org/presentationml/2006/main" xmlns:r="http://schemas.openxmlformats.org/officeDocument/2006/relationships">
+  <p:cSld>
+    <p:spTree>
+      <p:nvGrpSpPr>
+        <p:cNvPr id="1" name=""/>
+        <p:cNvGrpSpPr/>
+        <p:nvPr/>
+      </p:nvGrpSpPr>
+      <p:grpSpPr/>
+      <p:sp>
+        <p:nvSpPr>
+          <p:cNvPr id="2" name="Oval 1"/>
+          <p:cNvSpPr/>
+          <p:nvPr/>
+        </p:nvSpPr>
+        <p:spPr>
+          <a:xfrm>
+            <a:off x="548640" y="502920"/>
+            <a:ext cx="502920" cy="502920"/>
+          </a:xfrm>
+          <a:prstGeom prst="ellipse">
+            <a:avLst/>
+          </a:prstGeom>
+          <a:solidFill>
+            <a:srgbClr val="DE911D"/>
+          </a:solidFill>
+          <a:ln>
+            <a:noFill/>
+          </a:ln>
+          <a:effectLst/>
+        </p:spPr>
+        <p:style>
+          <a:lnRef idx="1">
+            <a:schemeClr val="accent1"/>
+          </a:lnRef>
+          <a:fillRef idx="3">
+            <a:schemeClr val="accent1"/>
+          </a:fillRef>
+          <a:effectRef idx="2">
+            <a:schemeClr val="accent1"/>
+          </a:effectRef>
+          <a:fontRef idx="minor">
+            <a:schemeClr val="lt1"/>
+          </a:fontRef>
+        </p:style>
+        <p:txBody>
+          <a:bodyPr rtlCol="0" anchor="ctr"/>
+          <a:lstStyle/>
+          <a:p>
+            <a:pPr algn="ctr"/>
+          </a:p>
+        </p:txBody>
+      </p:sp>
+      <p:sp>
+        <p:nvSpPr>
+          <p:cNvPr id="3" name="TextBox 2"/>
+          <p:cNvSpPr txBox="1"/>
+          <p:nvPr/>
+        </p:nvSpPr>
+        <p:spPr>
+          <a:xfrm>
+            <a:off x="548640" y="502920"/>
+            <a:ext cx="502920" cy="502920"/>
+          </a:xfrm>
+          <a:prstGeom prst="rect">
+            <a:avLst/>
+          </a:prstGeom>
+          <a:noFill/>
+        </p:spPr>
+        <p:txBody>
+          <a:bodyPr wrap="square">
+            <a:spAutoFit/>
+          </a:bodyPr>
+          <a:lstStyle/>
+          <a:p>
+            <a:pPr algn="ctr"/>
+            <a:r>
+              <a:rPr sz="2000" b="0">
+                <a:solidFill>
+                  <a:srgbClr val="0A1F33"/>
+                </a:solidFill>
+                <a:latin typeface="Calibri"/>
+              </a:rPr>
+              <a:t>?</a:t>
+            </a:r>
+          </a:p>
+        </p:txBody>
+      </p:sp>
+      <p:sp>
+        <p:nvSpPr>
+          <p:cNvPr id="4" name="TextBox 3"/>
+          <p:cNvSpPr txBox="1"/>
+          <p:nvPr/>
+        </p:nvSpPr>
+        <p:spPr>
+          <a:xfrm>
+            <a:off x="1234440" y="530352"/>
+            <a:ext cx="9144000" cy="457200"/>
+          </a:xfrm>
+          <a:prstGeom prst="rect">
+            <a:avLst/>
+          </a:prstGeom>
+          <a:noFill/>
+        </p:spPr>
+        <p:txBody>
+          <a:bodyPr wrap="square">
+            <a:spAutoFit/>
+          </a:bodyPr>
+          <a:lstStyle/>
+          <a:p>
+            <a:r>
+              <a:rPr sz="1400" b="1">
+                <a:solidFill>
+                  <a:srgbClr val="DE911D"/>
+                </a:solidFill>
+                <a:latin typeface="Calibri"/>
+              </a:rPr>
+              <a:t>CASO 5 · ¿QUÉ DECIDE LA PERSONA ÁRBITRA?</a:t>
+            </a:r>
+          </a:p>
+        </p:txBody>
+      </p:sp>
+      <p:sp>
+        <p:nvSpPr>
+          <p:cNvPr id="5" name="TextBox 4"/>
+          <p:cNvSpPr txBox="1"/>
+          <p:nvPr/>
+        </p:nvSpPr>
+        <p:spPr>
+          <a:xfrm>
+            <a:off x="548640" y="1051560"/>
+            <a:ext cx="11064240" cy="822960"/>
+          </a:xfrm>
+          <a:prstGeom prst="rect">
+            <a:avLst/>
+          </a:prstGeom>
+          <a:noFill/>
+        </p:spPr>
+        <p:txBody>
+          <a:bodyPr wrap="square">
+            <a:spAutoFit/>
+          </a:bodyPr>
+          <a:lstStyle/>
+          <a:p>
+            <a:r>
+              <a:rPr sz="2600" b="1">
+                <a:solidFill>
+                  <a:srgbClr val="0A1F33"/>
+                </a:solidFill>
+                <a:latin typeface="Cambria"/>
+              </a:rPr>
+              <a:t>Análisis en la sala</a:t>
+            </a:r>
+          </a:p>
+        </p:txBody>
+      </p:sp>
+      <p:sp>
+        <p:nvSpPr>
+          <p:cNvPr id="6" name="Rectangle 5"/>
+          <p:cNvSpPr/>
+          <p:nvPr/>
+        </p:nvSpPr>
+        <p:spPr>
+          <a:xfrm>
+            <a:off x="548640" y="1965960"/>
+            <a:ext cx="11064240" cy="4206240"/>
+          </a:xfrm>
+          <a:prstGeom prst="rect">
+            <a:avLst/>
+          </a:prstGeom>
+          <a:solidFill>
+            <a:srgbClr val="F0F4F8"/>
+          </a:solidFill>
+          <a:ln>
+            <a:noFill/>
+          </a:ln>
+          <a:effectLst/>
+        </p:spPr>
+        <p:style>
+          <a:lnRef idx="1">
+            <a:schemeClr val="accent1"/>
+          </a:lnRef>
+          <a:fillRef idx="3">
+            <a:schemeClr val="accent1"/>
+          </a:fillRef>
+          <a:effectRef idx="2">
+            <a:schemeClr val="accent1"/>
+          </a:effectRef>
+          <a:fontRef idx="minor">
+            <a:schemeClr val="lt1"/>
+          </a:fontRef>
+        </p:style>
+        <p:txBody>
+          <a:bodyPr rtlCol="0" anchor="ctr"/>
+          <a:lstStyle/>
+          <a:p>
+            <a:pPr algn="ctr"/>
+          </a:p>
+        </p:txBody>
+      </p:sp>
+      <p:sp>
+        <p:nvSpPr>
+          <p:cNvPr id="7" name="TextBox 6"/>
+          <p:cNvSpPr txBox="1"/>
+          <p:nvPr/>
+        </p:nvSpPr>
+        <p:spPr>
+          <a:xfrm>
+            <a:off x="914400" y="2240280"/>
+            <a:ext cx="10332720" cy="3749039"/>
+          </a:xfrm>
+          <a:prstGeom prst="rect">
+            <a:avLst/>
+          </a:prstGeom>
+          <a:noFill/>
+        </p:spPr>
+        <p:txBody>
+          <a:bodyPr wrap="square">
+            <a:spAutoFit/>
+          </a:bodyPr>
+          <a:lstStyle/>
+          <a:p>
+            <a:r>
+              <a:rPr sz="2000" b="0">
+                <a:solidFill>
+                  <a:srgbClr val="334E68"/>
+                </a:solidFill>
+                <a:latin typeface="Calibri"/>
+              </a:rPr>
+              <a:t>Dos estudiantes que ya terminaron analizan su partida en un tablero de la sala, junto a mesas que siguen jugando.</a:t>
+            </a:r>
+          </a:p>
+        </p:txBody>
+      </p:sp>
+    </p:spTree>
+  </p:cSld>
+  <p:clrMapOvr>
+    <a:masterClrMapping/>
+  </p:clrMapOvr>
+</p:sld>
+</file>
+
+<file path=ppt/slides/slide18.xml><?xml version="1.0" encoding="utf-8"?>
+<p:sld xmlns:a="http://schemas.openxmlformats.org/drawingml/2006/main" xmlns:p="http://schemas.openxmlformats.org/presentationml/2006/main" xmlns:r="http://schemas.openxmlformats.org/officeDocument/2006/relationships">
+  <p:cSld>
+    <p:spTree>
+      <p:nvGrpSpPr>
+        <p:cNvPr id="1" name=""/>
+        <p:cNvGrpSpPr/>
+        <p:nvPr/>
+      </p:nvGrpSpPr>
+      <p:grpSpPr/>
+      <p:sp>
+        <p:nvSpPr>
+          <p:cNvPr id="2" name="Rectangle 1"/>
+          <p:cNvSpPr/>
+          <p:nvPr/>
+        </p:nvSpPr>
+        <p:spPr>
+          <a:xfrm>
+            <a:off x="0" y="0"/>
+            <a:ext cx="12191695" cy="6858000"/>
+          </a:xfrm>
+          <a:prstGeom prst="rect">
+            <a:avLst/>
+          </a:prstGeom>
+          <a:solidFill>
+            <a:srgbClr val="102A43"/>
+          </a:solidFill>
+          <a:ln>
+            <a:noFill/>
+          </a:ln>
+          <a:effectLst/>
+        </p:spPr>
+        <p:style>
+          <a:lnRef idx="1">
+            <a:schemeClr val="accent1"/>
+          </a:lnRef>
+          <a:fillRef idx="3">
+            <a:schemeClr val="accent1"/>
+          </a:fillRef>
+          <a:effectRef idx="2">
+            <a:schemeClr val="accent1"/>
+          </a:effectRef>
+          <a:fontRef idx="minor">
+            <a:schemeClr val="lt1"/>
+          </a:fontRef>
+        </p:style>
+        <p:txBody>
+          <a:bodyPr rtlCol="0" anchor="ctr"/>
+          <a:lstStyle/>
+          <a:p>
+            <a:pPr algn="ctr"/>
+          </a:p>
+        </p:txBody>
+      </p:sp>
+      <p:sp>
+        <p:nvSpPr>
+          <p:cNvPr id="3" name="TextBox 2"/>
+          <p:cNvSpPr txBox="1"/>
+          <p:nvPr/>
+        </p:nvSpPr>
+        <p:spPr>
+          <a:xfrm>
+            <a:off x="548640" y="548640"/>
+            <a:ext cx="11064240" cy="457200"/>
+          </a:xfrm>
+          <a:prstGeom prst="rect">
+            <a:avLst/>
+          </a:prstGeom>
+          <a:noFill/>
+        </p:spPr>
+        <p:txBody>
+          <a:bodyPr wrap="square">
+            <a:spAutoFit/>
+          </a:bodyPr>
+          <a:lstStyle/>
+          <a:p>
+            <a:r>
+              <a:rPr sz="1400" b="1">
+                <a:solidFill>
+                  <a:srgbClr val="F0B429"/>
+                </a:solidFill>
+                <a:latin typeface="Calibri"/>
+              </a:rPr>
+              <a:t>CASO 5 · DECISIÓN</a:t>
+            </a:r>
+          </a:p>
+        </p:txBody>
+      </p:sp>
+      <p:sp>
+        <p:nvSpPr>
+          <p:cNvPr id="4" name="TextBox 3"/>
+          <p:cNvSpPr txBox="1"/>
+          <p:nvPr/>
+        </p:nvSpPr>
+        <p:spPr>
+          <a:xfrm>
+            <a:off x="548640" y="1051560"/>
+            <a:ext cx="11064240" cy="822960"/>
+          </a:xfrm>
+          <a:prstGeom prst="rect">
+            <a:avLst/>
+          </a:prstGeom>
+          <a:noFill/>
+        </p:spPr>
+        <p:txBody>
+          <a:bodyPr wrap="square">
+            <a:spAutoFit/>
+          </a:bodyPr>
+          <a:lstStyle/>
+          <a:p>
+            <a:r>
+              <a:rPr sz="2600" b="1">
+                <a:solidFill>
+                  <a:srgbClr val="FFFFFF"/>
+                </a:solidFill>
+                <a:latin typeface="Cambria"/>
+              </a:rPr>
+              <a:t>Análisis en la sala</a:t>
+            </a:r>
+          </a:p>
+        </p:txBody>
+      </p:sp>
+      <p:sp>
+        <p:nvSpPr>
+          <p:cNvPr id="5" name="TextBox 4"/>
+          <p:cNvSpPr txBox="1"/>
+          <p:nvPr/>
+        </p:nvSpPr>
+        <p:spPr>
+          <a:xfrm>
+            <a:off x="548640" y="2103120"/>
+            <a:ext cx="11064240" cy="3931920"/>
+          </a:xfrm>
+          <a:prstGeom prst="rect">
+            <a:avLst/>
+          </a:prstGeom>
+          <a:noFill/>
+        </p:spPr>
+        <p:txBody>
+          <a:bodyPr wrap="square">
+            <a:spAutoFit/>
+          </a:bodyPr>
+          <a:lstStyle/>
+          <a:p>
+            <a:r>
+              <a:rPr sz="2000" b="0">
+                <a:solidFill>
+                  <a:srgbClr val="CADCFC"/>
+                </a:solidFill>
+                <a:latin typeface="Calibri"/>
+              </a:rPr>
+              <a:t>Ya son espectadores y no pueden interferir. El árbitro les pide ir a la sala de análisis o salir; si insisten, aplica una sanción.</a:t>
+            </a:r>
+          </a:p>
+        </p:txBody>
+      </p:sp>
+      <p:sp>
+        <p:nvSpPr>
+          <p:cNvPr id="6" name="TextBox 5"/>
+          <p:cNvSpPr txBox="1"/>
+          <p:nvPr/>
+        </p:nvSpPr>
+        <p:spPr>
+          <a:xfrm>
+            <a:off x="548640" y="6263640"/>
+            <a:ext cx="11064240" cy="365760"/>
+          </a:xfrm>
+          <a:prstGeom prst="rect">
+            <a:avLst/>
+          </a:prstGeom>
+          <a:noFill/>
+        </p:spPr>
+        <p:txBody>
+          <a:bodyPr wrap="square">
+            <a:spAutoFit/>
+          </a:bodyPr>
+          <a:lstStyle/>
+          <a:p>
+            <a:r>
+              <a:rPr sz="1100" b="0">
+                <a:solidFill>
+                  <a:srgbClr val="9FB3C8"/>
+                </a:solidFill>
+                <a:latin typeface="Calibri"/>
+              </a:rPr>
+              <a:t>Fuente: Leyes del Ajedrez 2023 (Handbook E.I.01), art. 11.4 y 12.7</a:t>
+            </a:r>
+          </a:p>
+        </p:txBody>
+      </p:sp>
+    </p:spTree>
+  </p:cSld>
+  <p:clrMapOvr>
+    <a:masterClrMapping/>
+  </p:clrMapOvr>
+</p:sld>
+</file>
+
+<file path=ppt/slides/slide19.xml><?xml version="1.0" encoding="utf-8"?>
+<p:sld xmlns:a="http://schemas.openxmlformats.org/drawingml/2006/main" xmlns:p="http://schemas.openxmlformats.org/presentationml/2006/main" xmlns:r="http://schemas.openxmlformats.org/officeDocument/2006/relationships">
+  <p:cSld>
+    <p:spTree>
+      <p:nvGrpSpPr>
+        <p:cNvPr id="1" name=""/>
+        <p:cNvGrpSpPr/>
+        <p:nvPr/>
+      </p:nvGrpSpPr>
+      <p:grpSpPr/>
+      <p:sp>
+        <p:nvSpPr>
+          <p:cNvPr id="2" name="Oval 1"/>
+          <p:cNvSpPr/>
+          <p:nvPr/>
+        </p:nvSpPr>
+        <p:spPr>
+          <a:xfrm>
+            <a:off x="548640" y="502920"/>
+            <a:ext cx="502920" cy="502920"/>
+          </a:xfrm>
+          <a:prstGeom prst="ellipse">
+            <a:avLst/>
+          </a:prstGeom>
+          <a:solidFill>
+            <a:srgbClr val="DE911D"/>
+          </a:solidFill>
+          <a:ln>
+            <a:noFill/>
+          </a:ln>
+          <a:effectLst/>
+        </p:spPr>
+        <p:style>
+          <a:lnRef idx="1">
+            <a:schemeClr val="accent1"/>
+          </a:lnRef>
+          <a:fillRef idx="3">
+            <a:schemeClr val="accent1"/>
+          </a:fillRef>
+          <a:effectRef idx="2">
+            <a:schemeClr val="accent1"/>
+          </a:effectRef>
+          <a:fontRef idx="minor">
+            <a:schemeClr val="lt1"/>
+          </a:fontRef>
+        </p:style>
+        <p:txBody>
+          <a:bodyPr rtlCol="0" anchor="ctr"/>
+          <a:lstStyle/>
+          <a:p>
+            <a:pPr algn="ctr"/>
+          </a:p>
+        </p:txBody>
+      </p:sp>
+      <p:sp>
+        <p:nvSpPr>
+          <p:cNvPr id="3" name="TextBox 2"/>
+          <p:cNvSpPr txBox="1"/>
+          <p:nvPr/>
+        </p:nvSpPr>
+        <p:spPr>
+          <a:xfrm>
+            <a:off x="548640" y="502920"/>
+            <a:ext cx="502920" cy="502920"/>
+          </a:xfrm>
+          <a:prstGeom prst="rect">
+            <a:avLst/>
+          </a:prstGeom>
+          <a:noFill/>
+        </p:spPr>
+        <p:txBody>
+          <a:bodyPr wrap="square">
+            <a:spAutoFit/>
+          </a:bodyPr>
+          <a:lstStyle/>
+          <a:p>
+            <a:pPr algn="ctr"/>
+            <a:r>
+              <a:rPr sz="2000" b="0">
+                <a:solidFill>
+                  <a:srgbClr val="0A1F33"/>
+                </a:solidFill>
+                <a:latin typeface="Calibri"/>
+              </a:rPr>
+              <a:t>?</a:t>
+            </a:r>
+          </a:p>
+        </p:txBody>
+      </p:sp>
+      <p:sp>
+        <p:nvSpPr>
+          <p:cNvPr id="4" name="TextBox 3"/>
+          <p:cNvSpPr txBox="1"/>
+          <p:nvPr/>
+        </p:nvSpPr>
+        <p:spPr>
+          <a:xfrm>
+            <a:off x="1234440" y="530352"/>
+            <a:ext cx="9144000" cy="457200"/>
+          </a:xfrm>
+          <a:prstGeom prst="rect">
+            <a:avLst/>
+          </a:prstGeom>
+          <a:noFill/>
+        </p:spPr>
+        <p:txBody>
+          <a:bodyPr wrap="square">
+            <a:spAutoFit/>
+          </a:bodyPr>
+          <a:lstStyle/>
+          <a:p>
+            <a:r>
+              <a:rPr sz="1400" b="1">
+                <a:solidFill>
+                  <a:srgbClr val="DE911D"/>
+                </a:solidFill>
+                <a:latin typeface="Calibri"/>
+              </a:rPr>
+              <a:t>CASO 6 · ¿QUÉ DECIDE LA PERSONA ÁRBITRA?</a:t>
+            </a:r>
+          </a:p>
+        </p:txBody>
+      </p:sp>
+      <p:sp>
+        <p:nvSpPr>
+          <p:cNvPr id="5" name="TextBox 4"/>
+          <p:cNvSpPr txBox="1"/>
+          <p:nvPr/>
+        </p:nvSpPr>
+        <p:spPr>
+          <a:xfrm>
+            <a:off x="548640" y="1051560"/>
+            <a:ext cx="11064240" cy="822960"/>
+          </a:xfrm>
+          <a:prstGeom prst="rect">
+            <a:avLst/>
+          </a:prstGeom>
+          <a:noFill/>
+        </p:spPr>
+        <p:txBody>
+          <a:bodyPr wrap="square">
+            <a:spAutoFit/>
+          </a:bodyPr>
+          <a:lstStyle/>
+          <a:p>
+            <a:r>
+              <a:rPr sz="2600" b="1">
+                <a:solidFill>
+                  <a:srgbClr val="0A1F33"/>
+                </a:solidFill>
+                <a:latin typeface="Cambria"/>
+              </a:rPr>
+              <a:t>Piezas volcadas</a:t>
+            </a:r>
+          </a:p>
+        </p:txBody>
+      </p:sp>
+      <p:sp>
+        <p:nvSpPr>
+          <p:cNvPr id="6" name="Rectangle 5"/>
+          <p:cNvSpPr/>
+          <p:nvPr/>
+        </p:nvSpPr>
+        <p:spPr>
+          <a:xfrm>
+            <a:off x="548640" y="1965960"/>
+            <a:ext cx="11064240" cy="4206240"/>
+          </a:xfrm>
+          <a:prstGeom prst="rect">
+            <a:avLst/>
+          </a:prstGeom>
+          <a:solidFill>
+            <a:srgbClr val="F0F4F8"/>
+          </a:solidFill>
+          <a:ln>
+            <a:noFill/>
+          </a:ln>
+          <a:effectLst/>
+        </p:spPr>
+        <p:style>
+          <a:lnRef idx="1">
+            <a:schemeClr val="accent1"/>
+          </a:lnRef>
+          <a:fillRef idx="3">
+            <a:schemeClr val="accent1"/>
+          </a:fillRef>
+          <a:effectRef idx="2">
+            <a:schemeClr val="accent1"/>
+          </a:effectRef>
+          <a:fontRef idx="minor">
+            <a:schemeClr val="lt1"/>
+          </a:fontRef>
+        </p:style>
+        <p:txBody>
+          <a:bodyPr rtlCol="0" anchor="ctr"/>
+          <a:lstStyle/>
+          <a:p>
+            <a:pPr algn="ctr"/>
+          </a:p>
+        </p:txBody>
+      </p:sp>
+      <p:sp>
+        <p:nvSpPr>
+          <p:cNvPr id="7" name="TextBox 6"/>
+          <p:cNvSpPr txBox="1"/>
+          <p:nvPr/>
+        </p:nvSpPr>
+        <p:spPr>
+          <a:xfrm>
+            <a:off x="914400" y="2240280"/>
+            <a:ext cx="10332720" cy="3749039"/>
+          </a:xfrm>
+          <a:prstGeom prst="rect">
+            <a:avLst/>
+          </a:prstGeom>
+          <a:noFill/>
+        </p:spPr>
+        <p:txBody>
+          <a:bodyPr wrap="square">
+            <a:spAutoFit/>
+          </a:bodyPr>
+          <a:lstStyle/>
+          <a:p>
+            <a:r>
+              <a:rPr sz="2000" b="0">
+                <a:solidFill>
+                  <a:srgbClr val="334E68"/>
+                </a:solidFill>
+                <a:latin typeface="Calibri"/>
+              </a:rPr>
+              <a:t>En apuro de tiempo, un jugador vuelca varias piezas al mover y presiona el reloj sin reponerlas.</a:t>
+            </a:r>
+          </a:p>
+        </p:txBody>
+      </p:sp>
+    </p:spTree>
+  </p:cSld>
+  <p:clrMapOvr>
+    <a:masterClrMapping/>
+  </p:clrMapOvr>
+</p:sld>
+</file>
+
 <file path=ppt/slides/slide2.xml><?xml version="1.0" encoding="utf-8"?>
 <p:sld xmlns:a="http://schemas.openxmlformats.org/drawingml/2006/main" xmlns:p="http://schemas.openxmlformats.org/presentationml/2006/main" xmlns:r="http://schemas.openxmlformats.org/officeDocument/2006/relationships">
   <p:cSld>
@@ -3565,7 +5794,7 @@
                 </a:solidFill>
                 <a:latin typeface="Calibri"/>
               </a:rPr>
-              <a:t>⚖</a:t>
+              <a:t>◎</a:t>
             </a:r>
           </a:p>
         </p:txBody>
@@ -3579,7 +5808,7 @@
         <p:spPr>
           <a:xfrm>
             <a:off x="1234440" y="530352"/>
-            <a:ext cx="7315200" cy="457200"/>
+            <a:ext cx="9144000" cy="457200"/>
           </a:xfrm>
           <a:prstGeom prst="rect">
             <a:avLst/>
@@ -3599,7 +5828,7 @@
                 </a:solidFill>
                 <a:latin typeface="Calibri"/>
               </a:rPr>
-              <a:t>CONTENIDO DE LA SESIÓN</a:t>
+              <a:t>OBJETIVOS DE LA SESIÓN</a:t>
             </a:r>
           </a:p>
         </p:txBody>
@@ -3690,28 +5919,2331 @@
         </p:nvSpPr>
         <p:spPr>
           <a:xfrm>
-            <a:off x="1005840" y="2331720"/>
-            <a:ext cx="10241280" cy="3566160"/>
-          </a:xfrm>
-          <a:prstGeom prst="rect">
-            <a:avLst/>
-          </a:prstGeom>
-          <a:noFill/>
-        </p:spPr>
-        <p:txBody>
-          <a:bodyPr wrap="square">
-            <a:spAutoFit/>
-          </a:bodyPr>
-          <a:lstStyle/>
-          <a:p>
-            <a:r>
-              <a:rPr sz="1600" b="0">
+            <a:off x="914400" y="2194560"/>
+            <a:ext cx="10332720" cy="3931920"/>
+          </a:xfrm>
+          <a:prstGeom prst="rect">
+            <a:avLst/>
+          </a:prstGeom>
+          <a:noFill/>
+        </p:spPr>
+        <p:txBody>
+          <a:bodyPr wrap="square">
+            <a:spAutoFit/>
+          </a:bodyPr>
+          <a:lstStyle/>
+          <a:p>
+            <a:pPr>
+              <a:spcAft>
+                <a:spcPts val="800"/>
+              </a:spcAft>
+            </a:pPr>
+            <a:r>
+              <a:rPr sz="1600">
                 <a:solidFill>
                   <a:srgbClr val="334E68"/>
                 </a:solidFill>
                 <a:latin typeface="Calibri"/>
               </a:rPr>
-              <a:t>Conducta durante la partida, uso de dispositivos electrónicos y anotación obligatoria.</a:t>
+              <a:t>•  Aplicar las normas de conducta y de la zona de juego durante una ronda.</a:t>
+            </a:r>
+          </a:p>
+          <a:p>
+            <a:pPr>
+              <a:spcAft>
+                <a:spcPts val="800"/>
+              </a:spcAft>
+            </a:pPr>
+            <a:r>
+              <a:rPr sz="1600">
+                <a:solidFill>
+                  <a:srgbClr val="334E68"/>
+                </a:solidFill>
+                <a:latin typeface="Calibri"/>
+              </a:rPr>
+              <a:t>•  Resolver incidencias con dispositivos electrónicos según el art. 11.3 y el reglamento del torneo.</a:t>
+            </a:r>
+          </a:p>
+          <a:p>
+            <a:pPr>
+              <a:spcAft>
+                <a:spcPts val="800"/>
+              </a:spcAft>
+            </a:pPr>
+            <a:r>
+              <a:rPr sz="1600">
+                <a:solidFill>
+                  <a:srgbClr val="334E68"/>
+                </a:solidFill>
+                <a:latin typeface="Calibri"/>
+              </a:rPr>
+              <a:t>•  Tratar jugadas ilegales, piezas desplazadas y posiciones incorrectas con el procedimiento del art. 7.</a:t>
+            </a:r>
+          </a:p>
+          <a:p>
+            <a:pPr>
+              <a:spcAft>
+                <a:spcPts val="800"/>
+              </a:spcAft>
+            </a:pPr>
+            <a:r>
+              <a:rPr sz="1600">
+                <a:solidFill>
+                  <a:srgbClr val="334E68"/>
+                </a:solidFill>
+                <a:latin typeface="Calibri"/>
+              </a:rPr>
+              <a:t>•  Elegir una sanción proporcionada del catálogo del art. 12.9.</a:t>
+            </a:r>
+          </a:p>
+          <a:p>
+            <a:pPr>
+              <a:spcAft>
+                <a:spcPts val="800"/>
+              </a:spcAft>
+            </a:pPr>
+            <a:r>
+              <a:rPr sz="1600">
+                <a:solidFill>
+                  <a:srgbClr val="334E68"/>
+                </a:solidFill>
+                <a:latin typeface="Calibri"/>
+              </a:rPr>
+              <a:t>•  Atender un reclamo de principio a fin: escuchar, verificar, decidir y registrar.</a:t>
+            </a:r>
+          </a:p>
+        </p:txBody>
+      </p:sp>
+    </p:spTree>
+  </p:cSld>
+  <p:clrMapOvr>
+    <a:masterClrMapping/>
+  </p:clrMapOvr>
+</p:sld>
+</file>
+
+<file path=ppt/slides/slide20.xml><?xml version="1.0" encoding="utf-8"?>
+<p:sld xmlns:a="http://schemas.openxmlformats.org/drawingml/2006/main" xmlns:p="http://schemas.openxmlformats.org/presentationml/2006/main" xmlns:r="http://schemas.openxmlformats.org/officeDocument/2006/relationships">
+  <p:cSld>
+    <p:spTree>
+      <p:nvGrpSpPr>
+        <p:cNvPr id="1" name=""/>
+        <p:cNvGrpSpPr/>
+        <p:nvPr/>
+      </p:nvGrpSpPr>
+      <p:grpSpPr/>
+      <p:sp>
+        <p:nvSpPr>
+          <p:cNvPr id="2" name="Rectangle 1"/>
+          <p:cNvSpPr/>
+          <p:nvPr/>
+        </p:nvSpPr>
+        <p:spPr>
+          <a:xfrm>
+            <a:off x="0" y="0"/>
+            <a:ext cx="12191695" cy="6858000"/>
+          </a:xfrm>
+          <a:prstGeom prst="rect">
+            <a:avLst/>
+          </a:prstGeom>
+          <a:solidFill>
+            <a:srgbClr val="102A43"/>
+          </a:solidFill>
+          <a:ln>
+            <a:noFill/>
+          </a:ln>
+          <a:effectLst/>
+        </p:spPr>
+        <p:style>
+          <a:lnRef idx="1">
+            <a:schemeClr val="accent1"/>
+          </a:lnRef>
+          <a:fillRef idx="3">
+            <a:schemeClr val="accent1"/>
+          </a:fillRef>
+          <a:effectRef idx="2">
+            <a:schemeClr val="accent1"/>
+          </a:effectRef>
+          <a:fontRef idx="minor">
+            <a:schemeClr val="lt1"/>
+          </a:fontRef>
+        </p:style>
+        <p:txBody>
+          <a:bodyPr rtlCol="0" anchor="ctr"/>
+          <a:lstStyle/>
+          <a:p>
+            <a:pPr algn="ctr"/>
+          </a:p>
+        </p:txBody>
+      </p:sp>
+      <p:sp>
+        <p:nvSpPr>
+          <p:cNvPr id="3" name="TextBox 2"/>
+          <p:cNvSpPr txBox="1"/>
+          <p:nvPr/>
+        </p:nvSpPr>
+        <p:spPr>
+          <a:xfrm>
+            <a:off x="548640" y="548640"/>
+            <a:ext cx="11064240" cy="457200"/>
+          </a:xfrm>
+          <a:prstGeom prst="rect">
+            <a:avLst/>
+          </a:prstGeom>
+          <a:noFill/>
+        </p:spPr>
+        <p:txBody>
+          <a:bodyPr wrap="square">
+            <a:spAutoFit/>
+          </a:bodyPr>
+          <a:lstStyle/>
+          <a:p>
+            <a:r>
+              <a:rPr sz="1400" b="1">
+                <a:solidFill>
+                  <a:srgbClr val="F0B429"/>
+                </a:solidFill>
+                <a:latin typeface="Calibri"/>
+              </a:rPr>
+              <a:t>CASO 6 · DECISIÓN</a:t>
+            </a:r>
+          </a:p>
+        </p:txBody>
+      </p:sp>
+      <p:sp>
+        <p:nvSpPr>
+          <p:cNvPr id="4" name="TextBox 3"/>
+          <p:cNvSpPr txBox="1"/>
+          <p:nvPr/>
+        </p:nvSpPr>
+        <p:spPr>
+          <a:xfrm>
+            <a:off x="548640" y="1051560"/>
+            <a:ext cx="11064240" cy="822960"/>
+          </a:xfrm>
+          <a:prstGeom prst="rect">
+            <a:avLst/>
+          </a:prstGeom>
+          <a:noFill/>
+        </p:spPr>
+        <p:txBody>
+          <a:bodyPr wrap="square">
+            <a:spAutoFit/>
+          </a:bodyPr>
+          <a:lstStyle/>
+          <a:p>
+            <a:r>
+              <a:rPr sz="2600" b="1">
+                <a:solidFill>
+                  <a:srgbClr val="FFFFFF"/>
+                </a:solidFill>
+                <a:latin typeface="Cambria"/>
+              </a:rPr>
+              <a:t>Piezas volcadas</a:t>
+            </a:r>
+          </a:p>
+        </p:txBody>
+      </p:sp>
+      <p:sp>
+        <p:nvSpPr>
+          <p:cNvPr id="5" name="TextBox 4"/>
+          <p:cNvSpPr txBox="1"/>
+          <p:nvPr/>
+        </p:nvSpPr>
+        <p:spPr>
+          <a:xfrm>
+            <a:off x="548640" y="2103120"/>
+            <a:ext cx="11064240" cy="3931920"/>
+          </a:xfrm>
+          <a:prstGeom prst="rect">
+            <a:avLst/>
+          </a:prstGeom>
+          <a:noFill/>
+        </p:spPr>
+        <p:txBody>
+          <a:bodyPr wrap="square">
+            <a:spAutoFit/>
+          </a:bodyPr>
+          <a:lstStyle/>
+          <a:p>
+            <a:r>
+              <a:rPr sz="2000" b="0">
+                <a:solidFill>
+                  <a:srgbClr val="CADCFC"/>
+                </a:solidFill>
+                <a:latin typeface="Calibri"/>
+              </a:rPr>
+              <a:t>Debe reponerlas con su propio tiempo; el rival puede pausar el reloj y llamar al árbitro. El árbitro puede sancionarlo por conducta si lo hace de forma repetida.</a:t>
+            </a:r>
+          </a:p>
+        </p:txBody>
+      </p:sp>
+      <p:sp>
+        <p:nvSpPr>
+          <p:cNvPr id="6" name="TextBox 5"/>
+          <p:cNvSpPr txBox="1"/>
+          <p:nvPr/>
+        </p:nvSpPr>
+        <p:spPr>
+          <a:xfrm>
+            <a:off x="548640" y="6263640"/>
+            <a:ext cx="11064240" cy="365760"/>
+          </a:xfrm>
+          <a:prstGeom prst="rect">
+            <a:avLst/>
+          </a:prstGeom>
+          <a:noFill/>
+        </p:spPr>
+        <p:txBody>
+          <a:bodyPr wrap="square">
+            <a:spAutoFit/>
+          </a:bodyPr>
+          <a:lstStyle/>
+          <a:p>
+            <a:r>
+              <a:rPr sz="1100" b="0">
+                <a:solidFill>
+                  <a:srgbClr val="9FB3C8"/>
+                </a:solidFill>
+                <a:latin typeface="Calibri"/>
+              </a:rPr>
+              <a:t>Fuente: Leyes del Ajedrez 2023 (Handbook E.I.01), art. 7.4</a:t>
+            </a:r>
+          </a:p>
+        </p:txBody>
+      </p:sp>
+    </p:spTree>
+  </p:cSld>
+  <p:clrMapOvr>
+    <a:masterClrMapping/>
+  </p:clrMapOvr>
+</p:sld>
+</file>
+
+<file path=ppt/slides/slide21.xml><?xml version="1.0" encoding="utf-8"?>
+<p:sld xmlns:a="http://schemas.openxmlformats.org/drawingml/2006/main" xmlns:p="http://schemas.openxmlformats.org/presentationml/2006/main" xmlns:r="http://schemas.openxmlformats.org/officeDocument/2006/relationships">
+  <p:cSld>
+    <p:spTree>
+      <p:nvGrpSpPr>
+        <p:cNvPr id="1" name=""/>
+        <p:cNvGrpSpPr/>
+        <p:nvPr/>
+      </p:nvGrpSpPr>
+      <p:grpSpPr/>
+      <p:sp>
+        <p:nvSpPr>
+          <p:cNvPr id="2" name="Rectangle 1"/>
+          <p:cNvSpPr/>
+          <p:nvPr/>
+        </p:nvSpPr>
+        <p:spPr>
+          <a:xfrm>
+            <a:off x="0" y="0"/>
+            <a:ext cx="12191695" cy="6858000"/>
+          </a:xfrm>
+          <a:prstGeom prst="rect">
+            <a:avLst/>
+          </a:prstGeom>
+          <a:solidFill>
+            <a:srgbClr val="102A43"/>
+          </a:solidFill>
+          <a:ln>
+            <a:noFill/>
+          </a:ln>
+          <a:effectLst/>
+        </p:spPr>
+        <p:style>
+          <a:lnRef idx="1">
+            <a:schemeClr val="accent1"/>
+          </a:lnRef>
+          <a:fillRef idx="3">
+            <a:schemeClr val="accent1"/>
+          </a:fillRef>
+          <a:effectRef idx="2">
+            <a:schemeClr val="accent1"/>
+          </a:effectRef>
+          <a:fontRef idx="minor">
+            <a:schemeClr val="lt1"/>
+          </a:fontRef>
+        </p:style>
+        <p:txBody>
+          <a:bodyPr rtlCol="0" anchor="ctr"/>
+          <a:lstStyle/>
+          <a:p>
+            <a:pPr algn="ctr"/>
+          </a:p>
+        </p:txBody>
+      </p:sp>
+      <p:sp>
+        <p:nvSpPr>
+          <p:cNvPr id="3" name="Oval 2"/>
+          <p:cNvSpPr/>
+          <p:nvPr/>
+        </p:nvSpPr>
+        <p:spPr>
+          <a:xfrm>
+            <a:off x="-1280160" y="-1463040"/>
+            <a:ext cx="4114800" cy="4114800"/>
+          </a:xfrm>
+          <a:prstGeom prst="ellipse">
+            <a:avLst/>
+          </a:prstGeom>
+          <a:solidFill>
+            <a:srgbClr val="0A1F33"/>
+          </a:solidFill>
+          <a:ln>
+            <a:noFill/>
+          </a:ln>
+          <a:effectLst/>
+        </p:spPr>
+        <p:style>
+          <a:lnRef idx="1">
+            <a:schemeClr val="accent1"/>
+          </a:lnRef>
+          <a:fillRef idx="3">
+            <a:schemeClr val="accent1"/>
+          </a:fillRef>
+          <a:effectRef idx="2">
+            <a:schemeClr val="accent1"/>
+          </a:effectRef>
+          <a:fontRef idx="minor">
+            <a:schemeClr val="lt1"/>
+          </a:fontRef>
+        </p:style>
+        <p:txBody>
+          <a:bodyPr rtlCol="0" anchor="ctr"/>
+          <a:lstStyle/>
+          <a:p>
+            <a:pPr algn="ctr"/>
+          </a:p>
+        </p:txBody>
+      </p:sp>
+      <p:sp>
+        <p:nvSpPr>
+          <p:cNvPr id="4" name="Oval 3"/>
+          <p:cNvSpPr/>
+          <p:nvPr/>
+        </p:nvSpPr>
+        <p:spPr>
+          <a:xfrm>
+            <a:off x="5175504" y="822960"/>
+            <a:ext cx="1828800" cy="1828800"/>
+          </a:xfrm>
+          <a:prstGeom prst="ellipse">
+            <a:avLst/>
+          </a:prstGeom>
+          <a:solidFill>
+            <a:srgbClr val="DE911D"/>
+          </a:solidFill>
+          <a:ln>
+            <a:noFill/>
+          </a:ln>
+          <a:effectLst/>
+        </p:spPr>
+        <p:style>
+          <a:lnRef idx="1">
+            <a:schemeClr val="accent1"/>
+          </a:lnRef>
+          <a:fillRef idx="3">
+            <a:schemeClr val="accent1"/>
+          </a:fillRef>
+          <a:effectRef idx="2">
+            <a:schemeClr val="accent1"/>
+          </a:effectRef>
+          <a:fontRef idx="minor">
+            <a:schemeClr val="lt1"/>
+          </a:fontRef>
+        </p:style>
+        <p:txBody>
+          <a:bodyPr rtlCol="0" anchor="ctr"/>
+          <a:lstStyle/>
+          <a:p>
+            <a:pPr algn="ctr"/>
+          </a:p>
+        </p:txBody>
+      </p:sp>
+      <p:sp>
+        <p:nvSpPr>
+          <p:cNvPr id="5" name="TextBox 4"/>
+          <p:cNvSpPr txBox="1"/>
+          <p:nvPr/>
+        </p:nvSpPr>
+        <p:spPr>
+          <a:xfrm>
+            <a:off x="5175504" y="822960"/>
+            <a:ext cx="1828800" cy="1828800"/>
+          </a:xfrm>
+          <a:prstGeom prst="rect">
+            <a:avLst/>
+          </a:prstGeom>
+          <a:noFill/>
+        </p:spPr>
+        <p:txBody>
+          <a:bodyPr wrap="square">
+            <a:spAutoFit/>
+          </a:bodyPr>
+          <a:lstStyle/>
+          <a:p>
+            <a:pPr algn="ctr"/>
+            <a:r>
+              <a:rPr sz="4400" b="1">
+                <a:solidFill>
+                  <a:srgbClr val="0A1F33"/>
+                </a:solidFill>
+                <a:latin typeface="Calibri"/>
+              </a:rPr>
+              <a:t>✔</a:t>
+            </a:r>
+          </a:p>
+        </p:txBody>
+      </p:sp>
+      <p:sp>
+        <p:nvSpPr>
+          <p:cNvPr id="6" name="TextBox 5"/>
+          <p:cNvSpPr txBox="1"/>
+          <p:nvPr/>
+        </p:nvSpPr>
+        <p:spPr>
+          <a:xfrm>
+            <a:off x="548640" y="2880360"/>
+            <a:ext cx="11064240" cy="457200"/>
+          </a:xfrm>
+          <a:prstGeom prst="rect">
+            <a:avLst/>
+          </a:prstGeom>
+          <a:noFill/>
+        </p:spPr>
+        <p:txBody>
+          <a:bodyPr wrap="square">
+            <a:spAutoFit/>
+          </a:bodyPr>
+          <a:lstStyle/>
+          <a:p>
+            <a:pPr algn="ctr"/>
+            <a:r>
+              <a:rPr sz="1400" b="1">
+                <a:solidFill>
+                  <a:srgbClr val="F0B429"/>
+                </a:solidFill>
+                <a:latin typeface="Calibri"/>
+              </a:rPr>
+              <a:t>PRÁCTICA — SIMULACIÓN DE RECLAMOS EN SALAS DE TRABAJO</a:t>
+            </a:r>
+          </a:p>
+        </p:txBody>
+      </p:sp>
+      <p:sp>
+        <p:nvSpPr>
+          <p:cNvPr id="7" name="TextBox 6"/>
+          <p:cNvSpPr txBox="1"/>
+          <p:nvPr/>
+        </p:nvSpPr>
+        <p:spPr>
+          <a:xfrm>
+            <a:off x="1280160" y="3383280"/>
+            <a:ext cx="9601200" cy="2377440"/>
+          </a:xfrm>
+          <a:prstGeom prst="rect">
+            <a:avLst/>
+          </a:prstGeom>
+          <a:noFill/>
+        </p:spPr>
+        <p:txBody>
+          <a:bodyPr wrap="square">
+            <a:spAutoFit/>
+          </a:bodyPr>
+          <a:lstStyle/>
+          <a:p>
+            <a:pPr algn="ctr"/>
+            <a:r>
+              <a:rPr sz="2000" b="0">
+                <a:solidFill>
+                  <a:srgbClr val="FFFFFF"/>
+                </a:solidFill>
+                <a:latin typeface="Cambria"/>
+              </a:rPr>
+              <a:t>En subgrupos, cada participante asume el rol de árbitro ante un reclamo distinto y debe resolverlo aplicando el procedimiento correcto.</a:t>
+            </a:r>
+          </a:p>
+        </p:txBody>
+      </p:sp>
+      <p:sp>
+        <p:nvSpPr>
+          <p:cNvPr id="8" name="TextBox 7"/>
+          <p:cNvSpPr txBox="1"/>
+          <p:nvPr/>
+        </p:nvSpPr>
+        <p:spPr>
+          <a:xfrm>
+            <a:off x="548640" y="6263640"/>
+            <a:ext cx="11064240" cy="365760"/>
+          </a:xfrm>
+          <a:prstGeom prst="rect">
+            <a:avLst/>
+          </a:prstGeom>
+          <a:noFill/>
+        </p:spPr>
+        <p:txBody>
+          <a:bodyPr wrap="square">
+            <a:spAutoFit/>
+          </a:bodyPr>
+          <a:lstStyle/>
+          <a:p>
+            <a:pPr algn="ctr"/>
+            <a:r>
+              <a:rPr sz="1200" b="0">
+                <a:solidFill>
+                  <a:srgbClr val="9FB3C8"/>
+                </a:solidFill>
+                <a:latin typeface="Calibri"/>
+              </a:rPr>
+              <a:t>Formación Ajedrez · Sesión 2</a:t>
+            </a:r>
+          </a:p>
+        </p:txBody>
+      </p:sp>
+    </p:spTree>
+  </p:cSld>
+  <p:clrMapOvr>
+    <a:masterClrMapping/>
+  </p:clrMapOvr>
+</p:sld>
+</file>
+
+<file path=ppt/slides/slide22.xml><?xml version="1.0" encoding="utf-8"?>
+<p:sld xmlns:a="http://schemas.openxmlformats.org/drawingml/2006/main" xmlns:p="http://schemas.openxmlformats.org/presentationml/2006/main" xmlns:r="http://schemas.openxmlformats.org/officeDocument/2006/relationships">
+  <p:cSld>
+    <p:spTree>
+      <p:nvGrpSpPr>
+        <p:cNvPr id="1" name=""/>
+        <p:cNvGrpSpPr/>
+        <p:nvPr/>
+      </p:nvGrpSpPr>
+      <p:grpSpPr/>
+      <p:sp>
+        <p:nvSpPr>
+          <p:cNvPr id="2" name="Oval 1"/>
+          <p:cNvSpPr/>
+          <p:nvPr/>
+        </p:nvSpPr>
+        <p:spPr>
+          <a:xfrm>
+            <a:off x="548640" y="502920"/>
+            <a:ext cx="502920" cy="502920"/>
+          </a:xfrm>
+          <a:prstGeom prst="ellipse">
+            <a:avLst/>
+          </a:prstGeom>
+          <a:solidFill>
+            <a:srgbClr val="DE911D"/>
+          </a:solidFill>
+          <a:ln>
+            <a:noFill/>
+          </a:ln>
+          <a:effectLst/>
+        </p:spPr>
+        <p:style>
+          <a:lnRef idx="1">
+            <a:schemeClr val="accent1"/>
+          </a:lnRef>
+          <a:fillRef idx="3">
+            <a:schemeClr val="accent1"/>
+          </a:fillRef>
+          <a:effectRef idx="2">
+            <a:schemeClr val="accent1"/>
+          </a:effectRef>
+          <a:fontRef idx="minor">
+            <a:schemeClr val="lt1"/>
+          </a:fontRef>
+        </p:style>
+        <p:txBody>
+          <a:bodyPr rtlCol="0" anchor="ctr"/>
+          <a:lstStyle/>
+          <a:p>
+            <a:pPr algn="ctr"/>
+          </a:p>
+        </p:txBody>
+      </p:sp>
+      <p:sp>
+        <p:nvSpPr>
+          <p:cNvPr id="3" name="TextBox 2"/>
+          <p:cNvSpPr txBox="1"/>
+          <p:nvPr/>
+        </p:nvSpPr>
+        <p:spPr>
+          <a:xfrm>
+            <a:off x="548640" y="502920"/>
+            <a:ext cx="502920" cy="502920"/>
+          </a:xfrm>
+          <a:prstGeom prst="rect">
+            <a:avLst/>
+          </a:prstGeom>
+          <a:noFill/>
+        </p:spPr>
+        <p:txBody>
+          <a:bodyPr wrap="square">
+            <a:spAutoFit/>
+          </a:bodyPr>
+          <a:lstStyle/>
+          <a:p>
+            <a:pPr algn="ctr"/>
+            <a:r>
+              <a:rPr sz="2000" b="0">
+                <a:solidFill>
+                  <a:srgbClr val="0A1F33"/>
+                </a:solidFill>
+                <a:latin typeface="Calibri"/>
+              </a:rPr>
+              <a:t>✎</a:t>
+            </a:r>
+          </a:p>
+        </p:txBody>
+      </p:sp>
+      <p:sp>
+        <p:nvSpPr>
+          <p:cNvPr id="4" name="TextBox 3"/>
+          <p:cNvSpPr txBox="1"/>
+          <p:nvPr/>
+        </p:nvSpPr>
+        <p:spPr>
+          <a:xfrm>
+            <a:off x="1234440" y="530352"/>
+            <a:ext cx="9144000" cy="457200"/>
+          </a:xfrm>
+          <a:prstGeom prst="rect">
+            <a:avLst/>
+          </a:prstGeom>
+          <a:noFill/>
+        </p:spPr>
+        <p:txBody>
+          <a:bodyPr wrap="square">
+            <a:spAutoFit/>
+          </a:bodyPr>
+          <a:lstStyle/>
+          <a:p>
+            <a:r>
+              <a:rPr sz="1400" b="1">
+                <a:solidFill>
+                  <a:srgbClr val="DE911D"/>
+                </a:solidFill>
+                <a:latin typeface="Calibri"/>
+              </a:rPr>
+              <a:t>EJERCICIO 1 DE 6</a:t>
+            </a:r>
+          </a:p>
+        </p:txBody>
+      </p:sp>
+      <p:sp>
+        <p:nvSpPr>
+          <p:cNvPr id="5" name="Rectangle 4"/>
+          <p:cNvSpPr/>
+          <p:nvPr/>
+        </p:nvSpPr>
+        <p:spPr>
+          <a:xfrm>
+            <a:off x="548640" y="1188720"/>
+            <a:ext cx="11064240" cy="5029200"/>
+          </a:xfrm>
+          <a:prstGeom prst="rect">
+            <a:avLst/>
+          </a:prstGeom>
+          <a:solidFill>
+            <a:srgbClr val="F0F4F8"/>
+          </a:solidFill>
+          <a:ln>
+            <a:noFill/>
+          </a:ln>
+          <a:effectLst/>
+        </p:spPr>
+        <p:style>
+          <a:lnRef idx="1">
+            <a:schemeClr val="accent1"/>
+          </a:lnRef>
+          <a:fillRef idx="3">
+            <a:schemeClr val="accent1"/>
+          </a:fillRef>
+          <a:effectRef idx="2">
+            <a:schemeClr val="accent1"/>
+          </a:effectRef>
+          <a:fontRef idx="minor">
+            <a:schemeClr val="lt1"/>
+          </a:fontRef>
+        </p:style>
+        <p:txBody>
+          <a:bodyPr rtlCol="0" anchor="ctr"/>
+          <a:lstStyle/>
+          <a:p>
+            <a:pPr algn="ctr"/>
+          </a:p>
+        </p:txBody>
+      </p:sp>
+      <p:sp>
+        <p:nvSpPr>
+          <p:cNvPr id="6" name="TextBox 5"/>
+          <p:cNvSpPr txBox="1"/>
+          <p:nvPr/>
+        </p:nvSpPr>
+        <p:spPr>
+          <a:xfrm>
+            <a:off x="914400" y="1554480"/>
+            <a:ext cx="10332720" cy="4480560"/>
+          </a:xfrm>
+          <a:prstGeom prst="rect">
+            <a:avLst/>
+          </a:prstGeom>
+          <a:noFill/>
+        </p:spPr>
+        <p:txBody>
+          <a:bodyPr wrap="square">
+            <a:spAutoFit/>
+          </a:bodyPr>
+          <a:lstStyle/>
+          <a:p>
+            <a:r>
+              <a:rPr sz="2200" b="0">
+                <a:solidFill>
+                  <a:srgbClr val="0A1F33"/>
+                </a:solidFill>
+                <a:latin typeface="Calibri"/>
+              </a:rPr>
+              <a:t>Un jugador hace una jugada ilegal, se da cuenta antes de presionar el reloj y la corrige moviendo otra pieza. ¿Qué decides?</a:t>
+            </a:r>
+          </a:p>
+        </p:txBody>
+      </p:sp>
+    </p:spTree>
+  </p:cSld>
+  <p:clrMapOvr>
+    <a:masterClrMapping/>
+  </p:clrMapOvr>
+</p:sld>
+</file>
+
+<file path=ppt/slides/slide23.xml><?xml version="1.0" encoding="utf-8"?>
+<p:sld xmlns:a="http://schemas.openxmlformats.org/drawingml/2006/main" xmlns:p="http://schemas.openxmlformats.org/presentationml/2006/main" xmlns:r="http://schemas.openxmlformats.org/officeDocument/2006/relationships">
+  <p:cSld>
+    <p:spTree>
+      <p:nvGrpSpPr>
+        <p:cNvPr id="1" name=""/>
+        <p:cNvGrpSpPr/>
+        <p:nvPr/>
+      </p:nvGrpSpPr>
+      <p:grpSpPr/>
+      <p:sp>
+        <p:nvSpPr>
+          <p:cNvPr id="2" name="Oval 1"/>
+          <p:cNvSpPr/>
+          <p:nvPr/>
+        </p:nvSpPr>
+        <p:spPr>
+          <a:xfrm>
+            <a:off x="548640" y="502920"/>
+            <a:ext cx="502920" cy="502920"/>
+          </a:xfrm>
+          <a:prstGeom prst="ellipse">
+            <a:avLst/>
+          </a:prstGeom>
+          <a:solidFill>
+            <a:srgbClr val="DE911D"/>
+          </a:solidFill>
+          <a:ln>
+            <a:noFill/>
+          </a:ln>
+          <a:effectLst/>
+        </p:spPr>
+        <p:style>
+          <a:lnRef idx="1">
+            <a:schemeClr val="accent1"/>
+          </a:lnRef>
+          <a:fillRef idx="3">
+            <a:schemeClr val="accent1"/>
+          </a:fillRef>
+          <a:effectRef idx="2">
+            <a:schemeClr val="accent1"/>
+          </a:effectRef>
+          <a:fontRef idx="minor">
+            <a:schemeClr val="lt1"/>
+          </a:fontRef>
+        </p:style>
+        <p:txBody>
+          <a:bodyPr rtlCol="0" anchor="ctr"/>
+          <a:lstStyle/>
+          <a:p>
+            <a:pPr algn="ctr"/>
+          </a:p>
+        </p:txBody>
+      </p:sp>
+      <p:sp>
+        <p:nvSpPr>
+          <p:cNvPr id="3" name="TextBox 2"/>
+          <p:cNvSpPr txBox="1"/>
+          <p:nvPr/>
+        </p:nvSpPr>
+        <p:spPr>
+          <a:xfrm>
+            <a:off x="548640" y="502920"/>
+            <a:ext cx="502920" cy="502920"/>
+          </a:xfrm>
+          <a:prstGeom prst="rect">
+            <a:avLst/>
+          </a:prstGeom>
+          <a:noFill/>
+        </p:spPr>
+        <p:txBody>
+          <a:bodyPr wrap="square">
+            <a:spAutoFit/>
+          </a:bodyPr>
+          <a:lstStyle/>
+          <a:p>
+            <a:pPr algn="ctr"/>
+            <a:r>
+              <a:rPr sz="2000" b="0">
+                <a:solidFill>
+                  <a:srgbClr val="0A1F33"/>
+                </a:solidFill>
+                <a:latin typeface="Calibri"/>
+              </a:rPr>
+              <a:t>✎</a:t>
+            </a:r>
+          </a:p>
+        </p:txBody>
+      </p:sp>
+      <p:sp>
+        <p:nvSpPr>
+          <p:cNvPr id="4" name="TextBox 3"/>
+          <p:cNvSpPr txBox="1"/>
+          <p:nvPr/>
+        </p:nvSpPr>
+        <p:spPr>
+          <a:xfrm>
+            <a:off x="1234440" y="530352"/>
+            <a:ext cx="9144000" cy="457200"/>
+          </a:xfrm>
+          <a:prstGeom prst="rect">
+            <a:avLst/>
+          </a:prstGeom>
+          <a:noFill/>
+        </p:spPr>
+        <p:txBody>
+          <a:bodyPr wrap="square">
+            <a:spAutoFit/>
+          </a:bodyPr>
+          <a:lstStyle/>
+          <a:p>
+            <a:r>
+              <a:rPr sz="1400" b="1">
+                <a:solidFill>
+                  <a:srgbClr val="DE911D"/>
+                </a:solidFill>
+                <a:latin typeface="Calibri"/>
+              </a:rPr>
+              <a:t>EJERCICIO 2 DE 6</a:t>
+            </a:r>
+          </a:p>
+        </p:txBody>
+      </p:sp>
+      <p:sp>
+        <p:nvSpPr>
+          <p:cNvPr id="5" name="Rectangle 4"/>
+          <p:cNvSpPr/>
+          <p:nvPr/>
+        </p:nvSpPr>
+        <p:spPr>
+          <a:xfrm>
+            <a:off x="548640" y="1188720"/>
+            <a:ext cx="11064240" cy="5029200"/>
+          </a:xfrm>
+          <a:prstGeom prst="rect">
+            <a:avLst/>
+          </a:prstGeom>
+          <a:solidFill>
+            <a:srgbClr val="F0F4F8"/>
+          </a:solidFill>
+          <a:ln>
+            <a:noFill/>
+          </a:ln>
+          <a:effectLst/>
+        </p:spPr>
+        <p:style>
+          <a:lnRef idx="1">
+            <a:schemeClr val="accent1"/>
+          </a:lnRef>
+          <a:fillRef idx="3">
+            <a:schemeClr val="accent1"/>
+          </a:fillRef>
+          <a:effectRef idx="2">
+            <a:schemeClr val="accent1"/>
+          </a:effectRef>
+          <a:fontRef idx="minor">
+            <a:schemeClr val="lt1"/>
+          </a:fontRef>
+        </p:style>
+        <p:txBody>
+          <a:bodyPr rtlCol="0" anchor="ctr"/>
+          <a:lstStyle/>
+          <a:p>
+            <a:pPr algn="ctr"/>
+          </a:p>
+        </p:txBody>
+      </p:sp>
+      <p:sp>
+        <p:nvSpPr>
+          <p:cNvPr id="6" name="TextBox 5"/>
+          <p:cNvSpPr txBox="1"/>
+          <p:nvPr/>
+        </p:nvSpPr>
+        <p:spPr>
+          <a:xfrm>
+            <a:off x="914400" y="1554480"/>
+            <a:ext cx="10332720" cy="4480560"/>
+          </a:xfrm>
+          <a:prstGeom prst="rect">
+            <a:avLst/>
+          </a:prstGeom>
+          <a:noFill/>
+        </p:spPr>
+        <p:txBody>
+          <a:bodyPr wrap="square">
+            <a:spAutoFit/>
+          </a:bodyPr>
+          <a:lstStyle/>
+          <a:p>
+            <a:r>
+              <a:rPr sz="2200" b="0">
+                <a:solidFill>
+                  <a:srgbClr val="0A1F33"/>
+                </a:solidFill>
+                <a:latin typeface="Calibri"/>
+              </a:rPr>
+              <a:t>En ritmo clásico, un jugador completa su segunda jugada ilegal. Su rival solo tiene el rey. ¿Resultado?</a:t>
+            </a:r>
+          </a:p>
+        </p:txBody>
+      </p:sp>
+    </p:spTree>
+  </p:cSld>
+  <p:clrMapOvr>
+    <a:masterClrMapping/>
+  </p:clrMapOvr>
+</p:sld>
+</file>
+
+<file path=ppt/slides/slide24.xml><?xml version="1.0" encoding="utf-8"?>
+<p:sld xmlns:a="http://schemas.openxmlformats.org/drawingml/2006/main" xmlns:p="http://schemas.openxmlformats.org/presentationml/2006/main" xmlns:r="http://schemas.openxmlformats.org/officeDocument/2006/relationships">
+  <p:cSld>
+    <p:spTree>
+      <p:nvGrpSpPr>
+        <p:cNvPr id="1" name=""/>
+        <p:cNvGrpSpPr/>
+        <p:nvPr/>
+      </p:nvGrpSpPr>
+      <p:grpSpPr/>
+      <p:sp>
+        <p:nvSpPr>
+          <p:cNvPr id="2" name="Oval 1"/>
+          <p:cNvSpPr/>
+          <p:nvPr/>
+        </p:nvSpPr>
+        <p:spPr>
+          <a:xfrm>
+            <a:off x="548640" y="502920"/>
+            <a:ext cx="502920" cy="502920"/>
+          </a:xfrm>
+          <a:prstGeom prst="ellipse">
+            <a:avLst/>
+          </a:prstGeom>
+          <a:solidFill>
+            <a:srgbClr val="DE911D"/>
+          </a:solidFill>
+          <a:ln>
+            <a:noFill/>
+          </a:ln>
+          <a:effectLst/>
+        </p:spPr>
+        <p:style>
+          <a:lnRef idx="1">
+            <a:schemeClr val="accent1"/>
+          </a:lnRef>
+          <a:fillRef idx="3">
+            <a:schemeClr val="accent1"/>
+          </a:fillRef>
+          <a:effectRef idx="2">
+            <a:schemeClr val="accent1"/>
+          </a:effectRef>
+          <a:fontRef idx="minor">
+            <a:schemeClr val="lt1"/>
+          </a:fontRef>
+        </p:style>
+        <p:txBody>
+          <a:bodyPr rtlCol="0" anchor="ctr"/>
+          <a:lstStyle/>
+          <a:p>
+            <a:pPr algn="ctr"/>
+          </a:p>
+        </p:txBody>
+      </p:sp>
+      <p:sp>
+        <p:nvSpPr>
+          <p:cNvPr id="3" name="TextBox 2"/>
+          <p:cNvSpPr txBox="1"/>
+          <p:nvPr/>
+        </p:nvSpPr>
+        <p:spPr>
+          <a:xfrm>
+            <a:off x="548640" y="502920"/>
+            <a:ext cx="502920" cy="502920"/>
+          </a:xfrm>
+          <a:prstGeom prst="rect">
+            <a:avLst/>
+          </a:prstGeom>
+          <a:noFill/>
+        </p:spPr>
+        <p:txBody>
+          <a:bodyPr wrap="square">
+            <a:spAutoFit/>
+          </a:bodyPr>
+          <a:lstStyle/>
+          <a:p>
+            <a:pPr algn="ctr"/>
+            <a:r>
+              <a:rPr sz="2000" b="0">
+                <a:solidFill>
+                  <a:srgbClr val="0A1F33"/>
+                </a:solidFill>
+                <a:latin typeface="Calibri"/>
+              </a:rPr>
+              <a:t>✎</a:t>
+            </a:r>
+          </a:p>
+        </p:txBody>
+      </p:sp>
+      <p:sp>
+        <p:nvSpPr>
+          <p:cNvPr id="4" name="TextBox 3"/>
+          <p:cNvSpPr txBox="1"/>
+          <p:nvPr/>
+        </p:nvSpPr>
+        <p:spPr>
+          <a:xfrm>
+            <a:off x="1234440" y="530352"/>
+            <a:ext cx="9144000" cy="457200"/>
+          </a:xfrm>
+          <a:prstGeom prst="rect">
+            <a:avLst/>
+          </a:prstGeom>
+          <a:noFill/>
+        </p:spPr>
+        <p:txBody>
+          <a:bodyPr wrap="square">
+            <a:spAutoFit/>
+          </a:bodyPr>
+          <a:lstStyle/>
+          <a:p>
+            <a:r>
+              <a:rPr sz="1400" b="1">
+                <a:solidFill>
+                  <a:srgbClr val="DE911D"/>
+                </a:solidFill>
+                <a:latin typeface="Calibri"/>
+              </a:rPr>
+              <a:t>EJERCICIO 3 DE 6</a:t>
+            </a:r>
+          </a:p>
+        </p:txBody>
+      </p:sp>
+      <p:sp>
+        <p:nvSpPr>
+          <p:cNvPr id="5" name="Rectangle 4"/>
+          <p:cNvSpPr/>
+          <p:nvPr/>
+        </p:nvSpPr>
+        <p:spPr>
+          <a:xfrm>
+            <a:off x="548640" y="1188720"/>
+            <a:ext cx="11064240" cy="5029200"/>
+          </a:xfrm>
+          <a:prstGeom prst="rect">
+            <a:avLst/>
+          </a:prstGeom>
+          <a:solidFill>
+            <a:srgbClr val="F0F4F8"/>
+          </a:solidFill>
+          <a:ln>
+            <a:noFill/>
+          </a:ln>
+          <a:effectLst/>
+        </p:spPr>
+        <p:style>
+          <a:lnRef idx="1">
+            <a:schemeClr val="accent1"/>
+          </a:lnRef>
+          <a:fillRef idx="3">
+            <a:schemeClr val="accent1"/>
+          </a:fillRef>
+          <a:effectRef idx="2">
+            <a:schemeClr val="accent1"/>
+          </a:effectRef>
+          <a:fontRef idx="minor">
+            <a:schemeClr val="lt1"/>
+          </a:fontRef>
+        </p:style>
+        <p:txBody>
+          <a:bodyPr rtlCol="0" anchor="ctr"/>
+          <a:lstStyle/>
+          <a:p>
+            <a:pPr algn="ctr"/>
+          </a:p>
+        </p:txBody>
+      </p:sp>
+      <p:sp>
+        <p:nvSpPr>
+          <p:cNvPr id="6" name="TextBox 5"/>
+          <p:cNvSpPr txBox="1"/>
+          <p:nvPr/>
+        </p:nvSpPr>
+        <p:spPr>
+          <a:xfrm>
+            <a:off x="914400" y="1554480"/>
+            <a:ext cx="10332720" cy="4480560"/>
+          </a:xfrm>
+          <a:prstGeom prst="rect">
+            <a:avLst/>
+          </a:prstGeom>
+          <a:noFill/>
+        </p:spPr>
+        <p:txBody>
+          <a:bodyPr wrap="square">
+            <a:spAutoFit/>
+          </a:bodyPr>
+          <a:lstStyle/>
+          <a:p>
+            <a:r>
+              <a:rPr sz="2200" b="0">
+                <a:solidFill>
+                  <a:srgbClr val="0A1F33"/>
+                </a:solidFill>
+                <a:latin typeface="Calibri"/>
+              </a:rPr>
+              <a:t>Un jugador ofrece tablas tres veces en diez jugadas pese a las negativas. ¿Cómo actúas?</a:t>
+            </a:r>
+          </a:p>
+        </p:txBody>
+      </p:sp>
+    </p:spTree>
+  </p:cSld>
+  <p:clrMapOvr>
+    <a:masterClrMapping/>
+  </p:clrMapOvr>
+</p:sld>
+</file>
+
+<file path=ppt/slides/slide25.xml><?xml version="1.0" encoding="utf-8"?>
+<p:sld xmlns:a="http://schemas.openxmlformats.org/drawingml/2006/main" xmlns:p="http://schemas.openxmlformats.org/presentationml/2006/main" xmlns:r="http://schemas.openxmlformats.org/officeDocument/2006/relationships">
+  <p:cSld>
+    <p:spTree>
+      <p:nvGrpSpPr>
+        <p:cNvPr id="1" name=""/>
+        <p:cNvGrpSpPr/>
+        <p:nvPr/>
+      </p:nvGrpSpPr>
+      <p:grpSpPr/>
+      <p:sp>
+        <p:nvSpPr>
+          <p:cNvPr id="2" name="Oval 1"/>
+          <p:cNvSpPr/>
+          <p:nvPr/>
+        </p:nvSpPr>
+        <p:spPr>
+          <a:xfrm>
+            <a:off x="548640" y="502920"/>
+            <a:ext cx="502920" cy="502920"/>
+          </a:xfrm>
+          <a:prstGeom prst="ellipse">
+            <a:avLst/>
+          </a:prstGeom>
+          <a:solidFill>
+            <a:srgbClr val="DE911D"/>
+          </a:solidFill>
+          <a:ln>
+            <a:noFill/>
+          </a:ln>
+          <a:effectLst/>
+        </p:spPr>
+        <p:style>
+          <a:lnRef idx="1">
+            <a:schemeClr val="accent1"/>
+          </a:lnRef>
+          <a:fillRef idx="3">
+            <a:schemeClr val="accent1"/>
+          </a:fillRef>
+          <a:effectRef idx="2">
+            <a:schemeClr val="accent1"/>
+          </a:effectRef>
+          <a:fontRef idx="minor">
+            <a:schemeClr val="lt1"/>
+          </a:fontRef>
+        </p:style>
+        <p:txBody>
+          <a:bodyPr rtlCol="0" anchor="ctr"/>
+          <a:lstStyle/>
+          <a:p>
+            <a:pPr algn="ctr"/>
+          </a:p>
+        </p:txBody>
+      </p:sp>
+      <p:sp>
+        <p:nvSpPr>
+          <p:cNvPr id="3" name="TextBox 2"/>
+          <p:cNvSpPr txBox="1"/>
+          <p:nvPr/>
+        </p:nvSpPr>
+        <p:spPr>
+          <a:xfrm>
+            <a:off x="548640" y="502920"/>
+            <a:ext cx="502920" cy="502920"/>
+          </a:xfrm>
+          <a:prstGeom prst="rect">
+            <a:avLst/>
+          </a:prstGeom>
+          <a:noFill/>
+        </p:spPr>
+        <p:txBody>
+          <a:bodyPr wrap="square">
+            <a:spAutoFit/>
+          </a:bodyPr>
+          <a:lstStyle/>
+          <a:p>
+            <a:pPr algn="ctr"/>
+            <a:r>
+              <a:rPr sz="2000" b="0">
+                <a:solidFill>
+                  <a:srgbClr val="0A1F33"/>
+                </a:solidFill>
+                <a:latin typeface="Calibri"/>
+              </a:rPr>
+              <a:t>✎</a:t>
+            </a:r>
+          </a:p>
+        </p:txBody>
+      </p:sp>
+      <p:sp>
+        <p:nvSpPr>
+          <p:cNvPr id="4" name="TextBox 3"/>
+          <p:cNvSpPr txBox="1"/>
+          <p:nvPr/>
+        </p:nvSpPr>
+        <p:spPr>
+          <a:xfrm>
+            <a:off x="1234440" y="530352"/>
+            <a:ext cx="9144000" cy="457200"/>
+          </a:xfrm>
+          <a:prstGeom prst="rect">
+            <a:avLst/>
+          </a:prstGeom>
+          <a:noFill/>
+        </p:spPr>
+        <p:txBody>
+          <a:bodyPr wrap="square">
+            <a:spAutoFit/>
+          </a:bodyPr>
+          <a:lstStyle/>
+          <a:p>
+            <a:r>
+              <a:rPr sz="1400" b="1">
+                <a:solidFill>
+                  <a:srgbClr val="DE911D"/>
+                </a:solidFill>
+                <a:latin typeface="Calibri"/>
+              </a:rPr>
+              <a:t>EJERCICIO 4 DE 6</a:t>
+            </a:r>
+          </a:p>
+        </p:txBody>
+      </p:sp>
+      <p:sp>
+        <p:nvSpPr>
+          <p:cNvPr id="5" name="Rectangle 4"/>
+          <p:cNvSpPr/>
+          <p:nvPr/>
+        </p:nvSpPr>
+        <p:spPr>
+          <a:xfrm>
+            <a:off x="548640" y="1188720"/>
+            <a:ext cx="11064240" cy="5029200"/>
+          </a:xfrm>
+          <a:prstGeom prst="rect">
+            <a:avLst/>
+          </a:prstGeom>
+          <a:solidFill>
+            <a:srgbClr val="F0F4F8"/>
+          </a:solidFill>
+          <a:ln>
+            <a:noFill/>
+          </a:ln>
+          <a:effectLst/>
+        </p:spPr>
+        <p:style>
+          <a:lnRef idx="1">
+            <a:schemeClr val="accent1"/>
+          </a:lnRef>
+          <a:fillRef idx="3">
+            <a:schemeClr val="accent1"/>
+          </a:fillRef>
+          <a:effectRef idx="2">
+            <a:schemeClr val="accent1"/>
+          </a:effectRef>
+          <a:fontRef idx="minor">
+            <a:schemeClr val="lt1"/>
+          </a:fontRef>
+        </p:style>
+        <p:txBody>
+          <a:bodyPr rtlCol="0" anchor="ctr"/>
+          <a:lstStyle/>
+          <a:p>
+            <a:pPr algn="ctr"/>
+          </a:p>
+        </p:txBody>
+      </p:sp>
+      <p:sp>
+        <p:nvSpPr>
+          <p:cNvPr id="6" name="TextBox 5"/>
+          <p:cNvSpPr txBox="1"/>
+          <p:nvPr/>
+        </p:nvSpPr>
+        <p:spPr>
+          <a:xfrm>
+            <a:off x="914400" y="1554480"/>
+            <a:ext cx="10332720" cy="4480560"/>
+          </a:xfrm>
+          <a:prstGeom prst="rect">
+            <a:avLst/>
+          </a:prstGeom>
+          <a:noFill/>
+        </p:spPr>
+        <p:txBody>
+          <a:bodyPr wrap="square">
+            <a:spAutoFit/>
+          </a:bodyPr>
+          <a:lstStyle/>
+          <a:p>
+            <a:r>
+              <a:rPr sz="2200" b="0">
+                <a:solidFill>
+                  <a:srgbClr val="0A1F33"/>
+                </a:solidFill>
+                <a:latin typeface="Calibri"/>
+              </a:rPr>
+              <a:t>El reglamento permite guardar el celular en el bolso. Durante la partida el teléfono de un jugador vibra dentro del bolso. ¿Qué decides?</a:t>
+            </a:r>
+          </a:p>
+        </p:txBody>
+      </p:sp>
+    </p:spTree>
+  </p:cSld>
+  <p:clrMapOvr>
+    <a:masterClrMapping/>
+  </p:clrMapOvr>
+</p:sld>
+</file>
+
+<file path=ppt/slides/slide26.xml><?xml version="1.0" encoding="utf-8"?>
+<p:sld xmlns:a="http://schemas.openxmlformats.org/drawingml/2006/main" xmlns:p="http://schemas.openxmlformats.org/presentationml/2006/main" xmlns:r="http://schemas.openxmlformats.org/officeDocument/2006/relationships">
+  <p:cSld>
+    <p:spTree>
+      <p:nvGrpSpPr>
+        <p:cNvPr id="1" name=""/>
+        <p:cNvGrpSpPr/>
+        <p:nvPr/>
+      </p:nvGrpSpPr>
+      <p:grpSpPr/>
+      <p:sp>
+        <p:nvSpPr>
+          <p:cNvPr id="2" name="Oval 1"/>
+          <p:cNvSpPr/>
+          <p:nvPr/>
+        </p:nvSpPr>
+        <p:spPr>
+          <a:xfrm>
+            <a:off x="548640" y="502920"/>
+            <a:ext cx="502920" cy="502920"/>
+          </a:xfrm>
+          <a:prstGeom prst="ellipse">
+            <a:avLst/>
+          </a:prstGeom>
+          <a:solidFill>
+            <a:srgbClr val="DE911D"/>
+          </a:solidFill>
+          <a:ln>
+            <a:noFill/>
+          </a:ln>
+          <a:effectLst/>
+        </p:spPr>
+        <p:style>
+          <a:lnRef idx="1">
+            <a:schemeClr val="accent1"/>
+          </a:lnRef>
+          <a:fillRef idx="3">
+            <a:schemeClr val="accent1"/>
+          </a:fillRef>
+          <a:effectRef idx="2">
+            <a:schemeClr val="accent1"/>
+          </a:effectRef>
+          <a:fontRef idx="minor">
+            <a:schemeClr val="lt1"/>
+          </a:fontRef>
+        </p:style>
+        <p:txBody>
+          <a:bodyPr rtlCol="0" anchor="ctr"/>
+          <a:lstStyle/>
+          <a:p>
+            <a:pPr algn="ctr"/>
+          </a:p>
+        </p:txBody>
+      </p:sp>
+      <p:sp>
+        <p:nvSpPr>
+          <p:cNvPr id="3" name="TextBox 2"/>
+          <p:cNvSpPr txBox="1"/>
+          <p:nvPr/>
+        </p:nvSpPr>
+        <p:spPr>
+          <a:xfrm>
+            <a:off x="548640" y="502920"/>
+            <a:ext cx="502920" cy="502920"/>
+          </a:xfrm>
+          <a:prstGeom prst="rect">
+            <a:avLst/>
+          </a:prstGeom>
+          <a:noFill/>
+        </p:spPr>
+        <p:txBody>
+          <a:bodyPr wrap="square">
+            <a:spAutoFit/>
+          </a:bodyPr>
+          <a:lstStyle/>
+          <a:p>
+            <a:pPr algn="ctr"/>
+            <a:r>
+              <a:rPr sz="2000" b="0">
+                <a:solidFill>
+                  <a:srgbClr val="0A1F33"/>
+                </a:solidFill>
+                <a:latin typeface="Calibri"/>
+              </a:rPr>
+              <a:t>✎</a:t>
+            </a:r>
+          </a:p>
+        </p:txBody>
+      </p:sp>
+      <p:sp>
+        <p:nvSpPr>
+          <p:cNvPr id="4" name="TextBox 3"/>
+          <p:cNvSpPr txBox="1"/>
+          <p:nvPr/>
+        </p:nvSpPr>
+        <p:spPr>
+          <a:xfrm>
+            <a:off x="1234440" y="530352"/>
+            <a:ext cx="9144000" cy="457200"/>
+          </a:xfrm>
+          <a:prstGeom prst="rect">
+            <a:avLst/>
+          </a:prstGeom>
+          <a:noFill/>
+        </p:spPr>
+        <p:txBody>
+          <a:bodyPr wrap="square">
+            <a:spAutoFit/>
+          </a:bodyPr>
+          <a:lstStyle/>
+          <a:p>
+            <a:r>
+              <a:rPr sz="1400" b="1">
+                <a:solidFill>
+                  <a:srgbClr val="DE911D"/>
+                </a:solidFill>
+                <a:latin typeface="Calibri"/>
+              </a:rPr>
+              <a:t>EJERCICIO 5 DE 6</a:t>
+            </a:r>
+          </a:p>
+        </p:txBody>
+      </p:sp>
+      <p:sp>
+        <p:nvSpPr>
+          <p:cNvPr id="5" name="Rectangle 4"/>
+          <p:cNvSpPr/>
+          <p:nvPr/>
+        </p:nvSpPr>
+        <p:spPr>
+          <a:xfrm>
+            <a:off x="548640" y="1188720"/>
+            <a:ext cx="11064240" cy="5029200"/>
+          </a:xfrm>
+          <a:prstGeom prst="rect">
+            <a:avLst/>
+          </a:prstGeom>
+          <a:solidFill>
+            <a:srgbClr val="F0F4F8"/>
+          </a:solidFill>
+          <a:ln>
+            <a:noFill/>
+          </a:ln>
+          <a:effectLst/>
+        </p:spPr>
+        <p:style>
+          <a:lnRef idx="1">
+            <a:schemeClr val="accent1"/>
+          </a:lnRef>
+          <a:fillRef idx="3">
+            <a:schemeClr val="accent1"/>
+          </a:fillRef>
+          <a:effectRef idx="2">
+            <a:schemeClr val="accent1"/>
+          </a:effectRef>
+          <a:fontRef idx="minor">
+            <a:schemeClr val="lt1"/>
+          </a:fontRef>
+        </p:style>
+        <p:txBody>
+          <a:bodyPr rtlCol="0" anchor="ctr"/>
+          <a:lstStyle/>
+          <a:p>
+            <a:pPr algn="ctr"/>
+          </a:p>
+        </p:txBody>
+      </p:sp>
+      <p:sp>
+        <p:nvSpPr>
+          <p:cNvPr id="6" name="TextBox 5"/>
+          <p:cNvSpPr txBox="1"/>
+          <p:nvPr/>
+        </p:nvSpPr>
+        <p:spPr>
+          <a:xfrm>
+            <a:off x="914400" y="1554480"/>
+            <a:ext cx="10332720" cy="4480560"/>
+          </a:xfrm>
+          <a:prstGeom prst="rect">
+            <a:avLst/>
+          </a:prstGeom>
+          <a:noFill/>
+        </p:spPr>
+        <p:txBody>
+          <a:bodyPr wrap="square">
+            <a:spAutoFit/>
+          </a:bodyPr>
+          <a:lstStyle/>
+          <a:p>
+            <a:r>
+              <a:rPr sz="2200" b="0">
+                <a:solidFill>
+                  <a:srgbClr val="0A1F33"/>
+                </a:solidFill>
+                <a:latin typeface="Calibri"/>
+              </a:rPr>
+              <a:t>A las 12 jugadas de cada bando se descubre que la partida empezó con los colores invertidos. ¿Qué se hace?</a:t>
+            </a:r>
+          </a:p>
+        </p:txBody>
+      </p:sp>
+    </p:spTree>
+  </p:cSld>
+  <p:clrMapOvr>
+    <a:masterClrMapping/>
+  </p:clrMapOvr>
+</p:sld>
+</file>
+
+<file path=ppt/slides/slide27.xml><?xml version="1.0" encoding="utf-8"?>
+<p:sld xmlns:a="http://schemas.openxmlformats.org/drawingml/2006/main" xmlns:p="http://schemas.openxmlformats.org/presentationml/2006/main" xmlns:r="http://schemas.openxmlformats.org/officeDocument/2006/relationships">
+  <p:cSld>
+    <p:spTree>
+      <p:nvGrpSpPr>
+        <p:cNvPr id="1" name=""/>
+        <p:cNvGrpSpPr/>
+        <p:nvPr/>
+      </p:nvGrpSpPr>
+      <p:grpSpPr/>
+      <p:sp>
+        <p:nvSpPr>
+          <p:cNvPr id="2" name="Oval 1"/>
+          <p:cNvSpPr/>
+          <p:nvPr/>
+        </p:nvSpPr>
+        <p:spPr>
+          <a:xfrm>
+            <a:off x="548640" y="502920"/>
+            <a:ext cx="502920" cy="502920"/>
+          </a:xfrm>
+          <a:prstGeom prst="ellipse">
+            <a:avLst/>
+          </a:prstGeom>
+          <a:solidFill>
+            <a:srgbClr val="DE911D"/>
+          </a:solidFill>
+          <a:ln>
+            <a:noFill/>
+          </a:ln>
+          <a:effectLst/>
+        </p:spPr>
+        <p:style>
+          <a:lnRef idx="1">
+            <a:schemeClr val="accent1"/>
+          </a:lnRef>
+          <a:fillRef idx="3">
+            <a:schemeClr val="accent1"/>
+          </a:fillRef>
+          <a:effectRef idx="2">
+            <a:schemeClr val="accent1"/>
+          </a:effectRef>
+          <a:fontRef idx="minor">
+            <a:schemeClr val="lt1"/>
+          </a:fontRef>
+        </p:style>
+        <p:txBody>
+          <a:bodyPr rtlCol="0" anchor="ctr"/>
+          <a:lstStyle/>
+          <a:p>
+            <a:pPr algn="ctr"/>
+          </a:p>
+        </p:txBody>
+      </p:sp>
+      <p:sp>
+        <p:nvSpPr>
+          <p:cNvPr id="3" name="TextBox 2"/>
+          <p:cNvSpPr txBox="1"/>
+          <p:nvPr/>
+        </p:nvSpPr>
+        <p:spPr>
+          <a:xfrm>
+            <a:off x="548640" y="502920"/>
+            <a:ext cx="502920" cy="502920"/>
+          </a:xfrm>
+          <a:prstGeom prst="rect">
+            <a:avLst/>
+          </a:prstGeom>
+          <a:noFill/>
+        </p:spPr>
+        <p:txBody>
+          <a:bodyPr wrap="square">
+            <a:spAutoFit/>
+          </a:bodyPr>
+          <a:lstStyle/>
+          <a:p>
+            <a:pPr algn="ctr"/>
+            <a:r>
+              <a:rPr sz="2000" b="0">
+                <a:solidFill>
+                  <a:srgbClr val="0A1F33"/>
+                </a:solidFill>
+                <a:latin typeface="Calibri"/>
+              </a:rPr>
+              <a:t>✎</a:t>
+            </a:r>
+          </a:p>
+        </p:txBody>
+      </p:sp>
+      <p:sp>
+        <p:nvSpPr>
+          <p:cNvPr id="4" name="TextBox 3"/>
+          <p:cNvSpPr txBox="1"/>
+          <p:nvPr/>
+        </p:nvSpPr>
+        <p:spPr>
+          <a:xfrm>
+            <a:off x="1234440" y="530352"/>
+            <a:ext cx="9144000" cy="457200"/>
+          </a:xfrm>
+          <a:prstGeom prst="rect">
+            <a:avLst/>
+          </a:prstGeom>
+          <a:noFill/>
+        </p:spPr>
+        <p:txBody>
+          <a:bodyPr wrap="square">
+            <a:spAutoFit/>
+          </a:bodyPr>
+          <a:lstStyle/>
+          <a:p>
+            <a:r>
+              <a:rPr sz="1400" b="1">
+                <a:solidFill>
+                  <a:srgbClr val="DE911D"/>
+                </a:solidFill>
+                <a:latin typeface="Calibri"/>
+              </a:rPr>
+              <a:t>EJERCICIO 6 DE 6</a:t>
+            </a:r>
+          </a:p>
+        </p:txBody>
+      </p:sp>
+      <p:sp>
+        <p:nvSpPr>
+          <p:cNvPr id="5" name="Rectangle 4"/>
+          <p:cNvSpPr/>
+          <p:nvPr/>
+        </p:nvSpPr>
+        <p:spPr>
+          <a:xfrm>
+            <a:off x="548640" y="1188720"/>
+            <a:ext cx="11064240" cy="5029200"/>
+          </a:xfrm>
+          <a:prstGeom prst="rect">
+            <a:avLst/>
+          </a:prstGeom>
+          <a:solidFill>
+            <a:srgbClr val="F0F4F8"/>
+          </a:solidFill>
+          <a:ln>
+            <a:noFill/>
+          </a:ln>
+          <a:effectLst/>
+        </p:spPr>
+        <p:style>
+          <a:lnRef idx="1">
+            <a:schemeClr val="accent1"/>
+          </a:lnRef>
+          <a:fillRef idx="3">
+            <a:schemeClr val="accent1"/>
+          </a:fillRef>
+          <a:effectRef idx="2">
+            <a:schemeClr val="accent1"/>
+          </a:effectRef>
+          <a:fontRef idx="minor">
+            <a:schemeClr val="lt1"/>
+          </a:fontRef>
+        </p:style>
+        <p:txBody>
+          <a:bodyPr rtlCol="0" anchor="ctr"/>
+          <a:lstStyle/>
+          <a:p>
+            <a:pPr algn="ctr"/>
+          </a:p>
+        </p:txBody>
+      </p:sp>
+      <p:sp>
+        <p:nvSpPr>
+          <p:cNvPr id="6" name="TextBox 5"/>
+          <p:cNvSpPr txBox="1"/>
+          <p:nvPr/>
+        </p:nvSpPr>
+        <p:spPr>
+          <a:xfrm>
+            <a:off x="914400" y="1554480"/>
+            <a:ext cx="10332720" cy="4480560"/>
+          </a:xfrm>
+          <a:prstGeom prst="rect">
+            <a:avLst/>
+          </a:prstGeom>
+          <a:noFill/>
+        </p:spPr>
+        <p:txBody>
+          <a:bodyPr wrap="square">
+            <a:spAutoFit/>
+          </a:bodyPr>
+          <a:lstStyle/>
+          <a:p>
+            <a:r>
+              <a:rPr sz="2200" b="0">
+                <a:solidFill>
+                  <a:srgbClr val="0A1F33"/>
+                </a:solidFill>
+                <a:latin typeface="Calibri"/>
+              </a:rPr>
+              <a:t>Un jugador firma la planilla y luego quiere apelar tu decisión. ¿Puede?</a:t>
+            </a:r>
+          </a:p>
+        </p:txBody>
+      </p:sp>
+    </p:spTree>
+  </p:cSld>
+  <p:clrMapOvr>
+    <a:masterClrMapping/>
+  </p:clrMapOvr>
+</p:sld>
+</file>
+
+<file path=ppt/slides/slide28.xml><?xml version="1.0" encoding="utf-8"?>
+<p:sld xmlns:a="http://schemas.openxmlformats.org/drawingml/2006/main" xmlns:p="http://schemas.openxmlformats.org/presentationml/2006/main" xmlns:r="http://schemas.openxmlformats.org/officeDocument/2006/relationships">
+  <p:cSld>
+    <p:spTree>
+      <p:nvGrpSpPr>
+        <p:cNvPr id="1" name=""/>
+        <p:cNvGrpSpPr/>
+        <p:nvPr/>
+      </p:nvGrpSpPr>
+      <p:grpSpPr/>
+      <p:sp>
+        <p:nvSpPr>
+          <p:cNvPr id="2" name="Oval 1"/>
+          <p:cNvSpPr/>
+          <p:nvPr/>
+        </p:nvSpPr>
+        <p:spPr>
+          <a:xfrm>
+            <a:off x="548640" y="502920"/>
+            <a:ext cx="502920" cy="502920"/>
+          </a:xfrm>
+          <a:prstGeom prst="ellipse">
+            <a:avLst/>
+          </a:prstGeom>
+          <a:solidFill>
+            <a:srgbClr val="DE911D"/>
+          </a:solidFill>
+          <a:ln>
+            <a:noFill/>
+          </a:ln>
+          <a:effectLst/>
+        </p:spPr>
+        <p:style>
+          <a:lnRef idx="1">
+            <a:schemeClr val="accent1"/>
+          </a:lnRef>
+          <a:fillRef idx="3">
+            <a:schemeClr val="accent1"/>
+          </a:fillRef>
+          <a:effectRef idx="2">
+            <a:schemeClr val="accent1"/>
+          </a:effectRef>
+          <a:fontRef idx="minor">
+            <a:schemeClr val="lt1"/>
+          </a:fontRef>
+        </p:style>
+        <p:txBody>
+          <a:bodyPr rtlCol="0" anchor="ctr"/>
+          <a:lstStyle/>
+          <a:p>
+            <a:pPr algn="ctr"/>
+          </a:p>
+        </p:txBody>
+      </p:sp>
+      <p:sp>
+        <p:nvSpPr>
+          <p:cNvPr id="3" name="TextBox 2"/>
+          <p:cNvSpPr txBox="1"/>
+          <p:nvPr/>
+        </p:nvSpPr>
+        <p:spPr>
+          <a:xfrm>
+            <a:off x="548640" y="502920"/>
+            <a:ext cx="502920" cy="502920"/>
+          </a:xfrm>
+          <a:prstGeom prst="rect">
+            <a:avLst/>
+          </a:prstGeom>
+          <a:noFill/>
+        </p:spPr>
+        <p:txBody>
+          <a:bodyPr wrap="square">
+            <a:spAutoFit/>
+          </a:bodyPr>
+          <a:lstStyle/>
+          <a:p>
+            <a:pPr algn="ctr"/>
+            <a:r>
+              <a:rPr sz="2000" b="0">
+                <a:solidFill>
+                  <a:srgbClr val="0A1F33"/>
+                </a:solidFill>
+                <a:latin typeface="Calibri"/>
+              </a:rPr>
+              <a:t>?</a:t>
+            </a:r>
+          </a:p>
+        </p:txBody>
+      </p:sp>
+      <p:sp>
+        <p:nvSpPr>
+          <p:cNvPr id="4" name="TextBox 3"/>
+          <p:cNvSpPr txBox="1"/>
+          <p:nvPr/>
+        </p:nvSpPr>
+        <p:spPr>
+          <a:xfrm>
+            <a:off x="1234440" y="530352"/>
+            <a:ext cx="9144000" cy="457200"/>
+          </a:xfrm>
+          <a:prstGeom prst="rect">
+            <a:avLst/>
+          </a:prstGeom>
+          <a:noFill/>
+        </p:spPr>
+        <p:txBody>
+          <a:bodyPr wrap="square">
+            <a:spAutoFit/>
+          </a:bodyPr>
+          <a:lstStyle/>
+          <a:p>
+            <a:r>
+              <a:rPr sz="1400" b="1">
+                <a:solidFill>
+                  <a:srgbClr val="DE911D"/>
+                </a:solidFill>
+                <a:latin typeface="Calibri"/>
+              </a:rPr>
+              <a:t>QUIZ DE LA SESIÓN</a:t>
+            </a:r>
+          </a:p>
+        </p:txBody>
+      </p:sp>
+      <p:sp>
+        <p:nvSpPr>
+          <p:cNvPr id="5" name="Rectangle 4"/>
+          <p:cNvSpPr/>
+          <p:nvPr/>
+        </p:nvSpPr>
+        <p:spPr>
+          <a:xfrm>
+            <a:off x="548640" y="1188720"/>
+            <a:ext cx="11064240" cy="5029200"/>
+          </a:xfrm>
+          <a:prstGeom prst="rect">
+            <a:avLst/>
+          </a:prstGeom>
+          <a:solidFill>
+            <a:srgbClr val="F0F4F8"/>
+          </a:solidFill>
+          <a:ln>
+            <a:noFill/>
+          </a:ln>
+          <a:effectLst/>
+        </p:spPr>
+        <p:style>
+          <a:lnRef idx="1">
+            <a:schemeClr val="accent1"/>
+          </a:lnRef>
+          <a:fillRef idx="3">
+            <a:schemeClr val="accent1"/>
+          </a:fillRef>
+          <a:effectRef idx="2">
+            <a:schemeClr val="accent1"/>
+          </a:effectRef>
+          <a:fontRef idx="minor">
+            <a:schemeClr val="lt1"/>
+          </a:fontRef>
+        </p:style>
+        <p:txBody>
+          <a:bodyPr rtlCol="0" anchor="ctr"/>
+          <a:lstStyle/>
+          <a:p>
+            <a:pPr algn="ctr"/>
+          </a:p>
+        </p:txBody>
+      </p:sp>
+      <p:sp>
+        <p:nvSpPr>
+          <p:cNvPr id="6" name="TextBox 5"/>
+          <p:cNvSpPr txBox="1"/>
+          <p:nvPr/>
+        </p:nvSpPr>
+        <p:spPr>
+          <a:xfrm>
+            <a:off x="914400" y="1371600"/>
+            <a:ext cx="10332720" cy="4754880"/>
+          </a:xfrm>
+          <a:prstGeom prst="rect">
+            <a:avLst/>
+          </a:prstGeom>
+          <a:noFill/>
+        </p:spPr>
+        <p:txBody>
+          <a:bodyPr wrap="square">
+            <a:spAutoFit/>
+          </a:bodyPr>
+          <a:lstStyle/>
+          <a:p>
+            <a:pPr>
+              <a:spcAft>
+                <a:spcPts val="600"/>
+              </a:spcAft>
+            </a:pPr>
+            <a:r>
+              <a:rPr sz="1400">
+                <a:solidFill>
+                  <a:srgbClr val="334E68"/>
+                </a:solidFill>
+                <a:latin typeface="Calibri"/>
+              </a:rPr>
+              <a:t>1. Un jugador toca una pieza propia que puede mover legalmente. ¿Qué debe hacer?</a:t>
+            </a:r>
+          </a:p>
+          <a:p>
+            <a:pPr>
+              <a:spcAft>
+                <a:spcPts val="600"/>
+              </a:spcAft>
+            </a:pPr>
+            <a:r>
+              <a:rPr sz="1400">
+                <a:solidFill>
+                  <a:srgbClr val="334E68"/>
+                </a:solidFill>
+                <a:latin typeface="Calibri"/>
+              </a:rPr>
+              <a:t>2. ¿Qué debe hacer la persona árbitra ante el uso de un dispositivo electrónico no autorizado?</a:t>
+            </a:r>
+          </a:p>
+          <a:p>
+            <a:pPr>
+              <a:spcAft>
+                <a:spcPts val="600"/>
+              </a:spcAft>
+            </a:pPr>
+            <a:r>
+              <a:rPr sz="1400">
+                <a:solidFill>
+                  <a:srgbClr val="334E68"/>
+                </a:solidFill>
+                <a:latin typeface="Calibri"/>
+              </a:rPr>
+              <a:t>3. ¿En qué momento queda completada una jugada ilegal a efectos de sanción?</a:t>
+            </a:r>
+          </a:p>
+          <a:p>
+            <a:pPr>
+              <a:spcAft>
+                <a:spcPts val="600"/>
+              </a:spcAft>
+            </a:pPr>
+            <a:r>
+              <a:rPr sz="1400">
+                <a:solidFill>
+                  <a:srgbClr val="334E68"/>
+                </a:solidFill>
+                <a:latin typeface="Calibri"/>
+              </a:rPr>
+              <a:t>4. En rápidas, ¿cuánto tiempo recibe el rival por la primera jugada ilegal completada?</a:t>
+            </a:r>
+          </a:p>
+          <a:p>
+            <a:pPr>
+              <a:spcAft>
+                <a:spcPts val="600"/>
+              </a:spcAft>
+            </a:pPr>
+            <a:r>
+              <a:rPr sz="1400">
+                <a:solidFill>
+                  <a:srgbClr val="334E68"/>
+                </a:solidFill>
+                <a:latin typeface="Calibri"/>
+              </a:rPr>
+              <a:t>5. ¿Con qué tiempo repone las piezas quien las volcó?</a:t>
+            </a:r>
+          </a:p>
+          <a:p>
+            <a:pPr>
+              <a:spcAft>
+                <a:spcPts val="600"/>
+              </a:spcAft>
+            </a:pPr>
+            <a:r>
+              <a:rPr sz="1400">
+                <a:solidFill>
+                  <a:srgbClr val="334E68"/>
+                </a:solidFill>
+                <a:latin typeface="Calibri"/>
+              </a:rPr>
+              <a:t>6. ¿Cuál es la primera sanción de la lista del art. 12.9?</a:t>
+            </a:r>
+          </a:p>
+        </p:txBody>
+      </p:sp>
+    </p:spTree>
+  </p:cSld>
+  <p:clrMapOvr>
+    <a:masterClrMapping/>
+  </p:clrMapOvr>
+</p:sld>
+</file>
+
+<file path=ppt/slides/slide29.xml><?xml version="1.0" encoding="utf-8"?>
+<p:sld xmlns:a="http://schemas.openxmlformats.org/drawingml/2006/main" xmlns:p="http://schemas.openxmlformats.org/presentationml/2006/main" xmlns:r="http://schemas.openxmlformats.org/officeDocument/2006/relationships">
+  <p:cSld>
+    <p:spTree>
+      <p:nvGrpSpPr>
+        <p:cNvPr id="1" name=""/>
+        <p:cNvGrpSpPr/>
+        <p:nvPr/>
+      </p:nvGrpSpPr>
+      <p:grpSpPr/>
+      <p:sp>
+        <p:nvSpPr>
+          <p:cNvPr id="2" name="Rectangle 1"/>
+          <p:cNvSpPr/>
+          <p:nvPr/>
+        </p:nvSpPr>
+        <p:spPr>
+          <a:xfrm>
+            <a:off x="0" y="0"/>
+            <a:ext cx="12191695" cy="6858000"/>
+          </a:xfrm>
+          <a:prstGeom prst="rect">
+            <a:avLst/>
+          </a:prstGeom>
+          <a:solidFill>
+            <a:srgbClr val="0A1F33"/>
+          </a:solidFill>
+          <a:ln>
+            <a:noFill/>
+          </a:ln>
+          <a:effectLst/>
+        </p:spPr>
+        <p:style>
+          <a:lnRef idx="1">
+            <a:schemeClr val="accent1"/>
+          </a:lnRef>
+          <a:fillRef idx="3">
+            <a:schemeClr val="accent1"/>
+          </a:fillRef>
+          <a:effectRef idx="2">
+            <a:schemeClr val="accent1"/>
+          </a:effectRef>
+          <a:fontRef idx="minor">
+            <a:schemeClr val="lt1"/>
+          </a:fontRef>
+        </p:style>
+        <p:txBody>
+          <a:bodyPr rtlCol="0" anchor="ctr"/>
+          <a:lstStyle/>
+          <a:p>
+            <a:pPr algn="ctr"/>
+          </a:p>
+        </p:txBody>
+      </p:sp>
+      <p:sp>
+        <p:nvSpPr>
+          <p:cNvPr id="3" name="TextBox 2"/>
+          <p:cNvSpPr txBox="1"/>
+          <p:nvPr/>
+        </p:nvSpPr>
+        <p:spPr>
+          <a:xfrm>
+            <a:off x="548640" y="731520"/>
+            <a:ext cx="11064240" cy="457200"/>
+          </a:xfrm>
+          <a:prstGeom prst="rect">
+            <a:avLst/>
+          </a:prstGeom>
+          <a:noFill/>
+        </p:spPr>
+        <p:txBody>
+          <a:bodyPr wrap="square">
+            <a:spAutoFit/>
+          </a:bodyPr>
+          <a:lstStyle/>
+          <a:p>
+            <a:r>
+              <a:rPr sz="1400" b="1">
+                <a:solidFill>
+                  <a:srgbClr val="F0B429"/>
+                </a:solidFill>
+                <a:latin typeface="Calibri"/>
+              </a:rPr>
+              <a:t>TAREA PARA LA PRÓXIMA SESIÓN</a:t>
+            </a:r>
+          </a:p>
+        </p:txBody>
+      </p:sp>
+      <p:sp>
+        <p:nvSpPr>
+          <p:cNvPr id="4" name="TextBox 3"/>
+          <p:cNvSpPr txBox="1"/>
+          <p:nvPr/>
+        </p:nvSpPr>
+        <p:spPr>
+          <a:xfrm>
+            <a:off x="548640" y="1371600"/>
+            <a:ext cx="11064240" cy="2926080"/>
+          </a:xfrm>
+          <a:prstGeom prst="rect">
+            <a:avLst/>
+          </a:prstGeom>
+          <a:noFill/>
+        </p:spPr>
+        <p:txBody>
+          <a:bodyPr wrap="square">
+            <a:spAutoFit/>
+          </a:bodyPr>
+          <a:lstStyle/>
+          <a:p>
+            <a:r>
+              <a:rPr sz="2400" b="0">
+                <a:solidFill>
+                  <a:srgbClr val="FFFFFF"/>
+                </a:solidFill>
+                <a:latin typeface="Cambria"/>
+              </a:rPr>
+              <a:t>Redactar el análisis de un caso de reclamo (real o hipotético) indicando la normativa aplicada y la decisión arbitral justificada.</a:t>
+            </a:r>
+          </a:p>
+        </p:txBody>
+      </p:sp>
+      <p:sp>
+        <p:nvSpPr>
+          <p:cNvPr id="5" name="TextBox 4"/>
+          <p:cNvSpPr txBox="1"/>
+          <p:nvPr/>
+        </p:nvSpPr>
+        <p:spPr>
+          <a:xfrm>
+            <a:off x="548640" y="4754880"/>
+            <a:ext cx="11064240" cy="914400"/>
+          </a:xfrm>
+          <a:prstGeom prst="rect">
+            <a:avLst/>
+          </a:prstGeom>
+          <a:noFill/>
+        </p:spPr>
+        <p:txBody>
+          <a:bodyPr wrap="square">
+            <a:spAutoFit/>
+          </a:bodyPr>
+          <a:lstStyle/>
+          <a:p>
+            <a:r>
+              <a:rPr sz="1800" b="0">
+                <a:solidFill>
+                  <a:srgbClr val="CADCFC"/>
+                </a:solidFill>
+                <a:latin typeface="Calibri"/>
+              </a:rPr>
+              <a:t>¿Dudas? Este es el momento. Gracias por tu participación.</a:t>
+            </a:r>
+          </a:p>
+        </p:txBody>
+      </p:sp>
+      <p:sp>
+        <p:nvSpPr>
+          <p:cNvPr id="6" name="TextBox 5"/>
+          <p:cNvSpPr txBox="1"/>
+          <p:nvPr/>
+        </p:nvSpPr>
+        <p:spPr>
+          <a:xfrm>
+            <a:off x="548640" y="6263640"/>
+            <a:ext cx="11064240" cy="365760"/>
+          </a:xfrm>
+          <a:prstGeom prst="rect">
+            <a:avLst/>
+          </a:prstGeom>
+          <a:noFill/>
+        </p:spPr>
+        <p:txBody>
+          <a:bodyPr wrap="square">
+            <a:spAutoFit/>
+          </a:bodyPr>
+          <a:lstStyle/>
+          <a:p>
+            <a:r>
+              <a:rPr sz="1200" b="0">
+                <a:solidFill>
+                  <a:srgbClr val="9FB3C8"/>
+                </a:solidFill>
+                <a:latin typeface="Calibri"/>
+              </a:rPr>
+              <a:t>Formación Ajedrez · Sesión 2 · ajedrez-integral.com</a:t>
             </a:r>
           </a:p>
         </p:txBody>
@@ -3808,7 +8340,7 @@
                 </a:solidFill>
                 <a:latin typeface="Calibri"/>
               </a:rPr>
-              <a:t>⚖</a:t>
+              <a:t>◷</a:t>
             </a:r>
           </a:p>
         </p:txBody>
@@ -3822,7 +8354,7 @@
         <p:spPr>
           <a:xfrm>
             <a:off x="1234440" y="530352"/>
-            <a:ext cx="7315200" cy="457200"/>
+            <a:ext cx="9144000" cy="457200"/>
           </a:xfrm>
           <a:prstGeom prst="rect">
             <a:avLst/>
@@ -3842,123 +8374,753 @@
                 </a:solidFill>
                 <a:latin typeface="Calibri"/>
               </a:rPr>
-              <a:t>CONTENIDO DE LA SESIÓN</a:t>
-            </a:r>
-          </a:p>
-        </p:txBody>
-      </p:sp>
-      <p:sp>
-        <p:nvSpPr>
-          <p:cNvPr id="5" name="TextBox 4"/>
-          <p:cNvSpPr txBox="1"/>
-          <p:nvPr/>
-        </p:nvSpPr>
-        <p:spPr>
-          <a:xfrm>
-            <a:off x="548640" y="1051560"/>
-            <a:ext cx="11064240" cy="822960"/>
-          </a:xfrm>
-          <a:prstGeom prst="rect">
-            <a:avLst/>
-          </a:prstGeom>
-          <a:noFill/>
-        </p:spPr>
-        <p:txBody>
-          <a:bodyPr wrap="square">
-            <a:spAutoFit/>
-          </a:bodyPr>
-          <a:lstStyle/>
-          <a:p>
-            <a:r>
-              <a:rPr sz="2400" b="1">
-                <a:solidFill>
-                  <a:srgbClr val="0A1F33"/>
-                </a:solidFill>
-                <a:latin typeface="Cambria"/>
-              </a:rPr>
-              <a:t>Reglas de competición</a:t>
-            </a:r>
-          </a:p>
-        </p:txBody>
-      </p:sp>
-      <p:sp>
-        <p:nvSpPr>
-          <p:cNvPr id="6" name="Rectangle 5"/>
-          <p:cNvSpPr/>
-          <p:nvPr/>
-        </p:nvSpPr>
-        <p:spPr>
-          <a:xfrm>
-            <a:off x="548640" y="1965960"/>
-            <a:ext cx="11064240" cy="4297680"/>
-          </a:xfrm>
-          <a:prstGeom prst="rect">
-            <a:avLst/>
-          </a:prstGeom>
-          <a:solidFill>
-            <a:srgbClr val="F0F4F8"/>
-          </a:solidFill>
-          <a:ln>
-            <a:noFill/>
-          </a:ln>
-          <a:effectLst/>
-        </p:spPr>
-        <p:style>
-          <a:lnRef idx="1">
-            <a:schemeClr val="accent1"/>
-          </a:lnRef>
-          <a:fillRef idx="3">
-            <a:schemeClr val="accent1"/>
-          </a:fillRef>
-          <a:effectRef idx="2">
-            <a:schemeClr val="accent1"/>
-          </a:effectRef>
-          <a:fontRef idx="minor">
-            <a:schemeClr val="lt1"/>
-          </a:fontRef>
-        </p:style>
-        <p:txBody>
-          <a:bodyPr rtlCol="0" anchor="ctr"/>
-          <a:lstStyle/>
-          <a:p>
-            <a:pPr algn="ctr"/>
-          </a:p>
-        </p:txBody>
-      </p:sp>
-      <p:sp>
-        <p:nvSpPr>
-          <p:cNvPr id="7" name="TextBox 6"/>
-          <p:cNvSpPr txBox="1"/>
-          <p:nvPr/>
-        </p:nvSpPr>
-        <p:spPr>
-          <a:xfrm>
-            <a:off x="1005840" y="2331720"/>
-            <a:ext cx="10241280" cy="3566160"/>
-          </a:xfrm>
-          <a:prstGeom prst="rect">
-            <a:avLst/>
-          </a:prstGeom>
-          <a:noFill/>
-        </p:spPr>
-        <p:txBody>
-          <a:bodyPr wrap="square">
-            <a:spAutoFit/>
-          </a:bodyPr>
-          <a:lstStyle/>
-          <a:p>
-            <a:r>
-              <a:rPr sz="1600" b="0">
-                <a:solidFill>
-                  <a:srgbClr val="334E68"/>
-                </a:solidFill>
-                <a:latin typeface="Calibri"/>
-              </a:rPr>
-              <a:t>Faltas, sanciones y procedimiento ante reclamos de las personas jugadoras.</a:t>
-            </a:r>
-          </a:p>
-        </p:txBody>
-      </p:sp>
+              <a:t>CRONOGRAMA DE LA SESIÓN · 5 HORAS</a:t>
+            </a:r>
+          </a:p>
+        </p:txBody>
+      </p:sp>
+      <p:graphicFrame>
+        <p:nvGraphicFramePr>
+          <p:cNvPr id="5" name="Table 4"/>
+          <p:cNvGraphicFramePr>
+            <a:graphicFrameLocks noGrp="1"/>
+          </p:cNvGraphicFramePr>
+          <p:nvPr/>
+        </p:nvGraphicFramePr>
+        <p:xfrm>
+          <a:off x="548640" y="1143000"/>
+          <a:ext cx="11064240" cy="5029200"/>
+        </p:xfrm>
+        <a:graphic>
+          <a:graphicData uri="http://schemas.openxmlformats.org/drawingml/2006/table">
+            <a:tbl>
+              <a:tblPr firstRow="1" bandRow="1">
+                <a:tableStyleId>{5C22544A-7EE6-4342-B048-85BDC9FD1C3A}</a:tableStyleId>
+              </a:tblPr>
+              <a:tblGrid>
+                <a:gridCol w="1737360"/>
+                <a:gridCol w="1188720"/>
+                <a:gridCol w="8138160"/>
+              </a:tblGrid>
+              <a:tr h="457200">
+                <a:tc>
+                  <a:txBody>
+                    <a:bodyPr/>
+                    <a:lstStyle/>
+                    <a:p>
+                      <a:r>
+                        <a:rPr sz="1300" b="1">
+                          <a:solidFill>
+                            <a:srgbClr val="FFFFFF"/>
+                          </a:solidFill>
+                        </a:rPr>
+                        <a:t>Tiempo</a:t>
+                      </a:r>
+                    </a:p>
+                  </a:txBody>
+                  <a:tcPr>
+                    <a:solidFill>
+                      <a:srgbClr val="102A43"/>
+                    </a:solidFill>
+                  </a:tcPr>
+                </a:tc>
+                <a:tc>
+                  <a:txBody>
+                    <a:bodyPr/>
+                    <a:lstStyle/>
+                    <a:p>
+                      <a:r>
+                        <a:rPr sz="1300" b="1">
+                          <a:solidFill>
+                            <a:srgbClr val="FFFFFF"/>
+                          </a:solidFill>
+                        </a:rPr>
+                        <a:t>Duración</a:t>
+                      </a:r>
+                    </a:p>
+                  </a:txBody>
+                  <a:tcPr>
+                    <a:solidFill>
+                      <a:srgbClr val="102A43"/>
+                    </a:solidFill>
+                  </a:tcPr>
+                </a:tc>
+                <a:tc>
+                  <a:txBody>
+                    <a:bodyPr/>
+                    <a:lstStyle/>
+                    <a:p>
+                      <a:r>
+                        <a:rPr sz="1300" b="1">
+                          <a:solidFill>
+                            <a:srgbClr val="FFFFFF"/>
+                          </a:solidFill>
+                        </a:rPr>
+                        <a:t>Actividad</a:t>
+                      </a:r>
+                    </a:p>
+                  </a:txBody>
+                  <a:tcPr>
+                    <a:solidFill>
+                      <a:srgbClr val="102A43"/>
+                    </a:solidFill>
+                  </a:tcPr>
+                </a:tc>
+              </a:tr>
+              <a:tr h="457200">
+                <a:tc>
+                  <a:txBody>
+                    <a:bodyPr/>
+                    <a:lstStyle/>
+                    <a:p>
+                      <a:r>
+                        <a:rPr sz="1200" b="0">
+                          <a:solidFill>
+                            <a:srgbClr val="334E68"/>
+                          </a:solidFill>
+                        </a:rPr>
+                        <a:t>0:00 – 0:15</a:t>
+                      </a:r>
+                    </a:p>
+                  </a:txBody>
+                  <a:tcPr>
+                    <a:solidFill>
+                      <a:srgbClr val="F0F4F8"/>
+                    </a:solidFill>
+                  </a:tcPr>
+                </a:tc>
+                <a:tc>
+                  <a:txBody>
+                    <a:bodyPr/>
+                    <a:lstStyle/>
+                    <a:p>
+                      <a:r>
+                        <a:rPr sz="1200" b="0">
+                          <a:solidFill>
+                            <a:srgbClr val="334E68"/>
+                          </a:solidFill>
+                        </a:rPr>
+                        <a:t>15 min</a:t>
+                      </a:r>
+                    </a:p>
+                  </a:txBody>
+                  <a:tcPr>
+                    <a:solidFill>
+                      <a:srgbClr val="F0F4F8"/>
+                    </a:solidFill>
+                  </a:tcPr>
+                </a:tc>
+                <a:tc>
+                  <a:txBody>
+                    <a:bodyPr/>
+                    <a:lstStyle/>
+                    <a:p>
+                      <a:r>
+                        <a:rPr sz="1200" b="0">
+                          <a:solidFill>
+                            <a:srgbClr val="334E68"/>
+                          </a:solidFill>
+                        </a:rPr>
+                        <a:t>Repaso y revisión de la tarea</a:t>
+                      </a:r>
+                    </a:p>
+                  </a:txBody>
+                  <a:tcPr>
+                    <a:solidFill>
+                      <a:srgbClr val="F0F4F8"/>
+                    </a:solidFill>
+                  </a:tcPr>
+                </a:tc>
+              </a:tr>
+              <a:tr h="457200">
+                <a:tc>
+                  <a:txBody>
+                    <a:bodyPr/>
+                    <a:lstStyle/>
+                    <a:p>
+                      <a:r>
+                        <a:rPr sz="1200" b="0">
+                          <a:solidFill>
+                            <a:srgbClr val="334E68"/>
+                          </a:solidFill>
+                        </a:rPr>
+                        <a:t>0:15 – 1:00</a:t>
+                      </a:r>
+                    </a:p>
+                  </a:txBody>
+                  <a:tcPr>
+                    <a:solidFill>
+                      <a:srgbClr val="FFFFFF"/>
+                    </a:solidFill>
+                  </a:tcPr>
+                </a:tc>
+                <a:tc>
+                  <a:txBody>
+                    <a:bodyPr/>
+                    <a:lstStyle/>
+                    <a:p>
+                      <a:r>
+                        <a:rPr sz="1200" b="0">
+                          <a:solidFill>
+                            <a:srgbClr val="334E68"/>
+                          </a:solidFill>
+                        </a:rPr>
+                        <a:t>45 min</a:t>
+                      </a:r>
+                    </a:p>
+                  </a:txBody>
+                  <a:tcPr>
+                    <a:solidFill>
+                      <a:srgbClr val="FFFFFF"/>
+                    </a:solidFill>
+                  </a:tcPr>
+                </a:tc>
+                <a:tc>
+                  <a:txBody>
+                    <a:bodyPr/>
+                    <a:lstStyle/>
+                    <a:p>
+                      <a:r>
+                        <a:rPr sz="1200" b="0">
+                          <a:solidFill>
+                            <a:srgbClr val="334E68"/>
+                          </a:solidFill>
+                        </a:rPr>
+                        <a:t>Conducta y zona de juego</a:t>
+                      </a:r>
+                    </a:p>
+                  </a:txBody>
+                  <a:tcPr>
+                    <a:solidFill>
+                      <a:srgbClr val="FFFFFF"/>
+                    </a:solidFill>
+                  </a:tcPr>
+                </a:tc>
+              </a:tr>
+              <a:tr h="457200">
+                <a:tc>
+                  <a:txBody>
+                    <a:bodyPr/>
+                    <a:lstStyle/>
+                    <a:p>
+                      <a:r>
+                        <a:rPr sz="1200" b="0">
+                          <a:solidFill>
+                            <a:srgbClr val="334E68"/>
+                          </a:solidFill>
+                        </a:rPr>
+                        <a:t>1:00 – 1:30</a:t>
+                      </a:r>
+                    </a:p>
+                  </a:txBody>
+                  <a:tcPr>
+                    <a:solidFill>
+                      <a:srgbClr val="F0F4F8"/>
+                    </a:solidFill>
+                  </a:tcPr>
+                </a:tc>
+                <a:tc>
+                  <a:txBody>
+                    <a:bodyPr/>
+                    <a:lstStyle/>
+                    <a:p>
+                      <a:r>
+                        <a:rPr sz="1200" b="0">
+                          <a:solidFill>
+                            <a:srgbClr val="334E68"/>
+                          </a:solidFill>
+                        </a:rPr>
+                        <a:t>30 min</a:t>
+                      </a:r>
+                    </a:p>
+                  </a:txBody>
+                  <a:tcPr>
+                    <a:solidFill>
+                      <a:srgbClr val="F0F4F8"/>
+                    </a:solidFill>
+                  </a:tcPr>
+                </a:tc>
+                <a:tc>
+                  <a:txBody>
+                    <a:bodyPr/>
+                    <a:lstStyle/>
+                    <a:p>
+                      <a:r>
+                        <a:rPr sz="1200" b="0">
+                          <a:solidFill>
+                            <a:srgbClr val="334E68"/>
+                          </a:solidFill>
+                        </a:rPr>
+                        <a:t>Dispositivos electrónicos</a:t>
+                      </a:r>
+                    </a:p>
+                  </a:txBody>
+                  <a:tcPr>
+                    <a:solidFill>
+                      <a:srgbClr val="F0F4F8"/>
+                    </a:solidFill>
+                  </a:tcPr>
+                </a:tc>
+              </a:tr>
+              <a:tr h="457200">
+                <a:tc>
+                  <a:txBody>
+                    <a:bodyPr/>
+                    <a:lstStyle/>
+                    <a:p>
+                      <a:r>
+                        <a:rPr sz="1200" b="1">
+                          <a:solidFill>
+                            <a:srgbClr val="DE911D"/>
+                          </a:solidFill>
+                        </a:rPr>
+                        <a:t>1:30 – 1:45</a:t>
+                      </a:r>
+                    </a:p>
+                  </a:txBody>
+                  <a:tcPr>
+                    <a:solidFill>
+                      <a:srgbClr val="FFFFFF"/>
+                    </a:solidFill>
+                  </a:tcPr>
+                </a:tc>
+                <a:tc>
+                  <a:txBody>
+                    <a:bodyPr/>
+                    <a:lstStyle/>
+                    <a:p>
+                      <a:r>
+                        <a:rPr sz="1200" b="1">
+                          <a:solidFill>
+                            <a:srgbClr val="DE911D"/>
+                          </a:solidFill>
+                        </a:rPr>
+                        <a:t>15 min</a:t>
+                      </a:r>
+                    </a:p>
+                  </a:txBody>
+                  <a:tcPr>
+                    <a:solidFill>
+                      <a:srgbClr val="FFFFFF"/>
+                    </a:solidFill>
+                  </a:tcPr>
+                </a:tc>
+                <a:tc>
+                  <a:txBody>
+                    <a:bodyPr/>
+                    <a:lstStyle/>
+                    <a:p>
+                      <a:r>
+                        <a:rPr sz="1200" b="1">
+                          <a:solidFill>
+                            <a:srgbClr val="DE911D"/>
+                          </a:solidFill>
+                        </a:rPr>
+                        <a:t>Receso</a:t>
+                      </a:r>
+                    </a:p>
+                  </a:txBody>
+                  <a:tcPr>
+                    <a:solidFill>
+                      <a:srgbClr val="FFFFFF"/>
+                    </a:solidFill>
+                  </a:tcPr>
+                </a:tc>
+              </a:tr>
+              <a:tr h="457200">
+                <a:tc>
+                  <a:txBody>
+                    <a:bodyPr/>
+                    <a:lstStyle/>
+                    <a:p>
+                      <a:r>
+                        <a:rPr sz="1200" b="0">
+                          <a:solidFill>
+                            <a:srgbClr val="334E68"/>
+                          </a:solidFill>
+                        </a:rPr>
+                        <a:t>1:45 – 2:30</a:t>
+                      </a:r>
+                    </a:p>
+                  </a:txBody>
+                  <a:tcPr>
+                    <a:solidFill>
+                      <a:srgbClr val="F0F4F8"/>
+                    </a:solidFill>
+                  </a:tcPr>
+                </a:tc>
+                <a:tc>
+                  <a:txBody>
+                    <a:bodyPr/>
+                    <a:lstStyle/>
+                    <a:p>
+                      <a:r>
+                        <a:rPr sz="1200" b="0">
+                          <a:solidFill>
+                            <a:srgbClr val="334E68"/>
+                          </a:solidFill>
+                        </a:rPr>
+                        <a:t>45 min</a:t>
+                      </a:r>
+                    </a:p>
+                  </a:txBody>
+                  <a:tcPr>
+                    <a:solidFill>
+                      <a:srgbClr val="F0F4F8"/>
+                    </a:solidFill>
+                  </a:tcPr>
+                </a:tc>
+                <a:tc>
+                  <a:txBody>
+                    <a:bodyPr/>
+                    <a:lstStyle/>
+                    <a:p>
+                      <a:r>
+                        <a:rPr sz="1200" b="0">
+                          <a:solidFill>
+                            <a:srgbClr val="334E68"/>
+                          </a:solidFill>
+                        </a:rPr>
+                        <a:t>Irregularidades</a:t>
+                      </a:r>
+                    </a:p>
+                  </a:txBody>
+                  <a:tcPr>
+                    <a:solidFill>
+                      <a:srgbClr val="F0F4F8"/>
+                    </a:solidFill>
+                  </a:tcPr>
+                </a:tc>
+              </a:tr>
+              <a:tr h="457200">
+                <a:tc>
+                  <a:txBody>
+                    <a:bodyPr/>
+                    <a:lstStyle/>
+                    <a:p>
+                      <a:r>
+                        <a:rPr sz="1200" b="0">
+                          <a:solidFill>
+                            <a:srgbClr val="334E68"/>
+                          </a:solidFill>
+                        </a:rPr>
+                        <a:t>2:30 – 3:00</a:t>
+                      </a:r>
+                    </a:p>
+                  </a:txBody>
+                  <a:tcPr>
+                    <a:solidFill>
+                      <a:srgbClr val="FFFFFF"/>
+                    </a:solidFill>
+                  </a:tcPr>
+                </a:tc>
+                <a:tc>
+                  <a:txBody>
+                    <a:bodyPr/>
+                    <a:lstStyle/>
+                    <a:p>
+                      <a:r>
+                        <a:rPr sz="1200" b="0">
+                          <a:solidFill>
+                            <a:srgbClr val="334E68"/>
+                          </a:solidFill>
+                        </a:rPr>
+                        <a:t>30 min</a:t>
+                      </a:r>
+                    </a:p>
+                  </a:txBody>
+                  <a:tcPr>
+                    <a:solidFill>
+                      <a:srgbClr val="FFFFFF"/>
+                    </a:solidFill>
+                  </a:tcPr>
+                </a:tc>
+                <a:tc>
+                  <a:txBody>
+                    <a:bodyPr/>
+                    <a:lstStyle/>
+                    <a:p>
+                      <a:r>
+                        <a:rPr sz="1200" b="0">
+                          <a:solidFill>
+                            <a:srgbClr val="334E68"/>
+                          </a:solidFill>
+                        </a:rPr>
+                        <a:t>Sanciones, reclamos y apelaciones</a:t>
+                      </a:r>
+                    </a:p>
+                  </a:txBody>
+                  <a:tcPr>
+                    <a:solidFill>
+                      <a:srgbClr val="FFFFFF"/>
+                    </a:solidFill>
+                  </a:tcPr>
+                </a:tc>
+              </a:tr>
+              <a:tr h="457200">
+                <a:tc>
+                  <a:txBody>
+                    <a:bodyPr/>
+                    <a:lstStyle/>
+                    <a:p>
+                      <a:r>
+                        <a:rPr sz="1200" b="1">
+                          <a:solidFill>
+                            <a:srgbClr val="DE911D"/>
+                          </a:solidFill>
+                        </a:rPr>
+                        <a:t>3:00 – 3:15</a:t>
+                      </a:r>
+                    </a:p>
+                  </a:txBody>
+                  <a:tcPr>
+                    <a:solidFill>
+                      <a:srgbClr val="F0F4F8"/>
+                    </a:solidFill>
+                  </a:tcPr>
+                </a:tc>
+                <a:tc>
+                  <a:txBody>
+                    <a:bodyPr/>
+                    <a:lstStyle/>
+                    <a:p>
+                      <a:r>
+                        <a:rPr sz="1200" b="1">
+                          <a:solidFill>
+                            <a:srgbClr val="DE911D"/>
+                          </a:solidFill>
+                        </a:rPr>
+                        <a:t>15 min</a:t>
+                      </a:r>
+                    </a:p>
+                  </a:txBody>
+                  <a:tcPr>
+                    <a:solidFill>
+                      <a:srgbClr val="F0F4F8"/>
+                    </a:solidFill>
+                  </a:tcPr>
+                </a:tc>
+                <a:tc>
+                  <a:txBody>
+                    <a:bodyPr/>
+                    <a:lstStyle/>
+                    <a:p>
+                      <a:r>
+                        <a:rPr sz="1200" b="1">
+                          <a:solidFill>
+                            <a:srgbClr val="DE911D"/>
+                          </a:solidFill>
+                        </a:rPr>
+                        <a:t>Receso</a:t>
+                      </a:r>
+                    </a:p>
+                  </a:txBody>
+                  <a:tcPr>
+                    <a:solidFill>
+                      <a:srgbClr val="F0F4F8"/>
+                    </a:solidFill>
+                  </a:tcPr>
+                </a:tc>
+              </a:tr>
+              <a:tr h="457200">
+                <a:tc>
+                  <a:txBody>
+                    <a:bodyPr/>
+                    <a:lstStyle/>
+                    <a:p>
+                      <a:r>
+                        <a:rPr sz="1200" b="0">
+                          <a:solidFill>
+                            <a:srgbClr val="334E68"/>
+                          </a:solidFill>
+                        </a:rPr>
+                        <a:t>3:15 – 4:05</a:t>
+                      </a:r>
+                    </a:p>
+                  </a:txBody>
+                  <a:tcPr>
+                    <a:solidFill>
+                      <a:srgbClr val="FFFFFF"/>
+                    </a:solidFill>
+                  </a:tcPr>
+                </a:tc>
+                <a:tc>
+                  <a:txBody>
+                    <a:bodyPr/>
+                    <a:lstStyle/>
+                    <a:p>
+                      <a:r>
+                        <a:rPr sz="1200" b="0">
+                          <a:solidFill>
+                            <a:srgbClr val="334E68"/>
+                          </a:solidFill>
+                        </a:rPr>
+                        <a:t>50 min</a:t>
+                      </a:r>
+                    </a:p>
+                  </a:txBody>
+                  <a:tcPr>
+                    <a:solidFill>
+                      <a:srgbClr val="FFFFFF"/>
+                    </a:solidFill>
+                  </a:tcPr>
+                </a:tc>
+                <a:tc>
+                  <a:txBody>
+                    <a:bodyPr/>
+                    <a:lstStyle/>
+                    <a:p>
+                      <a:r>
+                        <a:rPr sz="1200" b="0">
+                          <a:solidFill>
+                            <a:srgbClr val="334E68"/>
+                          </a:solidFill>
+                        </a:rPr>
+                        <a:t>Simulación de reclamos en salas de trabajo</a:t>
+                      </a:r>
+                    </a:p>
+                  </a:txBody>
+                  <a:tcPr>
+                    <a:solidFill>
+                      <a:srgbClr val="FFFFFF"/>
+                    </a:solidFill>
+                  </a:tcPr>
+                </a:tc>
+              </a:tr>
+              <a:tr h="457200">
+                <a:tc>
+                  <a:txBody>
+                    <a:bodyPr/>
+                    <a:lstStyle/>
+                    <a:p>
+                      <a:r>
+                        <a:rPr sz="1200" b="0">
+                          <a:solidFill>
+                            <a:srgbClr val="334E68"/>
+                          </a:solidFill>
+                        </a:rPr>
+                        <a:t>4:05 – 4:40</a:t>
+                      </a:r>
+                    </a:p>
+                  </a:txBody>
+                  <a:tcPr>
+                    <a:solidFill>
+                      <a:srgbClr val="F0F4F8"/>
+                    </a:solidFill>
+                  </a:tcPr>
+                </a:tc>
+                <a:tc>
+                  <a:txBody>
+                    <a:bodyPr/>
+                    <a:lstStyle/>
+                    <a:p>
+                      <a:r>
+                        <a:rPr sz="1200" b="0">
+                          <a:solidFill>
+                            <a:srgbClr val="334E68"/>
+                          </a:solidFill>
+                        </a:rPr>
+                        <a:t>35 min</a:t>
+                      </a:r>
+                    </a:p>
+                  </a:txBody>
+                  <a:tcPr>
+                    <a:solidFill>
+                      <a:srgbClr val="F0F4F8"/>
+                    </a:solidFill>
+                  </a:tcPr>
+                </a:tc>
+                <a:tc>
+                  <a:txBody>
+                    <a:bodyPr/>
+                    <a:lstStyle/>
+                    <a:p>
+                      <a:r>
+                        <a:rPr sz="1200" b="0">
+                          <a:solidFill>
+                            <a:srgbClr val="334E68"/>
+                          </a:solidFill>
+                        </a:rPr>
+                        <a:t>Quiz de la sesión y revisión</a:t>
+                      </a:r>
+                    </a:p>
+                  </a:txBody>
+                  <a:tcPr>
+                    <a:solidFill>
+                      <a:srgbClr val="F0F4F8"/>
+                    </a:solidFill>
+                  </a:tcPr>
+                </a:tc>
+              </a:tr>
+              <a:tr h="457200">
+                <a:tc>
+                  <a:txBody>
+                    <a:bodyPr/>
+                    <a:lstStyle/>
+                    <a:p>
+                      <a:r>
+                        <a:rPr sz="1200" b="0">
+                          <a:solidFill>
+                            <a:srgbClr val="334E68"/>
+                          </a:solidFill>
+                        </a:rPr>
+                        <a:t>4:40 – 5:00</a:t>
+                      </a:r>
+                    </a:p>
+                  </a:txBody>
+                  <a:tcPr>
+                    <a:solidFill>
+                      <a:srgbClr val="FFFFFF"/>
+                    </a:solidFill>
+                  </a:tcPr>
+                </a:tc>
+                <a:tc>
+                  <a:txBody>
+                    <a:bodyPr/>
+                    <a:lstStyle/>
+                    <a:p>
+                      <a:r>
+                        <a:rPr sz="1200" b="0">
+                          <a:solidFill>
+                            <a:srgbClr val="334E68"/>
+                          </a:solidFill>
+                        </a:rPr>
+                        <a:t>20 min</a:t>
+                      </a:r>
+                    </a:p>
+                  </a:txBody>
+                  <a:tcPr>
+                    <a:solidFill>
+                      <a:srgbClr val="FFFFFF"/>
+                    </a:solidFill>
+                  </a:tcPr>
+                </a:tc>
+                <a:tc>
+                  <a:txBody>
+                    <a:bodyPr/>
+                    <a:lstStyle/>
+                    <a:p>
+                      <a:r>
+                        <a:rPr sz="1200" b="0">
+                          <a:solidFill>
+                            <a:srgbClr val="334E68"/>
+                          </a:solidFill>
+                        </a:rPr>
+                        <a:t>Cierre</a:t>
+                      </a:r>
+                    </a:p>
+                  </a:txBody>
+                  <a:tcPr>
+                    <a:solidFill>
+                      <a:srgbClr val="FFFFFF"/>
+                    </a:solidFill>
+                  </a:tcPr>
+                </a:tc>
+              </a:tr>
+            </a:tbl>
+          </a:graphicData>
+        </a:graphic>
+      </p:graphicFrame>
     </p:spTree>
   </p:cSld>
   <p:clrMapOvr>
@@ -4065,7 +9227,7 @@
         <p:spPr>
           <a:xfrm>
             <a:off x="1234440" y="530352"/>
-            <a:ext cx="7315200" cy="457200"/>
+            <a:ext cx="9144000" cy="457200"/>
           </a:xfrm>
           <a:prstGeom prst="rect">
             <a:avLst/>
@@ -4085,7 +9247,7 @@
                 </a:solidFill>
                 <a:latin typeface="Calibri"/>
               </a:rPr>
-              <a:t>CONTENIDO DE LA SESIÓN</a:t>
+              <a:t>CONTENIDO PARA VER EN CLASE</a:t>
             </a:r>
           </a:p>
         </p:txBody>
@@ -4113,13 +9275,13 @@
           <a:lstStyle/>
           <a:p>
             <a:r>
-              <a:rPr sz="2400" b="1">
+              <a:rPr sz="2600" b="1">
                 <a:solidFill>
                   <a:srgbClr val="0A1F33"/>
                 </a:solidFill>
                 <a:latin typeface="Cambria"/>
               </a:rPr>
-              <a:t>Reglas de competición</a:t>
+              <a:t>Conducta y zona de juego</a:t>
             </a:r>
           </a:p>
         </p:txBody>
@@ -4132,8 +9294,8 @@
         </p:nvSpPr>
         <p:spPr>
           <a:xfrm>
-            <a:off x="548640" y="1965960"/>
-            <a:ext cx="11064240" cy="4297680"/>
+            <a:off x="548640" y="1874519"/>
+            <a:ext cx="11064240" cy="4389120"/>
           </a:xfrm>
           <a:prstGeom prst="rect">
             <a:avLst/>
@@ -4176,28 +9338,165 @@
         </p:nvSpPr>
         <p:spPr>
           <a:xfrm>
-            <a:off x="1005840" y="2331720"/>
-            <a:ext cx="10241280" cy="3566160"/>
-          </a:xfrm>
-          <a:prstGeom prst="rect">
-            <a:avLst/>
-          </a:prstGeom>
-          <a:noFill/>
-        </p:spPr>
-        <p:txBody>
-          <a:bodyPr wrap="square">
-            <a:spAutoFit/>
-          </a:bodyPr>
-          <a:lstStyle/>
-          <a:p>
-            <a:r>
-              <a:rPr sz="1600" b="0">
+            <a:off x="914400" y="2011680"/>
+            <a:ext cx="10332720" cy="1371600"/>
+          </a:xfrm>
+          <a:prstGeom prst="rect">
+            <a:avLst/>
+          </a:prstGeom>
+          <a:noFill/>
+        </p:spPr>
+        <p:txBody>
+          <a:bodyPr wrap="square">
+            <a:spAutoFit/>
+          </a:bodyPr>
+          <a:lstStyle/>
+          <a:p>
+            <a:r>
+              <a:rPr sz="1500" b="0">
+                <a:solidFill>
+                  <a:srgbClr val="0A1F33"/>
+                </a:solidFill>
+                <a:latin typeface="Calibri"/>
+              </a:rPr>
+              <a:t>Las Leyes abren el capítulo de conducta con una obligación general: los jugadores no deben desprestigiar el juego. Esa cláusula permite actuar ante conductas que ningún artículo previó.</a:t>
+            </a:r>
+          </a:p>
+        </p:txBody>
+      </p:sp>
+      <p:sp>
+        <p:nvSpPr>
+          <p:cNvPr id="8" name="TextBox 7"/>
+          <p:cNvSpPr txBox="1"/>
+          <p:nvPr/>
+        </p:nvSpPr>
+        <p:spPr>
+          <a:xfrm>
+            <a:off x="914400" y="3429000"/>
+            <a:ext cx="10332720" cy="2743200"/>
+          </a:xfrm>
+          <a:prstGeom prst="rect">
+            <a:avLst/>
+          </a:prstGeom>
+          <a:noFill/>
+        </p:spPr>
+        <p:txBody>
+          <a:bodyPr wrap="square">
+            <a:spAutoFit/>
+          </a:bodyPr>
+          <a:lstStyle/>
+          <a:p>
+            <a:pPr>
+              <a:spcAft>
+                <a:spcPts val="800"/>
+              </a:spcAft>
+            </a:pPr>
+            <a:r>
+              <a:rPr sz="1300">
                 <a:solidFill>
                   <a:srgbClr val="334E68"/>
                 </a:solidFill>
                 <a:latin typeface="Calibri"/>
               </a:rPr>
-              <a:t>Gestión de incidencias durante la partida (piezas mal colocadas, toques de pieza, incidencias con el reloj).</a:t>
+              <a:t>•  Para salir de la sala de juego se necesita permiso del árbitro; la zona de juego (sala, baños, zona de descanso) no se abandona sin autorización.</a:t>
+            </a:r>
+          </a:p>
+          <a:p>
+            <a:pPr>
+              <a:spcAft>
+                <a:spcPts val="800"/>
+              </a:spcAft>
+            </a:pPr>
+            <a:r>
+              <a:rPr sz="1300">
+                <a:solidFill>
+                  <a:srgbClr val="334E68"/>
+                </a:solidFill>
+                <a:latin typeface="Calibri"/>
+              </a:rPr>
+              <a:t>•  Durante la partida está prohibido usar notas, fuentes de información o consejos, y analizar en otro tablero.</a:t>
+            </a:r>
+          </a:p>
+          <a:p>
+            <a:pPr>
+              <a:spcAft>
+                <a:spcPts val="800"/>
+              </a:spcAft>
+            </a:pPr>
+            <a:r>
+              <a:rPr sz="1300">
+                <a:solidFill>
+                  <a:srgbClr val="334E68"/>
+                </a:solidFill>
+                <a:latin typeface="Calibri"/>
+              </a:rPr>
+              <a:t>•  Quien terminó su partida pasa a ser espectador: no puede analizar en la sala ni interferir con otras mesas.</a:t>
+            </a:r>
+          </a:p>
+          <a:p>
+            <a:pPr>
+              <a:spcAft>
+                <a:spcPts val="800"/>
+              </a:spcAft>
+            </a:pPr>
+            <a:r>
+              <a:rPr sz="1300">
+                <a:solidFill>
+                  <a:srgbClr val="334E68"/>
+                </a:solidFill>
+                <a:latin typeface="Calibri"/>
+              </a:rPr>
+              <a:t>•  Está prohibido distraer o molestar al rival, por ejemplo con ofertas de tablas repetidas.</a:t>
+            </a:r>
+          </a:p>
+          <a:p>
+            <a:pPr>
+              <a:spcAft>
+                <a:spcPts val="800"/>
+              </a:spcAft>
+            </a:pPr>
+            <a:r>
+              <a:rPr sz="1300">
+                <a:solidFill>
+                  <a:srgbClr val="334E68"/>
+                </a:solidFill>
+                <a:latin typeface="Calibri"/>
+              </a:rPr>
+              <a:t>•  Nadie puede comentar una partida que todavía se está jugando.</a:t>
+            </a:r>
+          </a:p>
+        </p:txBody>
+      </p:sp>
+      <p:sp>
+        <p:nvSpPr>
+          <p:cNvPr id="9" name="TextBox 8"/>
+          <p:cNvSpPr txBox="1"/>
+          <p:nvPr/>
+        </p:nvSpPr>
+        <p:spPr>
+          <a:xfrm>
+            <a:off x="548640" y="6355080"/>
+            <a:ext cx="11064240" cy="365760"/>
+          </a:xfrm>
+          <a:prstGeom prst="rect">
+            <a:avLst/>
+          </a:prstGeom>
+          <a:noFill/>
+        </p:spPr>
+        <p:txBody>
+          <a:bodyPr wrap="square">
+            <a:spAutoFit/>
+          </a:bodyPr>
+          <a:lstStyle/>
+          <a:p>
+            <a:r>
+              <a:rPr sz="1100" b="0">
+                <a:solidFill>
+                  <a:srgbClr val="627D98"/>
+                </a:solidFill>
+                <a:latin typeface="Calibri"/>
+              </a:rPr>
+              <a:t>Fuente: Leyes del Ajedrez 2023 (Handbook E.I.01), art. 11.1 a 11.5 y 12.7</a:t>
             </a:r>
           </a:p>
         </p:txBody>
@@ -4222,102 +9521,14 @@
       <p:grpSpPr/>
       <p:sp>
         <p:nvSpPr>
-          <p:cNvPr id="2" name="Rectangle 1"/>
+          <p:cNvPr id="2" name="Oval 1"/>
           <p:cNvSpPr/>
           <p:nvPr/>
         </p:nvSpPr>
         <p:spPr>
           <a:xfrm>
-            <a:off x="0" y="0"/>
-            <a:ext cx="12191695" cy="6858000"/>
-          </a:xfrm>
-          <a:prstGeom prst="rect">
-            <a:avLst/>
-          </a:prstGeom>
-          <a:solidFill>
-            <a:srgbClr val="102A43"/>
-          </a:solidFill>
-          <a:ln>
-            <a:noFill/>
-          </a:ln>
-          <a:effectLst/>
-        </p:spPr>
-        <p:style>
-          <a:lnRef idx="1">
-            <a:schemeClr val="accent1"/>
-          </a:lnRef>
-          <a:fillRef idx="3">
-            <a:schemeClr val="accent1"/>
-          </a:fillRef>
-          <a:effectRef idx="2">
-            <a:schemeClr val="accent1"/>
-          </a:effectRef>
-          <a:fontRef idx="minor">
-            <a:schemeClr val="lt1"/>
-          </a:fontRef>
-        </p:style>
-        <p:txBody>
-          <a:bodyPr rtlCol="0" anchor="ctr"/>
-          <a:lstStyle/>
-          <a:p>
-            <a:pPr algn="ctr"/>
-          </a:p>
-        </p:txBody>
-      </p:sp>
-      <p:sp>
-        <p:nvSpPr>
-          <p:cNvPr id="3" name="Oval 2"/>
-          <p:cNvSpPr/>
-          <p:nvPr/>
-        </p:nvSpPr>
-        <p:spPr>
-          <a:xfrm>
-            <a:off x="-1280160" y="-1463040"/>
-            <a:ext cx="4114800" cy="4114800"/>
-          </a:xfrm>
-          <a:prstGeom prst="ellipse">
-            <a:avLst/>
-          </a:prstGeom>
-          <a:solidFill>
-            <a:srgbClr val="0A1F33"/>
-          </a:solidFill>
-          <a:ln>
-            <a:noFill/>
-          </a:ln>
-          <a:effectLst/>
-        </p:spPr>
-        <p:style>
-          <a:lnRef idx="1">
-            <a:schemeClr val="accent1"/>
-          </a:lnRef>
-          <a:fillRef idx="3">
-            <a:schemeClr val="accent1"/>
-          </a:fillRef>
-          <a:effectRef idx="2">
-            <a:schemeClr val="accent1"/>
-          </a:effectRef>
-          <a:fontRef idx="minor">
-            <a:schemeClr val="lt1"/>
-          </a:fontRef>
-        </p:style>
-        <p:txBody>
-          <a:bodyPr rtlCol="0" anchor="ctr"/>
-          <a:lstStyle/>
-          <a:p>
-            <a:pPr algn="ctr"/>
-          </a:p>
-        </p:txBody>
-      </p:sp>
-      <p:sp>
-        <p:nvSpPr>
-          <p:cNvPr id="4" name="Oval 3"/>
-          <p:cNvSpPr/>
-          <p:nvPr/>
-        </p:nvSpPr>
-        <p:spPr>
-          <a:xfrm>
-            <a:off x="5175504" y="822960"/>
-            <a:ext cx="1828800" cy="1828800"/>
+            <a:off x="548640" y="502920"/>
+            <a:ext cx="502920" cy="502920"/>
           </a:xfrm>
           <a:prstGeom prst="ellipse">
             <a:avLst/>
@@ -4354,71 +9565,512 @@
       </p:sp>
       <p:sp>
         <p:nvSpPr>
+          <p:cNvPr id="3" name="TextBox 2"/>
+          <p:cNvSpPr txBox="1"/>
+          <p:nvPr/>
+        </p:nvSpPr>
+        <p:spPr>
+          <a:xfrm>
+            <a:off x="548640" y="502920"/>
+            <a:ext cx="502920" cy="502920"/>
+          </a:xfrm>
+          <a:prstGeom prst="rect">
+            <a:avLst/>
+          </a:prstGeom>
+          <a:noFill/>
+        </p:spPr>
+        <p:txBody>
+          <a:bodyPr wrap="square">
+            <a:spAutoFit/>
+          </a:bodyPr>
+          <a:lstStyle/>
+          <a:p>
+            <a:pPr algn="ctr"/>
+            <a:r>
+              <a:rPr sz="2000" b="0">
+                <a:solidFill>
+                  <a:srgbClr val="0A1F33"/>
+                </a:solidFill>
+                <a:latin typeface="Calibri"/>
+              </a:rPr>
+              <a:t>⚖</a:t>
+            </a:r>
+          </a:p>
+        </p:txBody>
+      </p:sp>
+      <p:sp>
+        <p:nvSpPr>
+          <p:cNvPr id="4" name="TextBox 3"/>
+          <p:cNvSpPr txBox="1"/>
+          <p:nvPr/>
+        </p:nvSpPr>
+        <p:spPr>
+          <a:xfrm>
+            <a:off x="1234440" y="530352"/>
+            <a:ext cx="9144000" cy="457200"/>
+          </a:xfrm>
+          <a:prstGeom prst="rect">
+            <a:avLst/>
+          </a:prstGeom>
+          <a:noFill/>
+        </p:spPr>
+        <p:txBody>
+          <a:bodyPr wrap="square">
+            <a:spAutoFit/>
+          </a:bodyPr>
+          <a:lstStyle/>
+          <a:p>
+            <a:r>
+              <a:rPr sz="1400" b="1">
+                <a:solidFill>
+                  <a:srgbClr val="DE911D"/>
+                </a:solidFill>
+                <a:latin typeface="Calibri"/>
+              </a:rPr>
+              <a:t>CONTENIDO PARA VER EN CLASE</a:t>
+            </a:r>
+          </a:p>
+        </p:txBody>
+      </p:sp>
+      <p:sp>
+        <p:nvSpPr>
           <p:cNvPr id="5" name="TextBox 4"/>
           <p:cNvSpPr txBox="1"/>
           <p:nvPr/>
         </p:nvSpPr>
         <p:spPr>
           <a:xfrm>
-            <a:off x="5175504" y="822960"/>
-            <a:ext cx="1828800" cy="1828800"/>
-          </a:xfrm>
-          <a:prstGeom prst="rect">
-            <a:avLst/>
-          </a:prstGeom>
-          <a:noFill/>
-        </p:spPr>
-        <p:txBody>
-          <a:bodyPr wrap="square">
-            <a:spAutoFit/>
-          </a:bodyPr>
+            <a:off x="548640" y="1051560"/>
+            <a:ext cx="11064240" cy="822960"/>
+          </a:xfrm>
+          <a:prstGeom prst="rect">
+            <a:avLst/>
+          </a:prstGeom>
+          <a:noFill/>
+        </p:spPr>
+        <p:txBody>
+          <a:bodyPr wrap="square">
+            <a:spAutoFit/>
+          </a:bodyPr>
+          <a:lstStyle/>
+          <a:p>
+            <a:r>
+              <a:rPr sz="2600" b="1">
+                <a:solidFill>
+                  <a:srgbClr val="0A1F33"/>
+                </a:solidFill>
+                <a:latin typeface="Cambria"/>
+              </a:rPr>
+              <a:t>Dispositivos electrónicos</a:t>
+            </a:r>
+          </a:p>
+        </p:txBody>
+      </p:sp>
+      <p:sp>
+        <p:nvSpPr>
+          <p:cNvPr id="6" name="Rectangle 5"/>
+          <p:cNvSpPr/>
+          <p:nvPr/>
+        </p:nvSpPr>
+        <p:spPr>
+          <a:xfrm>
+            <a:off x="548640" y="1874519"/>
+            <a:ext cx="11064240" cy="4389120"/>
+          </a:xfrm>
+          <a:prstGeom prst="rect">
+            <a:avLst/>
+          </a:prstGeom>
+          <a:solidFill>
+            <a:srgbClr val="F0F4F8"/>
+          </a:solidFill>
+          <a:ln>
+            <a:noFill/>
+          </a:ln>
+          <a:effectLst/>
+        </p:spPr>
+        <p:style>
+          <a:lnRef idx="1">
+            <a:schemeClr val="accent1"/>
+          </a:lnRef>
+          <a:fillRef idx="3">
+            <a:schemeClr val="accent1"/>
+          </a:fillRef>
+          <a:effectRef idx="2">
+            <a:schemeClr val="accent1"/>
+          </a:effectRef>
+          <a:fontRef idx="minor">
+            <a:schemeClr val="lt1"/>
+          </a:fontRef>
+        </p:style>
+        <p:txBody>
+          <a:bodyPr rtlCol="0" anchor="ctr"/>
           <a:lstStyle/>
           <a:p>
             <a:pPr algn="ctr"/>
-            <a:r>
-              <a:rPr sz="4400" b="1">
+          </a:p>
+        </p:txBody>
+      </p:sp>
+      <p:sp>
+        <p:nvSpPr>
+          <p:cNvPr id="7" name="TextBox 6"/>
+          <p:cNvSpPr txBox="1"/>
+          <p:nvPr/>
+        </p:nvSpPr>
+        <p:spPr>
+          <a:xfrm>
+            <a:off x="914400" y="2011680"/>
+            <a:ext cx="10332720" cy="1371600"/>
+          </a:xfrm>
+          <a:prstGeom prst="rect">
+            <a:avLst/>
+          </a:prstGeom>
+          <a:noFill/>
+        </p:spPr>
+        <p:txBody>
+          <a:bodyPr wrap="square">
+            <a:spAutoFit/>
+          </a:bodyPr>
+          <a:lstStyle/>
+          <a:p>
+            <a:r>
+              <a:rPr sz="1500" b="0">
                 <a:solidFill>
                   <a:srgbClr val="0A1F33"/>
                 </a:solidFill>
                 <a:latin typeface="Calibri"/>
               </a:rPr>
-              <a:t>✔</a:t>
-            </a:r>
-          </a:p>
-        </p:txBody>
-      </p:sp>
-      <p:sp>
-        <p:nvSpPr>
-          <p:cNvPr id="6" name="TextBox 5"/>
-          <p:cNvSpPr txBox="1"/>
-          <p:nvPr/>
-        </p:nvSpPr>
-        <p:spPr>
-          <a:xfrm>
-            <a:off x="548640" y="2880360"/>
-            <a:ext cx="11064240" cy="457200"/>
-          </a:xfrm>
-          <a:prstGeom prst="rect">
-            <a:avLst/>
-          </a:prstGeom>
-          <a:noFill/>
-        </p:spPr>
-        <p:txBody>
-          <a:bodyPr wrap="square">
-            <a:spAutoFit/>
-          </a:bodyPr>
+              <a:t>Por regla general, un jugador no puede tener encima un dispositivo electrónico no autorizado en la zona de juego. Lo que se prohíbe es tenerlo, no que suene: apagado cuenta igual. Si lo tiene, pierde la partida, salvo que el reglamento del torneo prevea una sanción menos severa.</a:t>
+            </a:r>
+          </a:p>
+        </p:txBody>
+      </p:sp>
+      <p:sp>
+        <p:nvSpPr>
+          <p:cNvPr id="8" name="TextBox 7"/>
+          <p:cNvSpPr txBox="1"/>
+          <p:nvPr/>
+        </p:nvSpPr>
+        <p:spPr>
+          <a:xfrm>
+            <a:off x="914400" y="3429000"/>
+            <a:ext cx="10332720" cy="2743200"/>
+          </a:xfrm>
+          <a:prstGeom prst="rect">
+            <a:avLst/>
+          </a:prstGeom>
+          <a:noFill/>
+        </p:spPr>
+        <p:txBody>
+          <a:bodyPr wrap="square">
+            <a:spAutoFit/>
+          </a:bodyPr>
+          <a:lstStyle/>
+          <a:p>
+            <a:pPr>
+              <a:spcAft>
+                <a:spcPts val="800"/>
+              </a:spcAft>
+            </a:pPr>
+            <a:r>
+              <a:rPr sz="1300">
+                <a:solidFill>
+                  <a:srgbClr val="334E68"/>
+                </a:solidFill>
+                <a:latin typeface="Calibri"/>
+              </a:rPr>
+              <a:t>•  El reglamento puede permitir guardarlo en el bolso completamente apagado, en el lugar que acuerde el árbitro.</a:t>
+            </a:r>
+          </a:p>
+          <a:p>
+            <a:pPr>
+              <a:spcAft>
+                <a:spcPts val="800"/>
+              </a:spcAft>
+            </a:pPr>
+            <a:r>
+              <a:rPr sz="1300">
+                <a:solidFill>
+                  <a:srgbClr val="334E68"/>
+                </a:solidFill>
+                <a:latin typeface="Calibri"/>
+              </a:rPr>
+              <a:t>•  Ante una sospecha, el árbitro puede pedir revisar ropa, bolsos y persona, siempre en privado.</a:t>
+            </a:r>
+          </a:p>
+          <a:p>
+            <a:pPr>
+              <a:spcAft>
+                <a:spcPts val="800"/>
+              </a:spcAft>
+            </a:pPr>
+            <a:r>
+              <a:rPr sz="1300">
+                <a:solidFill>
+                  <a:srgbClr val="334E68"/>
+                </a:solidFill>
+                <a:latin typeface="Calibri"/>
+              </a:rPr>
+              <a:t>•  Salvo autorización del árbitro, nadie puede usar el celular en la sala ni en las zonas contiguas que el árbitro designe.</a:t>
+            </a:r>
+          </a:p>
+          <a:p>
+            <a:pPr>
+              <a:spcAft>
+                <a:spcPts val="800"/>
+              </a:spcAft>
+            </a:pPr>
+            <a:r>
+              <a:rPr sz="1300">
+                <a:solidFill>
+                  <a:srgbClr val="334E68"/>
+                </a:solidFill>
+                <a:latin typeface="Calibri"/>
+              </a:rPr>
+              <a:t>•  En torneos escolares conviene anunciar en la charla técnica dónde se dejan los teléfonos.</a:t>
+            </a:r>
+          </a:p>
+        </p:txBody>
+      </p:sp>
+      <p:sp>
+        <p:nvSpPr>
+          <p:cNvPr id="9" name="TextBox 8"/>
+          <p:cNvSpPr txBox="1"/>
+          <p:nvPr/>
+        </p:nvSpPr>
+        <p:spPr>
+          <a:xfrm>
+            <a:off x="548640" y="6355080"/>
+            <a:ext cx="11064240" cy="365760"/>
+          </a:xfrm>
+          <a:prstGeom prst="rect">
+            <a:avLst/>
+          </a:prstGeom>
+          <a:noFill/>
+        </p:spPr>
+        <p:txBody>
+          <a:bodyPr wrap="square">
+            <a:spAutoFit/>
+          </a:bodyPr>
+          <a:lstStyle/>
+          <a:p>
+            <a:r>
+              <a:rPr sz="1100" b="0">
+                <a:solidFill>
+                  <a:srgbClr val="627D98"/>
+                </a:solidFill>
+                <a:latin typeface="Calibri"/>
+              </a:rPr>
+              <a:t>Fuente: Leyes del Ajedrez 2023 (Handbook E.I.01), art. 11.3.2, 11.3.3 y 12.8</a:t>
+            </a:r>
+          </a:p>
+        </p:txBody>
+      </p:sp>
+    </p:spTree>
+  </p:cSld>
+  <p:clrMapOvr>
+    <a:masterClrMapping/>
+  </p:clrMapOvr>
+</p:sld>
+</file>
+
+<file path=ppt/slides/slide6.xml><?xml version="1.0" encoding="utf-8"?>
+<p:sld xmlns:a="http://schemas.openxmlformats.org/drawingml/2006/main" xmlns:p="http://schemas.openxmlformats.org/presentationml/2006/main" xmlns:r="http://schemas.openxmlformats.org/officeDocument/2006/relationships">
+  <p:cSld>
+    <p:spTree>
+      <p:nvGrpSpPr>
+        <p:cNvPr id="1" name=""/>
+        <p:cNvGrpSpPr/>
+        <p:nvPr/>
+      </p:nvGrpSpPr>
+      <p:grpSpPr/>
+      <p:sp>
+        <p:nvSpPr>
+          <p:cNvPr id="2" name="Oval 1"/>
+          <p:cNvSpPr/>
+          <p:nvPr/>
+        </p:nvSpPr>
+        <p:spPr>
+          <a:xfrm>
+            <a:off x="548640" y="502920"/>
+            <a:ext cx="502920" cy="502920"/>
+          </a:xfrm>
+          <a:prstGeom prst="ellipse">
+            <a:avLst/>
+          </a:prstGeom>
+          <a:solidFill>
+            <a:srgbClr val="DE911D"/>
+          </a:solidFill>
+          <a:ln>
+            <a:noFill/>
+          </a:ln>
+          <a:effectLst/>
+        </p:spPr>
+        <p:style>
+          <a:lnRef idx="1">
+            <a:schemeClr val="accent1"/>
+          </a:lnRef>
+          <a:fillRef idx="3">
+            <a:schemeClr val="accent1"/>
+          </a:fillRef>
+          <a:effectRef idx="2">
+            <a:schemeClr val="accent1"/>
+          </a:effectRef>
+          <a:fontRef idx="minor">
+            <a:schemeClr val="lt1"/>
+          </a:fontRef>
+        </p:style>
+        <p:txBody>
+          <a:bodyPr rtlCol="0" anchor="ctr"/>
           <a:lstStyle/>
           <a:p>
             <a:pPr algn="ctr"/>
+          </a:p>
+        </p:txBody>
+      </p:sp>
+      <p:sp>
+        <p:nvSpPr>
+          <p:cNvPr id="3" name="TextBox 2"/>
+          <p:cNvSpPr txBox="1"/>
+          <p:nvPr/>
+        </p:nvSpPr>
+        <p:spPr>
+          <a:xfrm>
+            <a:off x="548640" y="502920"/>
+            <a:ext cx="502920" cy="502920"/>
+          </a:xfrm>
+          <a:prstGeom prst="rect">
+            <a:avLst/>
+          </a:prstGeom>
+          <a:noFill/>
+        </p:spPr>
+        <p:txBody>
+          <a:bodyPr wrap="square">
+            <a:spAutoFit/>
+          </a:bodyPr>
+          <a:lstStyle/>
+          <a:p>
+            <a:pPr algn="ctr"/>
+            <a:r>
+              <a:rPr sz="2000" b="0">
+                <a:solidFill>
+                  <a:srgbClr val="0A1F33"/>
+                </a:solidFill>
+                <a:latin typeface="Calibri"/>
+              </a:rPr>
+              <a:t>⚖</a:t>
+            </a:r>
+          </a:p>
+        </p:txBody>
+      </p:sp>
+      <p:sp>
+        <p:nvSpPr>
+          <p:cNvPr id="4" name="TextBox 3"/>
+          <p:cNvSpPr txBox="1"/>
+          <p:nvPr/>
+        </p:nvSpPr>
+        <p:spPr>
+          <a:xfrm>
+            <a:off x="1234440" y="530352"/>
+            <a:ext cx="9144000" cy="457200"/>
+          </a:xfrm>
+          <a:prstGeom prst="rect">
+            <a:avLst/>
+          </a:prstGeom>
+          <a:noFill/>
+        </p:spPr>
+        <p:txBody>
+          <a:bodyPr wrap="square">
+            <a:spAutoFit/>
+          </a:bodyPr>
+          <a:lstStyle/>
+          <a:p>
             <a:r>
               <a:rPr sz="1400" b="1">
                 <a:solidFill>
-                  <a:srgbClr val="F0B429"/>
-                </a:solidFill>
-                <a:latin typeface="Calibri"/>
-              </a:rPr>
-              <a:t>PRÁCTICA — SIMULACIÓN DE RECLAMOS EN SALAS DE TRABAJO</a:t>
-            </a:r>
+                  <a:srgbClr val="DE911D"/>
+                </a:solidFill>
+                <a:latin typeface="Calibri"/>
+              </a:rPr>
+              <a:t>CONTENIDO PARA VER EN CLASE</a:t>
+            </a:r>
+          </a:p>
+        </p:txBody>
+      </p:sp>
+      <p:sp>
+        <p:nvSpPr>
+          <p:cNvPr id="5" name="TextBox 4"/>
+          <p:cNvSpPr txBox="1"/>
+          <p:nvPr/>
+        </p:nvSpPr>
+        <p:spPr>
+          <a:xfrm>
+            <a:off x="548640" y="1051560"/>
+            <a:ext cx="11064240" cy="822960"/>
+          </a:xfrm>
+          <a:prstGeom prst="rect">
+            <a:avLst/>
+          </a:prstGeom>
+          <a:noFill/>
+        </p:spPr>
+        <p:txBody>
+          <a:bodyPr wrap="square">
+            <a:spAutoFit/>
+          </a:bodyPr>
+          <a:lstStyle/>
+          <a:p>
+            <a:r>
+              <a:rPr sz="2600" b="1">
+                <a:solidFill>
+                  <a:srgbClr val="0A1F33"/>
+                </a:solidFill>
+                <a:latin typeface="Cambria"/>
+              </a:rPr>
+              <a:t>Irregularidades: jugada ilegal y piezas desplazadas</a:t>
+            </a:r>
+          </a:p>
+        </p:txBody>
+      </p:sp>
+      <p:sp>
+        <p:nvSpPr>
+          <p:cNvPr id="6" name="Rectangle 5"/>
+          <p:cNvSpPr/>
+          <p:nvPr/>
+        </p:nvSpPr>
+        <p:spPr>
+          <a:xfrm>
+            <a:off x="548640" y="1874519"/>
+            <a:ext cx="11064240" cy="4389120"/>
+          </a:xfrm>
+          <a:prstGeom prst="rect">
+            <a:avLst/>
+          </a:prstGeom>
+          <a:solidFill>
+            <a:srgbClr val="F0F4F8"/>
+          </a:solidFill>
+          <a:ln>
+            <a:noFill/>
+          </a:ln>
+          <a:effectLst/>
+        </p:spPr>
+        <p:style>
+          <a:lnRef idx="1">
+            <a:schemeClr val="accent1"/>
+          </a:lnRef>
+          <a:fillRef idx="3">
+            <a:schemeClr val="accent1"/>
+          </a:fillRef>
+          <a:effectRef idx="2">
+            <a:schemeClr val="accent1"/>
+          </a:effectRef>
+          <a:fontRef idx="minor">
+            <a:schemeClr val="lt1"/>
+          </a:fontRef>
+        </p:style>
+        <p:txBody>
+          <a:bodyPr rtlCol="0" anchor="ctr"/>
+          <a:lstStyle/>
+          <a:p>
+            <a:pPr algn="ctr"/>
           </a:p>
         </p:txBody>
       </p:sp>
@@ -4430,29 +10082,408 @@
         </p:nvSpPr>
         <p:spPr>
           <a:xfrm>
-            <a:off x="1280160" y="3383280"/>
-            <a:ext cx="9601200" cy="2377440"/>
-          </a:xfrm>
-          <a:prstGeom prst="rect">
-            <a:avLst/>
-          </a:prstGeom>
-          <a:noFill/>
-        </p:spPr>
-        <p:txBody>
-          <a:bodyPr wrap="square">
-            <a:spAutoFit/>
-          </a:bodyPr>
+            <a:off x="914400" y="2011680"/>
+            <a:ext cx="10332720" cy="1371600"/>
+          </a:xfrm>
+          <a:prstGeom prst="rect">
+            <a:avLst/>
+          </a:prstGeom>
+          <a:noFill/>
+        </p:spPr>
+        <p:txBody>
+          <a:bodyPr wrap="square">
+            <a:spAutoFit/>
+          </a:bodyPr>
+          <a:lstStyle/>
+          <a:p>
+            <a:r>
+              <a:rPr sz="1500" b="0">
+                <a:solidFill>
+                  <a:srgbClr val="0A1F33"/>
+                </a:solidFill>
+                <a:latin typeface="Calibri"/>
+              </a:rPr>
+              <a:t>Una jugada ilegal queda completada cuando el jugador puso en marcha el reloj del rival. Mientras no lo haya presionado, puede corregirla sin sanción, aunque la pieza tocada lo sigue obligando. Si ya la completó, se repone la posición inmediatamente anterior y se aplica la sanción.</a:t>
+            </a:r>
+          </a:p>
+        </p:txBody>
+      </p:sp>
+      <p:sp>
+        <p:nvSpPr>
+          <p:cNvPr id="8" name="TextBox 7"/>
+          <p:cNvSpPr txBox="1"/>
+          <p:nvPr/>
+        </p:nvSpPr>
+        <p:spPr>
+          <a:xfrm>
+            <a:off x="914400" y="3429000"/>
+            <a:ext cx="10332720" cy="2743200"/>
+          </a:xfrm>
+          <a:prstGeom prst="rect">
+            <a:avLst/>
+          </a:prstGeom>
+          <a:noFill/>
+        </p:spPr>
+        <p:txBody>
+          <a:bodyPr wrap="square">
+            <a:spAutoFit/>
+          </a:bodyPr>
+          <a:lstStyle/>
+          <a:p>
+            <a:pPr>
+              <a:spcAft>
+                <a:spcPts val="800"/>
+              </a:spcAft>
+            </a:pPr>
+            <a:r>
+              <a:rPr sz="1300">
+                <a:solidFill>
+                  <a:srgbClr val="334E68"/>
+                </a:solidFill>
+                <a:latin typeface="Calibri"/>
+              </a:rPr>
+              <a:t>•  Primera jugada ilegal completada en ritmo clásico: dos minutos más para el rival. En rápidas y relámpago: un minuto.</a:t>
+            </a:r>
+          </a:p>
+          <a:p>
+            <a:pPr>
+              <a:spcAft>
+                <a:spcPts val="800"/>
+              </a:spcAft>
+            </a:pPr>
+            <a:r>
+              <a:rPr sz="1300">
+                <a:solidFill>
+                  <a:srgbClr val="334E68"/>
+                </a:solidFill>
+                <a:latin typeface="Calibri"/>
+              </a:rPr>
+              <a:t>•  Segunda jugada ilegal del mismo jugador: pierde la partida, salvo que el rival no pueda dar mate por ninguna serie de jugadas legales (tablas).</a:t>
+            </a:r>
+          </a:p>
+          <a:p>
+            <a:pPr>
+              <a:spcAft>
+                <a:spcPts val="800"/>
+              </a:spcAft>
+            </a:pPr>
+            <a:r>
+              <a:rPr sz="1300">
+                <a:solidFill>
+                  <a:srgbClr val="334E68"/>
+                </a:solidFill>
+                <a:latin typeface="Calibri"/>
+              </a:rPr>
+              <a:t>•  Si no se puede reconstruir la posición anterior, se sigue desde la última posición identificable.</a:t>
+            </a:r>
+          </a:p>
+          <a:p>
+            <a:pPr>
+              <a:spcAft>
+                <a:spcPts val="800"/>
+              </a:spcAft>
+            </a:pPr>
+            <a:r>
+              <a:rPr sz="1300">
+                <a:solidFill>
+                  <a:srgbClr val="334E68"/>
+                </a:solidFill>
+                <a:latin typeface="Calibri"/>
+              </a:rPr>
+              <a:t>•  Quien vuelca piezas las repone con su propio tiempo; el árbitro puede sancionarlo, pero no está obligado.</a:t>
+            </a:r>
+          </a:p>
+          <a:p>
+            <a:pPr>
+              <a:spcAft>
+                <a:spcPts val="800"/>
+              </a:spcAft>
+            </a:pPr>
+            <a:r>
+              <a:rPr sz="1300">
+                <a:solidFill>
+                  <a:srgbClr val="334E68"/>
+                </a:solidFill>
+                <a:latin typeface="Calibri"/>
+              </a:rPr>
+              <a:t>•  El árbitro fija los tiempos del reloj con su criterio y puede ajustar el contador de jugadas.</a:t>
+            </a:r>
+          </a:p>
+        </p:txBody>
+      </p:sp>
+      <p:sp>
+        <p:nvSpPr>
+          <p:cNvPr id="9" name="TextBox 8"/>
+          <p:cNvSpPr txBox="1"/>
+          <p:nvPr/>
+        </p:nvSpPr>
+        <p:spPr>
+          <a:xfrm>
+            <a:off x="548640" y="6355080"/>
+            <a:ext cx="11064240" cy="365760"/>
+          </a:xfrm>
+          <a:prstGeom prst="rect">
+            <a:avLst/>
+          </a:prstGeom>
+          <a:noFill/>
+        </p:spPr>
+        <p:txBody>
+          <a:bodyPr wrap="square">
+            <a:spAutoFit/>
+          </a:bodyPr>
+          <a:lstStyle/>
+          <a:p>
+            <a:r>
+              <a:rPr sz="1100" b="0">
+                <a:solidFill>
+                  <a:srgbClr val="627D98"/>
+                </a:solidFill>
+                <a:latin typeface="Calibri"/>
+              </a:rPr>
+              <a:t>Fuente: Leyes del Ajedrez 2023 (Handbook E.I.01), art. 7.1, 7.4, 7.5.1, 7.5.5 y apéndice A.3</a:t>
+            </a:r>
+          </a:p>
+        </p:txBody>
+      </p:sp>
+    </p:spTree>
+  </p:cSld>
+  <p:clrMapOvr>
+    <a:masterClrMapping/>
+  </p:clrMapOvr>
+</p:sld>
+</file>
+
+<file path=ppt/slides/slide7.xml><?xml version="1.0" encoding="utf-8"?>
+<p:sld xmlns:a="http://schemas.openxmlformats.org/drawingml/2006/main" xmlns:p="http://schemas.openxmlformats.org/presentationml/2006/main" xmlns:r="http://schemas.openxmlformats.org/officeDocument/2006/relationships">
+  <p:cSld>
+    <p:spTree>
+      <p:nvGrpSpPr>
+        <p:cNvPr id="1" name=""/>
+        <p:cNvGrpSpPr/>
+        <p:nvPr/>
+      </p:nvGrpSpPr>
+      <p:grpSpPr/>
+      <p:sp>
+        <p:nvSpPr>
+          <p:cNvPr id="2" name="Oval 1"/>
+          <p:cNvSpPr/>
+          <p:nvPr/>
+        </p:nvSpPr>
+        <p:spPr>
+          <a:xfrm>
+            <a:off x="548640" y="502920"/>
+            <a:ext cx="502920" cy="502920"/>
+          </a:xfrm>
+          <a:prstGeom prst="ellipse">
+            <a:avLst/>
+          </a:prstGeom>
+          <a:solidFill>
+            <a:srgbClr val="DE911D"/>
+          </a:solidFill>
+          <a:ln>
+            <a:noFill/>
+          </a:ln>
+          <a:effectLst/>
+        </p:spPr>
+        <p:style>
+          <a:lnRef idx="1">
+            <a:schemeClr val="accent1"/>
+          </a:lnRef>
+          <a:fillRef idx="3">
+            <a:schemeClr val="accent1"/>
+          </a:fillRef>
+          <a:effectRef idx="2">
+            <a:schemeClr val="accent1"/>
+          </a:effectRef>
+          <a:fontRef idx="minor">
+            <a:schemeClr val="lt1"/>
+          </a:fontRef>
+        </p:style>
+        <p:txBody>
+          <a:bodyPr rtlCol="0" anchor="ctr"/>
           <a:lstStyle/>
           <a:p>
             <a:pPr algn="ctr"/>
+          </a:p>
+        </p:txBody>
+      </p:sp>
+      <p:sp>
+        <p:nvSpPr>
+          <p:cNvPr id="3" name="TextBox 2"/>
+          <p:cNvSpPr txBox="1"/>
+          <p:nvPr/>
+        </p:nvSpPr>
+        <p:spPr>
+          <a:xfrm>
+            <a:off x="548640" y="502920"/>
+            <a:ext cx="502920" cy="502920"/>
+          </a:xfrm>
+          <a:prstGeom prst="rect">
+            <a:avLst/>
+          </a:prstGeom>
+          <a:noFill/>
+        </p:spPr>
+        <p:txBody>
+          <a:bodyPr wrap="square">
+            <a:spAutoFit/>
+          </a:bodyPr>
+          <a:lstStyle/>
+          <a:p>
+            <a:pPr algn="ctr"/>
             <a:r>
               <a:rPr sz="2000" b="0">
                 <a:solidFill>
-                  <a:srgbClr val="FFFFFF"/>
+                  <a:srgbClr val="0A1F33"/>
+                </a:solidFill>
+                <a:latin typeface="Calibri"/>
+              </a:rPr>
+              <a:t>⚖</a:t>
+            </a:r>
+          </a:p>
+        </p:txBody>
+      </p:sp>
+      <p:sp>
+        <p:nvSpPr>
+          <p:cNvPr id="4" name="TextBox 3"/>
+          <p:cNvSpPr txBox="1"/>
+          <p:nvPr/>
+        </p:nvSpPr>
+        <p:spPr>
+          <a:xfrm>
+            <a:off x="1234440" y="530352"/>
+            <a:ext cx="9144000" cy="457200"/>
+          </a:xfrm>
+          <a:prstGeom prst="rect">
+            <a:avLst/>
+          </a:prstGeom>
+          <a:noFill/>
+        </p:spPr>
+        <p:txBody>
+          <a:bodyPr wrap="square">
+            <a:spAutoFit/>
+          </a:bodyPr>
+          <a:lstStyle/>
+          <a:p>
+            <a:r>
+              <a:rPr sz="1400" b="1">
+                <a:solidFill>
+                  <a:srgbClr val="DE911D"/>
+                </a:solidFill>
+                <a:latin typeface="Calibri"/>
+              </a:rPr>
+              <a:t>CONTENIDO PARA VER EN CLASE</a:t>
+            </a:r>
+          </a:p>
+        </p:txBody>
+      </p:sp>
+      <p:sp>
+        <p:nvSpPr>
+          <p:cNvPr id="5" name="TextBox 4"/>
+          <p:cNvSpPr txBox="1"/>
+          <p:nvPr/>
+        </p:nvSpPr>
+        <p:spPr>
+          <a:xfrm>
+            <a:off x="548640" y="1051560"/>
+            <a:ext cx="11064240" cy="822960"/>
+          </a:xfrm>
+          <a:prstGeom prst="rect">
+            <a:avLst/>
+          </a:prstGeom>
+          <a:noFill/>
+        </p:spPr>
+        <p:txBody>
+          <a:bodyPr wrap="square">
+            <a:spAutoFit/>
+          </a:bodyPr>
+          <a:lstStyle/>
+          <a:p>
+            <a:r>
+              <a:rPr sz="2600" b="1">
+                <a:solidFill>
+                  <a:srgbClr val="0A1F33"/>
                 </a:solidFill>
                 <a:latin typeface="Cambria"/>
               </a:rPr>
-              <a:t>En subgrupos, cada participante asume el rol de árbitro ante un reclamo distinto y debe resolverlo aplicando el procedimiento correcto.</a:t>
+              <a:t>Sanciones: de menor a mayor</a:t>
+            </a:r>
+          </a:p>
+        </p:txBody>
+      </p:sp>
+      <p:sp>
+        <p:nvSpPr>
+          <p:cNvPr id="6" name="Rectangle 5"/>
+          <p:cNvSpPr/>
+          <p:nvPr/>
+        </p:nvSpPr>
+        <p:spPr>
+          <a:xfrm>
+            <a:off x="548640" y="1874519"/>
+            <a:ext cx="11064240" cy="4389120"/>
+          </a:xfrm>
+          <a:prstGeom prst="rect">
+            <a:avLst/>
+          </a:prstGeom>
+          <a:solidFill>
+            <a:srgbClr val="F0F4F8"/>
+          </a:solidFill>
+          <a:ln>
+            <a:noFill/>
+          </a:ln>
+          <a:effectLst/>
+        </p:spPr>
+        <p:style>
+          <a:lnRef idx="1">
+            <a:schemeClr val="accent1"/>
+          </a:lnRef>
+          <a:fillRef idx="3">
+            <a:schemeClr val="accent1"/>
+          </a:fillRef>
+          <a:effectRef idx="2">
+            <a:schemeClr val="accent1"/>
+          </a:effectRef>
+          <a:fontRef idx="minor">
+            <a:schemeClr val="lt1"/>
+          </a:fontRef>
+        </p:style>
+        <p:txBody>
+          <a:bodyPr rtlCol="0" anchor="ctr"/>
+          <a:lstStyle/>
+          <a:p>
+            <a:pPr algn="ctr"/>
+          </a:p>
+        </p:txBody>
+      </p:sp>
+      <p:sp>
+        <p:nvSpPr>
+          <p:cNvPr id="7" name="TextBox 6"/>
+          <p:cNvSpPr txBox="1"/>
+          <p:nvPr/>
+        </p:nvSpPr>
+        <p:spPr>
+          <a:xfrm>
+            <a:off x="914400" y="2011680"/>
+            <a:ext cx="10332720" cy="1371600"/>
+          </a:xfrm>
+          <a:prstGeom prst="rect">
+            <a:avLst/>
+          </a:prstGeom>
+          <a:noFill/>
+        </p:spPr>
+        <p:txBody>
+          <a:bodyPr wrap="square">
+            <a:spAutoFit/>
+          </a:bodyPr>
+          <a:lstStyle/>
+          <a:p>
+            <a:r>
+              <a:rPr sz="1500" b="0">
+                <a:solidFill>
+                  <a:srgbClr val="0A1F33"/>
+                </a:solidFill>
+                <a:latin typeface="Calibri"/>
+              </a:rPr>
+              <a:t>El art. 12.9 enumera las sanciones que puede aplicar el árbitro, ordenadas de la más suave a la más dura. Se elige la proporcionada: aplicar la más severa a una falta menor es tan mal arbitraje como no sancionar.</a:t>
             </a:r>
           </a:p>
         </p:txBody>
@@ -4465,7 +10496,110 @@
         </p:nvSpPr>
         <p:spPr>
           <a:xfrm>
-            <a:off x="548640" y="6263640"/>
+            <a:off x="914400" y="3429000"/>
+            <a:ext cx="10332720" cy="2743200"/>
+          </a:xfrm>
+          <a:prstGeom prst="rect">
+            <a:avLst/>
+          </a:prstGeom>
+          <a:noFill/>
+        </p:spPr>
+        <p:txBody>
+          <a:bodyPr wrap="square">
+            <a:spAutoFit/>
+          </a:bodyPr>
+          <a:lstStyle/>
+          <a:p>
+            <a:pPr>
+              <a:spcAft>
+                <a:spcPts val="800"/>
+              </a:spcAft>
+            </a:pPr>
+            <a:r>
+              <a:rPr sz="1500">
+                <a:solidFill>
+                  <a:srgbClr val="334E68"/>
+                </a:solidFill>
+                <a:latin typeface="Calibri"/>
+              </a:rPr>
+              <a:t>•  Advertencia.</a:t>
+            </a:r>
+          </a:p>
+          <a:p>
+            <a:pPr>
+              <a:spcAft>
+                <a:spcPts val="800"/>
+              </a:spcAft>
+            </a:pPr>
+            <a:r>
+              <a:rPr sz="1500">
+                <a:solidFill>
+                  <a:srgbClr val="334E68"/>
+                </a:solidFill>
+                <a:latin typeface="Calibri"/>
+              </a:rPr>
+              <a:t>•  Aumentar el tiempo del rival o reducir el del infractor.</a:t>
+            </a:r>
+          </a:p>
+          <a:p>
+            <a:pPr>
+              <a:spcAft>
+                <a:spcPts val="800"/>
+              </a:spcAft>
+            </a:pPr>
+            <a:r>
+              <a:rPr sz="1500">
+                <a:solidFill>
+                  <a:srgbClr val="334E68"/>
+                </a:solidFill>
+                <a:latin typeface="Calibri"/>
+              </a:rPr>
+              <a:t>•  Reducir los puntos obtenidos en la partida o aumentar los del rival.</a:t>
+            </a:r>
+          </a:p>
+          <a:p>
+            <a:pPr>
+              <a:spcAft>
+                <a:spcPts val="800"/>
+              </a:spcAft>
+            </a:pPr>
+            <a:r>
+              <a:rPr sz="1500">
+                <a:solidFill>
+                  <a:srgbClr val="334E68"/>
+                </a:solidFill>
+                <a:latin typeface="Calibri"/>
+              </a:rPr>
+              <a:t>•  Declarar perdida la partida.</a:t>
+            </a:r>
+          </a:p>
+          <a:p>
+            <a:pPr>
+              <a:spcAft>
+                <a:spcPts val="800"/>
+              </a:spcAft>
+            </a:pPr>
+            <a:r>
+              <a:rPr sz="1500">
+                <a:solidFill>
+                  <a:srgbClr val="334E68"/>
+                </a:solidFill>
+                <a:latin typeface="Calibri"/>
+              </a:rPr>
+              <a:t>•  Multa anunciada de antemano, exclusión de una o más rondas o expulsión de la competición.</a:t>
+            </a:r>
+          </a:p>
+        </p:txBody>
+      </p:sp>
+      <p:sp>
+        <p:nvSpPr>
+          <p:cNvPr id="9" name="TextBox 8"/>
+          <p:cNvSpPr txBox="1"/>
+          <p:nvPr/>
+        </p:nvSpPr>
+        <p:spPr>
+          <a:xfrm>
+            <a:off x="548640" y="6355080"/>
             <a:ext cx="11064240" cy="365760"/>
           </a:xfrm>
           <a:prstGeom prst="rect">
@@ -4479,15 +10613,605 @@
           </a:bodyPr>
           <a:lstStyle/>
           <a:p>
+            <a:r>
+              <a:rPr sz="1100" b="0">
+                <a:solidFill>
+                  <a:srgbClr val="627D98"/>
+                </a:solidFill>
+                <a:latin typeface="Calibri"/>
+              </a:rPr>
+              <a:t>Fuente: Leyes del Ajedrez 2023 (Handbook E.I.01), art. 11.6 y 12.9</a:t>
+            </a:r>
+          </a:p>
+        </p:txBody>
+      </p:sp>
+    </p:spTree>
+  </p:cSld>
+  <p:clrMapOvr>
+    <a:masterClrMapping/>
+  </p:clrMapOvr>
+</p:sld>
+</file>
+
+<file path=ppt/slides/slide8.xml><?xml version="1.0" encoding="utf-8"?>
+<p:sld xmlns:a="http://schemas.openxmlformats.org/drawingml/2006/main" xmlns:p="http://schemas.openxmlformats.org/presentationml/2006/main" xmlns:r="http://schemas.openxmlformats.org/officeDocument/2006/relationships">
+  <p:cSld>
+    <p:spTree>
+      <p:nvGrpSpPr>
+        <p:cNvPr id="1" name=""/>
+        <p:cNvGrpSpPr/>
+        <p:nvPr/>
+      </p:nvGrpSpPr>
+      <p:grpSpPr/>
+      <p:sp>
+        <p:nvSpPr>
+          <p:cNvPr id="2" name="Oval 1"/>
+          <p:cNvSpPr/>
+          <p:nvPr/>
+        </p:nvSpPr>
+        <p:spPr>
+          <a:xfrm>
+            <a:off x="548640" y="502920"/>
+            <a:ext cx="502920" cy="502920"/>
+          </a:xfrm>
+          <a:prstGeom prst="ellipse">
+            <a:avLst/>
+          </a:prstGeom>
+          <a:solidFill>
+            <a:srgbClr val="DE911D"/>
+          </a:solidFill>
+          <a:ln>
+            <a:noFill/>
+          </a:ln>
+          <a:effectLst/>
+        </p:spPr>
+        <p:style>
+          <a:lnRef idx="1">
+            <a:schemeClr val="accent1"/>
+          </a:lnRef>
+          <a:fillRef idx="3">
+            <a:schemeClr val="accent1"/>
+          </a:fillRef>
+          <a:effectRef idx="2">
+            <a:schemeClr val="accent1"/>
+          </a:effectRef>
+          <a:fontRef idx="minor">
+            <a:schemeClr val="lt1"/>
+          </a:fontRef>
+        </p:style>
+        <p:txBody>
+          <a:bodyPr rtlCol="0" anchor="ctr"/>
+          <a:lstStyle/>
+          <a:p>
             <a:pPr algn="ctr"/>
-            <a:r>
-              <a:rPr sz="1200" b="0">
-                <a:solidFill>
-                  <a:srgbClr val="9FB3C8"/>
-                </a:solidFill>
-                <a:latin typeface="Calibri"/>
-              </a:rPr>
-              <a:t>Formación Ajedrez · Sesión 2</a:t>
+          </a:p>
+        </p:txBody>
+      </p:sp>
+      <p:sp>
+        <p:nvSpPr>
+          <p:cNvPr id="3" name="TextBox 2"/>
+          <p:cNvSpPr txBox="1"/>
+          <p:nvPr/>
+        </p:nvSpPr>
+        <p:spPr>
+          <a:xfrm>
+            <a:off x="548640" y="502920"/>
+            <a:ext cx="502920" cy="502920"/>
+          </a:xfrm>
+          <a:prstGeom prst="rect">
+            <a:avLst/>
+          </a:prstGeom>
+          <a:noFill/>
+        </p:spPr>
+        <p:txBody>
+          <a:bodyPr wrap="square">
+            <a:spAutoFit/>
+          </a:bodyPr>
+          <a:lstStyle/>
+          <a:p>
+            <a:pPr algn="ctr"/>
+            <a:r>
+              <a:rPr sz="2000" b="0">
+                <a:solidFill>
+                  <a:srgbClr val="0A1F33"/>
+                </a:solidFill>
+                <a:latin typeface="Calibri"/>
+              </a:rPr>
+              <a:t>⚖</a:t>
+            </a:r>
+          </a:p>
+        </p:txBody>
+      </p:sp>
+      <p:sp>
+        <p:nvSpPr>
+          <p:cNvPr id="4" name="TextBox 3"/>
+          <p:cNvSpPr txBox="1"/>
+          <p:nvPr/>
+        </p:nvSpPr>
+        <p:spPr>
+          <a:xfrm>
+            <a:off x="1234440" y="530352"/>
+            <a:ext cx="9144000" cy="457200"/>
+          </a:xfrm>
+          <a:prstGeom prst="rect">
+            <a:avLst/>
+          </a:prstGeom>
+          <a:noFill/>
+        </p:spPr>
+        <p:txBody>
+          <a:bodyPr wrap="square">
+            <a:spAutoFit/>
+          </a:bodyPr>
+          <a:lstStyle/>
+          <a:p>
+            <a:r>
+              <a:rPr sz="1400" b="1">
+                <a:solidFill>
+                  <a:srgbClr val="DE911D"/>
+                </a:solidFill>
+                <a:latin typeface="Calibri"/>
+              </a:rPr>
+              <a:t>CONTENIDO PARA VER EN CLASE</a:t>
+            </a:r>
+          </a:p>
+        </p:txBody>
+      </p:sp>
+      <p:sp>
+        <p:nvSpPr>
+          <p:cNvPr id="5" name="TextBox 4"/>
+          <p:cNvSpPr txBox="1"/>
+          <p:nvPr/>
+        </p:nvSpPr>
+        <p:spPr>
+          <a:xfrm>
+            <a:off x="548640" y="1051560"/>
+            <a:ext cx="11064240" cy="822960"/>
+          </a:xfrm>
+          <a:prstGeom prst="rect">
+            <a:avLst/>
+          </a:prstGeom>
+          <a:noFill/>
+        </p:spPr>
+        <p:txBody>
+          <a:bodyPr wrap="square">
+            <a:spAutoFit/>
+          </a:bodyPr>
+          <a:lstStyle/>
+          <a:p>
+            <a:r>
+              <a:rPr sz="2600" b="1">
+                <a:solidFill>
+                  <a:srgbClr val="0A1F33"/>
+                </a:solidFill>
+                <a:latin typeface="Cambria"/>
+              </a:rPr>
+              <a:t>Reclamos y apelaciones</a:t>
+            </a:r>
+          </a:p>
+        </p:txBody>
+      </p:sp>
+      <p:sp>
+        <p:nvSpPr>
+          <p:cNvPr id="6" name="Rectangle 5"/>
+          <p:cNvSpPr/>
+          <p:nvPr/>
+        </p:nvSpPr>
+        <p:spPr>
+          <a:xfrm>
+            <a:off x="548640" y="1874519"/>
+            <a:ext cx="11064240" cy="4389120"/>
+          </a:xfrm>
+          <a:prstGeom prst="rect">
+            <a:avLst/>
+          </a:prstGeom>
+          <a:solidFill>
+            <a:srgbClr val="F0F4F8"/>
+          </a:solidFill>
+          <a:ln>
+            <a:noFill/>
+          </a:ln>
+          <a:effectLst/>
+        </p:spPr>
+        <p:style>
+          <a:lnRef idx="1">
+            <a:schemeClr val="accent1"/>
+          </a:lnRef>
+          <a:fillRef idx="3">
+            <a:schemeClr val="accent1"/>
+          </a:fillRef>
+          <a:effectRef idx="2">
+            <a:schemeClr val="accent1"/>
+          </a:effectRef>
+          <a:fontRef idx="minor">
+            <a:schemeClr val="lt1"/>
+          </a:fontRef>
+        </p:style>
+        <p:txBody>
+          <a:bodyPr rtlCol="0" anchor="ctr"/>
+          <a:lstStyle/>
+          <a:p>
+            <a:pPr algn="ctr"/>
+          </a:p>
+        </p:txBody>
+      </p:sp>
+      <p:sp>
+        <p:nvSpPr>
+          <p:cNvPr id="7" name="TextBox 6"/>
+          <p:cNvSpPr txBox="1"/>
+          <p:nvPr/>
+        </p:nvSpPr>
+        <p:spPr>
+          <a:xfrm>
+            <a:off x="914400" y="2011680"/>
+            <a:ext cx="10332720" cy="1371600"/>
+          </a:xfrm>
+          <a:prstGeom prst="rect">
+            <a:avLst/>
+          </a:prstGeom>
+          <a:noFill/>
+        </p:spPr>
+        <p:txBody>
+          <a:bodyPr wrap="square">
+            <a:spAutoFit/>
+          </a:bodyPr>
+          <a:lstStyle/>
+          <a:p>
+            <a:r>
+              <a:rPr sz="1500" b="0">
+                <a:solidFill>
+                  <a:srgbClr val="0A1F33"/>
+                </a:solidFill>
+                <a:latin typeface="Calibri"/>
+              </a:rPr>
+              <a:t>El jugador puede pausar el reloj para llamar al árbitro. Quien arbitra escucha a las dos partes, verifica los hechos (planillas, testigos, posición), decide con el artículo y registra la incidencia. La decisión de reanudar la partida es del árbitro.</a:t>
+            </a:r>
+          </a:p>
+        </p:txBody>
+      </p:sp>
+      <p:sp>
+        <p:nvSpPr>
+          <p:cNvPr id="8" name="TextBox 7"/>
+          <p:cNvSpPr txBox="1"/>
+          <p:nvPr/>
+        </p:nvSpPr>
+        <p:spPr>
+          <a:xfrm>
+            <a:off x="914400" y="3429000"/>
+            <a:ext cx="10332720" cy="2743200"/>
+          </a:xfrm>
+          <a:prstGeom prst="rect">
+            <a:avLst/>
+          </a:prstGeom>
+          <a:noFill/>
+        </p:spPr>
+        <p:txBody>
+          <a:bodyPr wrap="square">
+            <a:spAutoFit/>
+          </a:bodyPr>
+          <a:lstStyle/>
+          <a:p>
+            <a:pPr>
+              <a:spcAft>
+                <a:spcPts val="800"/>
+              </a:spcAft>
+            </a:pPr>
+            <a:r>
+              <a:rPr sz="1500">
+                <a:solidFill>
+                  <a:srgbClr val="334E68"/>
+                </a:solidFill>
+                <a:latin typeface="Calibri"/>
+              </a:rPr>
+              <a:t>•  El jugador tiene derecho a que se le explique la regla que se aplica.</a:t>
+            </a:r>
+          </a:p>
+          <a:p>
+            <a:pPr>
+              <a:spcAft>
+                <a:spcPts val="800"/>
+              </a:spcAft>
+            </a:pPr>
+            <a:r>
+              <a:rPr sz="1500">
+                <a:solidFill>
+                  <a:srgbClr val="334E68"/>
+                </a:solidFill>
+                <a:latin typeface="Calibri"/>
+              </a:rPr>
+              <a:t>•  Quien toca una pieza con intención de moverla o capturarla pierde el derecho a reclamar contra una infracción del rival a la regla de pieza tocada (art. 4.1 a 4.7).</a:t>
+            </a:r>
+          </a:p>
+          <a:p>
+            <a:pPr>
+              <a:spcAft>
+                <a:spcPts val="800"/>
+              </a:spcAft>
+            </a:pPr>
+            <a:r>
+              <a:rPr sz="1500">
+                <a:solidFill>
+                  <a:srgbClr val="334E68"/>
+                </a:solidFill>
+                <a:latin typeface="Calibri"/>
+              </a:rPr>
+              <a:t>•  Firmar la planilla no impide apelar; los plazos y la forma de la apelación los fija el reglamento del torneo.</a:t>
+            </a:r>
+          </a:p>
+        </p:txBody>
+      </p:sp>
+      <p:sp>
+        <p:nvSpPr>
+          <p:cNvPr id="9" name="TextBox 8"/>
+          <p:cNvSpPr txBox="1"/>
+          <p:nvPr/>
+        </p:nvSpPr>
+        <p:spPr>
+          <a:xfrm>
+            <a:off x="548640" y="6355080"/>
+            <a:ext cx="11064240" cy="365760"/>
+          </a:xfrm>
+          <a:prstGeom prst="rect">
+            <a:avLst/>
+          </a:prstGeom>
+          <a:noFill/>
+        </p:spPr>
+        <p:txBody>
+          <a:bodyPr wrap="square">
+            <a:spAutoFit/>
+          </a:bodyPr>
+          <a:lstStyle/>
+          <a:p>
+            <a:r>
+              <a:rPr sz="1100" b="0">
+                <a:solidFill>
+                  <a:srgbClr val="627D98"/>
+                </a:solidFill>
+                <a:latin typeface="Calibri"/>
+              </a:rPr>
+              <a:t>Fuente: Leyes del Ajedrez 2023 (Handbook E.I.01), art. 4.8, 6.11, 11.9 y 11.10</a:t>
+            </a:r>
+          </a:p>
+        </p:txBody>
+      </p:sp>
+    </p:spTree>
+  </p:cSld>
+  <p:clrMapOvr>
+    <a:masterClrMapping/>
+  </p:clrMapOvr>
+</p:sld>
+</file>
+
+<file path=ppt/slides/slide9.xml><?xml version="1.0" encoding="utf-8"?>
+<p:sld xmlns:a="http://schemas.openxmlformats.org/drawingml/2006/main" xmlns:p="http://schemas.openxmlformats.org/presentationml/2006/main" xmlns:r="http://schemas.openxmlformats.org/officeDocument/2006/relationships">
+  <p:cSld>
+    <p:spTree>
+      <p:nvGrpSpPr>
+        <p:cNvPr id="1" name=""/>
+        <p:cNvGrpSpPr/>
+        <p:nvPr/>
+      </p:nvGrpSpPr>
+      <p:grpSpPr/>
+      <p:sp>
+        <p:nvSpPr>
+          <p:cNvPr id="2" name="Oval 1"/>
+          <p:cNvSpPr/>
+          <p:nvPr/>
+        </p:nvSpPr>
+        <p:spPr>
+          <a:xfrm>
+            <a:off x="548640" y="502920"/>
+            <a:ext cx="502920" cy="502920"/>
+          </a:xfrm>
+          <a:prstGeom prst="ellipse">
+            <a:avLst/>
+          </a:prstGeom>
+          <a:solidFill>
+            <a:srgbClr val="DE911D"/>
+          </a:solidFill>
+          <a:ln>
+            <a:noFill/>
+          </a:ln>
+          <a:effectLst/>
+        </p:spPr>
+        <p:style>
+          <a:lnRef idx="1">
+            <a:schemeClr val="accent1"/>
+          </a:lnRef>
+          <a:fillRef idx="3">
+            <a:schemeClr val="accent1"/>
+          </a:fillRef>
+          <a:effectRef idx="2">
+            <a:schemeClr val="accent1"/>
+          </a:effectRef>
+          <a:fontRef idx="minor">
+            <a:schemeClr val="lt1"/>
+          </a:fontRef>
+        </p:style>
+        <p:txBody>
+          <a:bodyPr rtlCol="0" anchor="ctr"/>
+          <a:lstStyle/>
+          <a:p>
+            <a:pPr algn="ctr"/>
+          </a:p>
+        </p:txBody>
+      </p:sp>
+      <p:sp>
+        <p:nvSpPr>
+          <p:cNvPr id="3" name="TextBox 2"/>
+          <p:cNvSpPr txBox="1"/>
+          <p:nvPr/>
+        </p:nvSpPr>
+        <p:spPr>
+          <a:xfrm>
+            <a:off x="548640" y="502920"/>
+            <a:ext cx="502920" cy="502920"/>
+          </a:xfrm>
+          <a:prstGeom prst="rect">
+            <a:avLst/>
+          </a:prstGeom>
+          <a:noFill/>
+        </p:spPr>
+        <p:txBody>
+          <a:bodyPr wrap="square">
+            <a:spAutoFit/>
+          </a:bodyPr>
+          <a:lstStyle/>
+          <a:p>
+            <a:pPr algn="ctr"/>
+            <a:r>
+              <a:rPr sz="2000" b="0">
+                <a:solidFill>
+                  <a:srgbClr val="0A1F33"/>
+                </a:solidFill>
+                <a:latin typeface="Calibri"/>
+              </a:rPr>
+              <a:t>?</a:t>
+            </a:r>
+          </a:p>
+        </p:txBody>
+      </p:sp>
+      <p:sp>
+        <p:nvSpPr>
+          <p:cNvPr id="4" name="TextBox 3"/>
+          <p:cNvSpPr txBox="1"/>
+          <p:nvPr/>
+        </p:nvSpPr>
+        <p:spPr>
+          <a:xfrm>
+            <a:off x="1234440" y="530352"/>
+            <a:ext cx="9144000" cy="457200"/>
+          </a:xfrm>
+          <a:prstGeom prst="rect">
+            <a:avLst/>
+          </a:prstGeom>
+          <a:noFill/>
+        </p:spPr>
+        <p:txBody>
+          <a:bodyPr wrap="square">
+            <a:spAutoFit/>
+          </a:bodyPr>
+          <a:lstStyle/>
+          <a:p>
+            <a:r>
+              <a:rPr sz="1400" b="1">
+                <a:solidFill>
+                  <a:srgbClr val="DE911D"/>
+                </a:solidFill>
+                <a:latin typeface="Calibri"/>
+              </a:rPr>
+              <a:t>CASO 1 · ¿QUÉ DECIDE LA PERSONA ÁRBITRA?</a:t>
+            </a:r>
+          </a:p>
+        </p:txBody>
+      </p:sp>
+      <p:sp>
+        <p:nvSpPr>
+          <p:cNvPr id="5" name="TextBox 4"/>
+          <p:cNvSpPr txBox="1"/>
+          <p:nvPr/>
+        </p:nvSpPr>
+        <p:spPr>
+          <a:xfrm>
+            <a:off x="548640" y="1051560"/>
+            <a:ext cx="11064240" cy="822960"/>
+          </a:xfrm>
+          <a:prstGeom prst="rect">
+            <a:avLst/>
+          </a:prstGeom>
+          <a:noFill/>
+        </p:spPr>
+        <p:txBody>
+          <a:bodyPr wrap="square">
+            <a:spAutoFit/>
+          </a:bodyPr>
+          <a:lstStyle/>
+          <a:p>
+            <a:r>
+              <a:rPr sz="2600" b="1">
+                <a:solidFill>
+                  <a:srgbClr val="0A1F33"/>
+                </a:solidFill>
+                <a:latin typeface="Cambria"/>
+              </a:rPr>
+              <a:t>Suena un celular</a:t>
+            </a:r>
+          </a:p>
+        </p:txBody>
+      </p:sp>
+      <p:sp>
+        <p:nvSpPr>
+          <p:cNvPr id="6" name="Rectangle 5"/>
+          <p:cNvSpPr/>
+          <p:nvPr/>
+        </p:nvSpPr>
+        <p:spPr>
+          <a:xfrm>
+            <a:off x="548640" y="1965960"/>
+            <a:ext cx="11064240" cy="4206240"/>
+          </a:xfrm>
+          <a:prstGeom prst="rect">
+            <a:avLst/>
+          </a:prstGeom>
+          <a:solidFill>
+            <a:srgbClr val="F0F4F8"/>
+          </a:solidFill>
+          <a:ln>
+            <a:noFill/>
+          </a:ln>
+          <a:effectLst/>
+        </p:spPr>
+        <p:style>
+          <a:lnRef idx="1">
+            <a:schemeClr val="accent1"/>
+          </a:lnRef>
+          <a:fillRef idx="3">
+            <a:schemeClr val="accent1"/>
+          </a:fillRef>
+          <a:effectRef idx="2">
+            <a:schemeClr val="accent1"/>
+          </a:effectRef>
+          <a:fontRef idx="minor">
+            <a:schemeClr val="lt1"/>
+          </a:fontRef>
+        </p:style>
+        <p:txBody>
+          <a:bodyPr rtlCol="0" anchor="ctr"/>
+          <a:lstStyle/>
+          <a:p>
+            <a:pPr algn="ctr"/>
+          </a:p>
+        </p:txBody>
+      </p:sp>
+      <p:sp>
+        <p:nvSpPr>
+          <p:cNvPr id="7" name="TextBox 6"/>
+          <p:cNvSpPr txBox="1"/>
+          <p:nvPr/>
+        </p:nvSpPr>
+        <p:spPr>
+          <a:xfrm>
+            <a:off x="914400" y="2240280"/>
+            <a:ext cx="10332720" cy="3749039"/>
+          </a:xfrm>
+          <a:prstGeom prst="rect">
+            <a:avLst/>
+          </a:prstGeom>
+          <a:noFill/>
+        </p:spPr>
+        <p:txBody>
+          <a:bodyPr wrap="square">
+            <a:spAutoFit/>
+          </a:bodyPr>
+          <a:lstStyle/>
+          <a:p>
+            <a:r>
+              <a:rPr sz="2000" b="0">
+                <a:solidFill>
+                  <a:srgbClr val="334E68"/>
+                </a:solidFill>
+                <a:latin typeface="Calibri"/>
+              </a:rPr>
+              <a:t>En plena ronda suena el celular de un jugador dentro de la sala. El reglamento del torneo no dice nada sobre dispositivos.</a:t>
             </a:r>
           </a:p>
         </p:txBody>

--- a/cursos/recursos/formacion-ajedrez/02-reglas-de-competicion.pptx
+++ b/cursos/recursos/formacion-ajedrez/02-reglas-de-competicion.pptx
@@ -7959,7 +7959,7 @@
               </a:spcAft>
             </a:pPr>
             <a:r>
-              <a:rPr sz="1400">
+              <a:rPr sz="1200">
                 <a:solidFill>
                   <a:srgbClr val="334E68"/>
                 </a:solidFill>
@@ -7975,7 +7975,7 @@
               </a:spcAft>
             </a:pPr>
             <a:r>
-              <a:rPr sz="1400">
+              <a:rPr sz="1200">
                 <a:solidFill>
                   <a:srgbClr val="334E68"/>
                 </a:solidFill>
@@ -7991,7 +7991,7 @@
               </a:spcAft>
             </a:pPr>
             <a:r>
-              <a:rPr sz="1400">
+              <a:rPr sz="1200">
                 <a:solidFill>
                   <a:srgbClr val="334E68"/>
                 </a:solidFill>
@@ -8007,7 +8007,7 @@
               </a:spcAft>
             </a:pPr>
             <a:r>
-              <a:rPr sz="1400">
+              <a:rPr sz="1200">
                 <a:solidFill>
                   <a:srgbClr val="334E68"/>
                 </a:solidFill>
@@ -8023,7 +8023,7 @@
               </a:spcAft>
             </a:pPr>
             <a:r>
-              <a:rPr sz="1400">
+              <a:rPr sz="1200">
                 <a:solidFill>
                   <a:srgbClr val="334E68"/>
                 </a:solidFill>
@@ -8039,13 +8039,93 @@
               </a:spcAft>
             </a:pPr>
             <a:r>
-              <a:rPr sz="1400">
+              <a:rPr sz="1200">
                 <a:solidFill>
                   <a:srgbClr val="334E68"/>
                 </a:solidFill>
                 <a:latin typeface="Calibri"/>
               </a:rPr>
               <a:t>6. ¿Cuál es la primera sanción de la lista del art. 12.9?</a:t>
+            </a:r>
+          </a:p>
+          <a:p>
+            <a:pPr>
+              <a:spcAft>
+                <a:spcPts val="600"/>
+              </a:spcAft>
+            </a:pPr>
+            <a:r>
+              <a:rPr sz="1200">
+                <a:solidFill>
+                  <a:srgbClr val="334E68"/>
+                </a:solidFill>
+                <a:latin typeface="Calibri"/>
+              </a:rPr>
+              <a:t>7. Para salir de la sala de juego durante la ronda, ¿qué necesita un jugador?</a:t>
+            </a:r>
+          </a:p>
+          <a:p>
+            <a:pPr>
+              <a:spcAft>
+                <a:spcPts val="600"/>
+              </a:spcAft>
+            </a:pPr>
+            <a:r>
+              <a:rPr sz="1200">
+                <a:solidFill>
+                  <a:srgbClr val="334E68"/>
+                </a:solidFill>
+                <a:latin typeface="Calibri"/>
+              </a:rPr>
+              <a:t>8. ¿Puede un jugador que ya terminó su partida quedarse analizándola en un tablero de la sala, junto a mesas que siguen jugando?</a:t>
+            </a:r>
+          </a:p>
+          <a:p>
+            <a:pPr>
+              <a:spcAft>
+                <a:spcPts val="600"/>
+              </a:spcAft>
+            </a:pPr>
+            <a:r>
+              <a:rPr sz="1200">
+                <a:solidFill>
+                  <a:srgbClr val="334E68"/>
+                </a:solidFill>
+                <a:latin typeface="Calibri"/>
+              </a:rPr>
+              <a:t>9. Si no se puede reconstruir la posición anterior a una jugada ilegal, ¿desde dónde continúa la partida?</a:t>
+            </a:r>
+          </a:p>
+          <a:p>
+            <a:pPr>
+              <a:spcAft>
+                <a:spcPts val="600"/>
+              </a:spcAft>
+            </a:pPr>
+            <a:r>
+              <a:rPr sz="1200">
+                <a:solidFill>
+                  <a:srgbClr val="334E68"/>
+                </a:solidFill>
+                <a:latin typeface="Calibri"/>
+              </a:rPr>
+              <a:t>10. ¿Cuál es la sanción más severa de la lista del art. 12.9?</a:t>
+            </a:r>
+          </a:p>
+          <a:p>
+            <a:pPr>
+              <a:spcAft>
+                <a:spcPts val="600"/>
+              </a:spcAft>
+            </a:pPr>
+            <a:r>
+              <a:rPr sz="1200">
+                <a:solidFill>
+                  <a:srgbClr val="334E68"/>
+                </a:solidFill>
+                <a:latin typeface="Calibri"/>
+              </a:rPr>
+              <a:t>11. Un jugador toca una pieza con intención de capturarla. Si luego quiere reclamar que el rival incumplió la regla de pieza tocada, ¿puede hacerlo?</a:t>
             </a:r>
           </a:p>
         </p:txBody>

--- a/cursos/recursos/formacion-ajedrez/02-reglas-de-competicion.pptx
+++ b/cursos/recursos/formacion-ajedrez/02-reglas-de-competicion.pptx
@@ -9229,7 +9229,7 @@
                 </a:solidFill>
                 <a:latin typeface="Calibri"/>
               </a:rPr>
-              <a:t>15 minutos</a:t>
+              <a:t>10 minutos</a:t>
             </a:r>
           </a:p>
           <a:p>
@@ -10767,7 +10767,7 @@
                 </a:solidFill>
                 <a:latin typeface="Calibri"/>
               </a:rPr>
-              <a:t>Sesión 2 · 5 horas (300 minutos)</a:t>
+              <a:t>Sesión 2 · 4 horas (240 minutos)</a:t>
             </a:r>
           </a:p>
         </p:txBody>
@@ -10915,7 +10915,7 @@
                           </a:solidFill>
                           <a:latin typeface="Calibri"/>
                         </a:rPr>
-                        <a:t>0:00 – 0:15</a:t>
+                        <a:t>0:00 – 0:10</a:t>
                       </a:r>
                     </a:p>
                   </a:txBody>
@@ -10937,7 +10937,7 @@
                           </a:solidFill>
                           <a:latin typeface="Calibri"/>
                         </a:rPr>
-                        <a:t>15 min</a:t>
+                        <a:t>10 min</a:t>
                       </a:r>
                     </a:p>
                   </a:txBody>
@@ -10983,7 +10983,7 @@
                           </a:solidFill>
                           <a:latin typeface="Calibri"/>
                         </a:rPr>
-                        <a:t>0:15 – 1:00</a:t>
+                        <a:t>0:10 – 0:45</a:t>
                       </a:r>
                     </a:p>
                   </a:txBody>
@@ -11005,7 +11005,7 @@
                           </a:solidFill>
                           <a:latin typeface="Calibri"/>
                         </a:rPr>
-                        <a:t>45 min</a:t>
+                        <a:t>35 min</a:t>
                       </a:r>
                     </a:p>
                   </a:txBody>
@@ -11051,7 +11051,7 @@
                           </a:solidFill>
                           <a:latin typeface="Calibri"/>
                         </a:rPr>
-                        <a:t>1:00 – 1:30</a:t>
+                        <a:t>0:45 – 1:10</a:t>
                       </a:r>
                     </a:p>
                   </a:txBody>
@@ -11073,7 +11073,7 @@
                           </a:solidFill>
                           <a:latin typeface="Calibri"/>
                         </a:rPr>
-                        <a:t>30 min</a:t>
+                        <a:t>25 min</a:t>
                       </a:r>
                     </a:p>
                   </a:txBody>
@@ -11119,7 +11119,7 @@
                           </a:solidFill>
                           <a:latin typeface="Calibri"/>
                         </a:rPr>
-                        <a:t>1:30 – 1:45</a:t>
+                        <a:t>1:10 – 1:20</a:t>
                       </a:r>
                     </a:p>
                   </a:txBody>
@@ -11141,7 +11141,7 @@
                           </a:solidFill>
                           <a:latin typeface="Calibri"/>
                         </a:rPr>
-                        <a:t>15 min</a:t>
+                        <a:t>10 min</a:t>
                       </a:r>
                     </a:p>
                   </a:txBody>
@@ -11187,7 +11187,7 @@
                           </a:solidFill>
                           <a:latin typeface="Calibri"/>
                         </a:rPr>
-                        <a:t>1:45 – 2:30</a:t>
+                        <a:t>1:20 – 1:55</a:t>
                       </a:r>
                     </a:p>
                   </a:txBody>
@@ -11209,7 +11209,7 @@
                           </a:solidFill>
                           <a:latin typeface="Calibri"/>
                         </a:rPr>
-                        <a:t>45 min</a:t>
+                        <a:t>35 min</a:t>
                       </a:r>
                     </a:p>
                   </a:txBody>
@@ -11255,7 +11255,7 @@
                           </a:solidFill>
                           <a:latin typeface="Calibri"/>
                         </a:rPr>
-                        <a:t>2:30 – 3:00</a:t>
+                        <a:t>1:55 – 2:20</a:t>
                       </a:r>
                     </a:p>
                   </a:txBody>
@@ -11277,7 +11277,7 @@
                           </a:solidFill>
                           <a:latin typeface="Calibri"/>
                         </a:rPr>
-                        <a:t>30 min</a:t>
+                        <a:t>25 min</a:t>
                       </a:r>
                     </a:p>
                   </a:txBody>
@@ -11323,7 +11323,7 @@
                           </a:solidFill>
                           <a:latin typeface="Calibri"/>
                         </a:rPr>
-                        <a:t>3:00 – 3:15</a:t>
+                        <a:t>2:20 – 2:30</a:t>
                       </a:r>
                     </a:p>
                   </a:txBody>
@@ -11345,7 +11345,7 @@
                           </a:solidFill>
                           <a:latin typeface="Calibri"/>
                         </a:rPr>
-                        <a:t>15 min</a:t>
+                        <a:t>10 min</a:t>
                       </a:r>
                     </a:p>
                   </a:txBody>
@@ -11391,7 +11391,7 @@
                           </a:solidFill>
                           <a:latin typeface="Calibri"/>
                         </a:rPr>
-                        <a:t>3:15 – 4:05</a:t>
+                        <a:t>2:30 – 3:15</a:t>
                       </a:r>
                     </a:p>
                   </a:txBody>
@@ -11413,7 +11413,7 @@
                           </a:solidFill>
                           <a:latin typeface="Calibri"/>
                         </a:rPr>
-                        <a:t>50 min</a:t>
+                        <a:t>45 min</a:t>
                       </a:r>
                     </a:p>
                   </a:txBody>
@@ -11459,7 +11459,7 @@
                           </a:solidFill>
                           <a:latin typeface="Calibri"/>
                         </a:rPr>
-                        <a:t>4:05 – 4:40</a:t>
+                        <a:t>3:15 – 3:45</a:t>
                       </a:r>
                     </a:p>
                   </a:txBody>
@@ -11481,7 +11481,7 @@
                           </a:solidFill>
                           <a:latin typeface="Calibri"/>
                         </a:rPr>
-                        <a:t>35 min</a:t>
+                        <a:t>30 min</a:t>
                       </a:r>
                     </a:p>
                   </a:txBody>
@@ -11527,7 +11527,7 @@
                           </a:solidFill>
                           <a:latin typeface="Calibri"/>
                         </a:rPr>
-                        <a:t>4:40 – 5:00</a:t>
+                        <a:t>3:45 – 4:00</a:t>
                       </a:r>
                     </a:p>
                   </a:txBody>
@@ -11549,7 +11549,7 @@
                           </a:solidFill>
                           <a:latin typeface="Calibri"/>
                         </a:rPr>
-                        <a:t>20 min</a:t>
+                        <a:t>15 min</a:t>
                       </a:r>
                     </a:p>
                   </a:txBody>
@@ -15313,7 +15313,7 @@
                 </a:solidFill>
                 <a:latin typeface="Calibri"/>
               </a:rPr>
-              <a:t>15 minutos</a:t>
+              <a:t>10 minutos</a:t>
             </a:r>
           </a:p>
           <a:p>
